--- a/presentacion_ml.pptx
+++ b/presentacion_ml.pptx
@@ -5,19 +5,17 @@
     <p:sldMasterId id="2147483648" r:id="rId1"/>
   </p:sldMasterIdLst>
   <p:notesMasterIdLst>
-    <p:notesMasterId r:id="rId12"/>
+    <p:notesMasterId r:id="rId10"/>
   </p:notesMasterIdLst>
   <p:sldIdLst>
     <p:sldId id="256" r:id="rId2"/>
     <p:sldId id="258" r:id="rId3"/>
-    <p:sldId id="259" r:id="rId4"/>
-    <p:sldId id="260" r:id="rId5"/>
-    <p:sldId id="261" r:id="rId6"/>
-    <p:sldId id="262" r:id="rId7"/>
-    <p:sldId id="263" r:id="rId8"/>
-    <p:sldId id="264" r:id="rId9"/>
-    <p:sldId id="265" r:id="rId10"/>
-    <p:sldId id="266" r:id="rId11"/>
+    <p:sldId id="260" r:id="rId4"/>
+    <p:sldId id="259" r:id="rId5"/>
+    <p:sldId id="262" r:id="rId6"/>
+    <p:sldId id="263" r:id="rId7"/>
+    <p:sldId id="265" r:id="rId8"/>
+    <p:sldId id="266" r:id="rId9"/>
   </p:sldIdLst>
   <p:sldSz cx="9144000" cy="5143500" type="screen16x9"/>
   <p:notesSz cx="5143500" cy="9144000"/>
@@ -761,675 +759,6 @@
 </file>
 
 <file path=ppt/charts/chart3.xml><?xml version="1.0" encoding="utf-8"?>
-<c:chartSpace xmlns:c="http://schemas.openxmlformats.org/drawingml/2006/chart" xmlns:a="http://schemas.openxmlformats.org/drawingml/2006/main" xmlns:r="http://schemas.openxmlformats.org/officeDocument/2006/relationships" xmlns:c16r2="http://schemas.microsoft.com/office/drawing/2015/06/chart">
-  <c:date1904 val="0"/>
-  <c:lang val="es-ES"/>
-  <c:roundedCorners val="1"/>
-  <c:style val="2"/>
-  <c:chart>
-    <c:title>
-      <c:tx>
-        <c:rich>
-          <a:bodyPr/>
-          <a:lstStyle/>
-          <a:p>
-            <a:pPr>
-              <a:defRPr sz="1300" b="0" i="0" u="none" strike="noStrike">
-                <a:solidFill>
-                  <a:srgbClr val="0F2D5B"/>
-                </a:solidFill>
-                <a:latin typeface="Arial"/>
-              </a:defRPr>
-            </a:pPr>
-            <a:r>
-              <a:rPr sz="1300" b="0" i="0" u="none" strike="noStrike">
-                <a:solidFill>
-                  <a:srgbClr val="0F2D5B"/>
-                </a:solidFill>
-                <a:latin typeface="Arial"/>
-              </a:rPr>
-              <a:t>Distribución Etiqueta (label)</a:t>
-            </a:r>
-          </a:p>
-        </c:rich>
-      </c:tx>
-      <c:overlay val="0"/>
-    </c:title>
-    <c:autoTitleDeleted val="0"/>
-    <c:plotArea>
-      <c:layout/>
-      <c:pieChart>
-        <c:varyColors val="1"/>
-        <c:ser>
-          <c:idx val="0"/>
-          <c:order val="0"/>
-          <c:tx>
-            <c:strRef>
-              <c:f>Sheet1!$B$1</c:f>
-              <c:strCache>
-                <c:ptCount val="1"/>
-                <c:pt idx="0">
-                  <c:v>Distribución etiqueta</c:v>
-                </c:pt>
-              </c:strCache>
-            </c:strRef>
-          </c:tx>
-          <c:spPr>
-            <a:solidFill>
-              <a:schemeClr val="accent1"/>
-            </a:solidFill>
-            <a:ln w="9525" cap="flat">
-              <a:solidFill>
-                <a:srgbClr val="F9F9F9"/>
-              </a:solidFill>
-              <a:prstDash val="solid"/>
-              <a:round/>
-            </a:ln>
-            <a:effectLst/>
-          </c:spPr>
-          <c:dPt>
-            <c:idx val="0"/>
-            <c:bubble3D val="0"/>
-            <c:spPr>
-              <a:solidFill>
-                <a:srgbClr val="0F2D5B"/>
-              </a:solidFill>
-              <a:effectLst/>
-            </c:spPr>
-            <c:extLst>
-              <c:ext xmlns:c16="http://schemas.microsoft.com/office/drawing/2014/chart" uri="{C3380CC4-5D6E-409C-BE32-E72D297353CC}">
-                <c16:uniqueId val="{00000001-AD8F-454B-B359-E48FE3B8BFA6}"/>
-              </c:ext>
-            </c:extLst>
-          </c:dPt>
-          <c:dPt>
-            <c:idx val="1"/>
-            <c:bubble3D val="0"/>
-            <c:spPr>
-              <a:solidFill>
-                <a:srgbClr val="0D9488"/>
-              </a:solidFill>
-              <a:effectLst/>
-            </c:spPr>
-            <c:extLst>
-              <c:ext xmlns:c16="http://schemas.microsoft.com/office/drawing/2014/chart" uri="{C3380CC4-5D6E-409C-BE32-E72D297353CC}">
-                <c16:uniqueId val="{00000003-AD8F-454B-B359-E48FE3B8BFA6}"/>
-              </c:ext>
-            </c:extLst>
-          </c:dPt>
-          <c:dLbls>
-            <c:dLbl>
-              <c:idx val="0"/>
-              <c:numFmt formatCode="0%" sourceLinked="0"/>
-              <c:spPr/>
-              <c:txPr>
-                <a:bodyPr/>
-                <a:lstStyle/>
-                <a:p>
-                  <a:pPr>
-                    <a:defRPr sz="1200" b="0" i="0" u="none" strike="noStrike">
-                      <a:solidFill>
-                        <a:srgbClr val="000000"/>
-                      </a:solidFill>
-                      <a:latin typeface="Arial"/>
-                    </a:defRPr>
-                  </a:pPr>
-                  <a:endParaRPr lang="es-ES"/>
-                </a:p>
-              </c:txPr>
-              <c:showLegendKey val="0"/>
-              <c:showVal val="0"/>
-              <c:showCatName val="0"/>
-              <c:showSerName val="0"/>
-              <c:showPercent val="1"/>
-              <c:showBubbleSize val="0"/>
-              <c:extLst>
-                <c:ext xmlns:c15="http://schemas.microsoft.com/office/drawing/2012/chart" uri="{CE6537A1-D6FC-4f65-9D91-7224C49458BB}"/>
-                <c:ext xmlns:c16="http://schemas.microsoft.com/office/drawing/2014/chart" uri="{C3380CC4-5D6E-409C-BE32-E72D297353CC}">
-                  <c16:uniqueId val="{00000001-AD8F-454B-B359-E48FE3B8BFA6}"/>
-                </c:ext>
-              </c:extLst>
-            </c:dLbl>
-            <c:dLbl>
-              <c:idx val="1"/>
-              <c:numFmt formatCode="0%" sourceLinked="0"/>
-              <c:spPr/>
-              <c:txPr>
-                <a:bodyPr/>
-                <a:lstStyle/>
-                <a:p>
-                  <a:pPr>
-                    <a:defRPr sz="1200" b="0" i="0" u="none" strike="noStrike">
-                      <a:solidFill>
-                        <a:srgbClr val="000000"/>
-                      </a:solidFill>
-                      <a:latin typeface="Arial"/>
-                    </a:defRPr>
-                  </a:pPr>
-                  <a:endParaRPr lang="es-ES"/>
-                </a:p>
-              </c:txPr>
-              <c:showLegendKey val="0"/>
-              <c:showVal val="0"/>
-              <c:showCatName val="0"/>
-              <c:showSerName val="0"/>
-              <c:showPercent val="1"/>
-              <c:showBubbleSize val="0"/>
-              <c:extLst>
-                <c:ext xmlns:c15="http://schemas.microsoft.com/office/drawing/2012/chart" uri="{CE6537A1-D6FC-4f65-9D91-7224C49458BB}"/>
-                <c:ext xmlns:c16="http://schemas.microsoft.com/office/drawing/2014/chart" uri="{C3380CC4-5D6E-409C-BE32-E72D297353CC}">
-                  <c16:uniqueId val="{00000003-AD8F-454B-B359-E48FE3B8BFA6}"/>
-                </c:ext>
-              </c:extLst>
-            </c:dLbl>
-            <c:numFmt formatCode="0%" sourceLinked="0"/>
-            <c:spPr>
-              <a:noFill/>
-              <a:ln>
-                <a:noFill/>
-              </a:ln>
-              <a:effectLst/>
-            </c:spPr>
-            <c:txPr>
-              <a:bodyPr/>
-              <a:lstStyle/>
-              <a:p>
-                <a:pPr>
-                  <a:defRPr sz="1800" b="0" i="0" u="none" strike="noStrike">
-                    <a:solidFill>
-                      <a:srgbClr val="000000"/>
-                    </a:solidFill>
-                    <a:latin typeface="Arial"/>
-                  </a:defRPr>
-                </a:pPr>
-                <a:endParaRPr lang="es-ES"/>
-              </a:p>
-            </c:txPr>
-            <c:dLblPos val="ctr"/>
-            <c:showLegendKey val="0"/>
-            <c:showVal val="0"/>
-            <c:showCatName val="1"/>
-            <c:showSerName val="0"/>
-            <c:showPercent val="1"/>
-            <c:showBubbleSize val="0"/>
-            <c:showLeaderLines val="0"/>
-            <c:extLst>
-              <c:ext xmlns:c15="http://schemas.microsoft.com/office/drawing/2012/chart" uri="{CE6537A1-D6FC-4f65-9D91-7224C49458BB}"/>
-            </c:extLst>
-          </c:dLbls>
-          <c:cat>
-            <c:strRef>
-              <c:f>Sheet1!$A$2:$A$3</c:f>
-              <c:strCache>
-                <c:ptCount val="2"/>
-                <c:pt idx="0">
-                  <c:v>No recompró (61%)</c:v>
-                </c:pt>
-                <c:pt idx="1">
-                  <c:v>Recompró (39%)</c:v>
-                </c:pt>
-              </c:strCache>
-            </c:strRef>
-          </c:cat>
-          <c:val>
-            <c:numRef>
-              <c:f>Sheet1!$B$2:$B$3</c:f>
-              <c:numCache>
-                <c:formatCode>General</c:formatCode>
-                <c:ptCount val="2"/>
-                <c:pt idx="0">
-                  <c:v>61</c:v>
-                </c:pt>
-                <c:pt idx="1">
-                  <c:v>39</c:v>
-                </c:pt>
-              </c:numCache>
-            </c:numRef>
-          </c:val>
-          <c:extLst>
-            <c:ext xmlns:c16="http://schemas.microsoft.com/office/drawing/2014/chart" uri="{C3380CC4-5D6E-409C-BE32-E72D297353CC}">
-              <c16:uniqueId val="{00000004-AD8F-454B-B359-E48FE3B8BFA6}"/>
-            </c:ext>
-          </c:extLst>
-        </c:ser>
-        <c:dLbls>
-          <c:showLegendKey val="0"/>
-          <c:showVal val="0"/>
-          <c:showCatName val="0"/>
-          <c:showSerName val="0"/>
-          <c:showPercent val="0"/>
-          <c:showBubbleSize val="0"/>
-          <c:showLeaderLines val="0"/>
-        </c:dLbls>
-        <c:firstSliceAng val="0"/>
-      </c:pieChart>
-      <c:spPr>
-        <a:noFill/>
-        <a:ln>
-          <a:noFill/>
-        </a:ln>
-        <a:effectLst/>
-      </c:spPr>
-    </c:plotArea>
-    <c:legend>
-      <c:legendPos val="b"/>
-      <c:overlay val="0"/>
-      <c:txPr>
-        <a:bodyPr/>
-        <a:lstStyle/>
-        <a:p>
-          <a:pPr>
-            <a:defRPr sz="1100"/>
-          </a:pPr>
-          <a:endParaRPr lang="en-US"/>
-        </a:p>
-      </c:txPr>
-    </c:legend>
-    <c:plotVisOnly val="1"/>
-    <c:dispBlanksAs val="span"/>
-    <c:showDLblsOverMax val="1"/>
-  </c:chart>
-  <c:spPr>
-    <a:solidFill>
-      <a:srgbClr val="FFFFFF"/>
-    </a:solidFill>
-    <a:ln>
-      <a:noFill/>
-    </a:ln>
-    <a:effectLst/>
-  </c:spPr>
-  <c:externalData r:id="rId1">
-    <c:autoUpdate val="0"/>
-  </c:externalData>
-</c:chartSpace>
-</file>
-
-<file path=ppt/charts/chart4.xml><?xml version="1.0" encoding="utf-8"?>
-<c:chartSpace xmlns:c="http://schemas.openxmlformats.org/drawingml/2006/chart" xmlns:a="http://schemas.openxmlformats.org/drawingml/2006/main" xmlns:r="http://schemas.openxmlformats.org/officeDocument/2006/relationships" xmlns:c16r2="http://schemas.microsoft.com/office/drawing/2015/06/chart">
-  <c:date1904 val="0"/>
-  <c:lang val="es-ES"/>
-  <c:roundedCorners val="1"/>
-  <c:style val="2"/>
-  <c:chart>
-    <c:title>
-      <c:tx>
-        <c:rich>
-          <a:bodyPr/>
-          <a:lstStyle/>
-          <a:p>
-            <a:pPr>
-              <a:defRPr sz="1300" b="0" i="0" u="none" strike="noStrike">
-                <a:solidFill>
-                  <a:srgbClr val="0F2D5B"/>
-                </a:solidFill>
-                <a:latin typeface="Arial"/>
-              </a:defRPr>
-            </a:pPr>
-            <a:r>
-              <a:rPr sz="1300" b="0" i="0" u="none" strike="noStrike">
-                <a:solidFill>
-                  <a:srgbClr val="0F2D5B"/>
-                </a:solidFill>
-                <a:latin typeface="Arial"/>
-              </a:rPr>
-              <a:t>Métricas RFM: Recompra vs No Recompra</a:t>
-            </a:r>
-          </a:p>
-        </c:rich>
-      </c:tx>
-      <c:overlay val="0"/>
-    </c:title>
-    <c:autoTitleDeleted val="0"/>
-    <c:plotArea>
-      <c:layout/>
-      <c:barChart>
-        <c:barDir val="col"/>
-        <c:grouping val="clustered"/>
-        <c:varyColors val="0"/>
-        <c:ser>
-          <c:idx val="0"/>
-          <c:order val="0"/>
-          <c:tx>
-            <c:strRef>
-              <c:f>Sheet1!$B$1</c:f>
-              <c:strCache>
-                <c:ptCount val="1"/>
-                <c:pt idx="0">
-                  <c:v>No recompró</c:v>
-                </c:pt>
-              </c:strCache>
-            </c:strRef>
-          </c:tx>
-          <c:spPr>
-            <a:solidFill>
-              <a:srgbClr val="0F2D5B"/>
-            </a:solidFill>
-            <a:effectLst/>
-          </c:spPr>
-          <c:invertIfNegative val="0"/>
-          <c:dLbls>
-            <c:numFmt formatCode="#,##0" sourceLinked="0"/>
-            <c:spPr>
-              <a:noFill/>
-              <a:ln>
-                <a:noFill/>
-              </a:ln>
-              <a:effectLst/>
-            </c:spPr>
-            <c:txPr>
-              <a:bodyPr/>
-              <a:lstStyle/>
-              <a:p>
-                <a:pPr>
-                  <a:defRPr sz="1200" b="0" i="0" u="none" strike="noStrike">
-                    <a:solidFill>
-                      <a:srgbClr val="1E293B"/>
-                    </a:solidFill>
-                    <a:latin typeface="Arial"/>
-                  </a:defRPr>
-                </a:pPr>
-                <a:endParaRPr lang="es-ES"/>
-              </a:p>
-            </c:txPr>
-            <c:showLegendKey val="0"/>
-            <c:showVal val="1"/>
-            <c:showCatName val="0"/>
-            <c:showSerName val="0"/>
-            <c:showPercent val="0"/>
-            <c:showBubbleSize val="0"/>
-            <c:showLeaderLines val="0"/>
-            <c:extLst>
-              <c:ext xmlns:c15="http://schemas.microsoft.com/office/drawing/2012/chart" uri="{CE6537A1-D6FC-4f65-9D91-7224C49458BB}">
-                <c15:showLeaderLines val="0"/>
-              </c:ext>
-            </c:extLst>
-          </c:dLbls>
-          <c:cat>
-            <c:strRef>
-              <c:f>Sheet1!$A$2:$A$4</c:f>
-              <c:strCache>
-                <c:ptCount val="3"/>
-                <c:pt idx="0">
-                  <c:v>Recencia media (días)</c:v>
-                </c:pt>
-                <c:pt idx="1">
-                  <c:v>Frecuencia media (facturas)</c:v>
-                </c:pt>
-                <c:pt idx="2">
-                  <c:v>Revenue medio (£ index)</c:v>
-                </c:pt>
-              </c:strCache>
-            </c:strRef>
-          </c:cat>
-          <c:val>
-            <c:numRef>
-              <c:f>Sheet1!$B$2:$B$4</c:f>
-              <c:numCache>
-                <c:formatCode>General</c:formatCode>
-                <c:ptCount val="3"/>
-                <c:pt idx="0">
-                  <c:v>185</c:v>
-                </c:pt>
-                <c:pt idx="1">
-                  <c:v>3.2</c:v>
-                </c:pt>
-                <c:pt idx="2">
-                  <c:v>38</c:v>
-                </c:pt>
-              </c:numCache>
-            </c:numRef>
-          </c:val>
-          <c:extLst>
-            <c:ext xmlns:c16="http://schemas.microsoft.com/office/drawing/2014/chart" uri="{C3380CC4-5D6E-409C-BE32-E72D297353CC}">
-              <c16:uniqueId val="{00000000-CAAA-4131-9552-22DDA7C17B54}"/>
-            </c:ext>
-          </c:extLst>
-        </c:ser>
-        <c:ser>
-          <c:idx val="1"/>
-          <c:order val="1"/>
-          <c:tx>
-            <c:strRef>
-              <c:f>Sheet1!$C$1</c:f>
-              <c:strCache>
-                <c:ptCount val="1"/>
-                <c:pt idx="0">
-                  <c:v>Recompró</c:v>
-                </c:pt>
-              </c:strCache>
-            </c:strRef>
-          </c:tx>
-          <c:spPr>
-            <a:solidFill>
-              <a:srgbClr val="0D9488"/>
-            </a:solidFill>
-            <a:effectLst/>
-          </c:spPr>
-          <c:invertIfNegative val="0"/>
-          <c:dLbls>
-            <c:numFmt formatCode="#,##0" sourceLinked="0"/>
-            <c:spPr>
-              <a:noFill/>
-              <a:ln>
-                <a:noFill/>
-              </a:ln>
-              <a:effectLst/>
-            </c:spPr>
-            <c:txPr>
-              <a:bodyPr/>
-              <a:lstStyle/>
-              <a:p>
-                <a:pPr>
-                  <a:defRPr sz="1200" b="0" i="0" u="none" strike="noStrike">
-                    <a:solidFill>
-                      <a:srgbClr val="1E293B"/>
-                    </a:solidFill>
-                    <a:latin typeface="Arial"/>
-                  </a:defRPr>
-                </a:pPr>
-                <a:endParaRPr lang="es-ES"/>
-              </a:p>
-            </c:txPr>
-            <c:showLegendKey val="0"/>
-            <c:showVal val="1"/>
-            <c:showCatName val="0"/>
-            <c:showSerName val="0"/>
-            <c:showPercent val="0"/>
-            <c:showBubbleSize val="0"/>
-            <c:showLeaderLines val="0"/>
-            <c:extLst>
-              <c:ext xmlns:c15="http://schemas.microsoft.com/office/drawing/2012/chart" uri="{CE6537A1-D6FC-4f65-9D91-7224C49458BB}">
-                <c15:showLeaderLines val="0"/>
-              </c:ext>
-            </c:extLst>
-          </c:dLbls>
-          <c:cat>
-            <c:strRef>
-              <c:f>Sheet1!$A$2:$A$4</c:f>
-              <c:strCache>
-                <c:ptCount val="3"/>
-                <c:pt idx="0">
-                  <c:v>Recencia media (días)</c:v>
-                </c:pt>
-                <c:pt idx="1">
-                  <c:v>Frecuencia media (facturas)</c:v>
-                </c:pt>
-                <c:pt idx="2">
-                  <c:v>Revenue medio (£ index)</c:v>
-                </c:pt>
-              </c:strCache>
-            </c:strRef>
-          </c:cat>
-          <c:val>
-            <c:numRef>
-              <c:f>Sheet1!$C$2:$C$4</c:f>
-              <c:numCache>
-                <c:formatCode>General</c:formatCode>
-                <c:ptCount val="3"/>
-                <c:pt idx="0">
-                  <c:v>68</c:v>
-                </c:pt>
-                <c:pt idx="1">
-                  <c:v>8.9</c:v>
-                </c:pt>
-                <c:pt idx="2">
-                  <c:v>82</c:v>
-                </c:pt>
-              </c:numCache>
-            </c:numRef>
-          </c:val>
-          <c:extLst>
-            <c:ext xmlns:c16="http://schemas.microsoft.com/office/drawing/2014/chart" uri="{C3380CC4-5D6E-409C-BE32-E72D297353CC}">
-              <c16:uniqueId val="{00000001-CAAA-4131-9552-22DDA7C17B54}"/>
-            </c:ext>
-          </c:extLst>
-        </c:ser>
-        <c:dLbls>
-          <c:showLegendKey val="0"/>
-          <c:showVal val="1"/>
-          <c:showCatName val="0"/>
-          <c:showSerName val="0"/>
-          <c:showPercent val="0"/>
-          <c:showBubbleSize val="0"/>
-        </c:dLbls>
-        <c:gapWidth val="150"/>
-        <c:axId val="2094734554"/>
-        <c:axId val="2094734552"/>
-      </c:barChart>
-      <c:catAx>
-        <c:axId val="2094734554"/>
-        <c:scaling>
-          <c:orientation val="minMax"/>
-        </c:scaling>
-        <c:delete val="0"/>
-        <c:axPos val="b"/>
-        <c:numFmt formatCode="General" sourceLinked="1"/>
-        <c:majorTickMark val="out"/>
-        <c:minorTickMark val="none"/>
-        <c:tickLblPos val="low"/>
-        <c:spPr>
-          <a:ln w="12700" cap="flat">
-            <a:solidFill>
-              <a:srgbClr val="888888"/>
-            </a:solidFill>
-            <a:prstDash val="solid"/>
-            <a:round/>
-          </a:ln>
-        </c:spPr>
-        <c:txPr>
-          <a:bodyPr/>
-          <a:lstStyle/>
-          <a:p>
-            <a:pPr>
-              <a:defRPr sz="1200" b="0" i="0" u="none" strike="noStrike">
-                <a:solidFill>
-                  <a:srgbClr val="64748B"/>
-                </a:solidFill>
-                <a:latin typeface="Arial"/>
-              </a:defRPr>
-            </a:pPr>
-            <a:endParaRPr lang="en-US"/>
-          </a:p>
-        </c:txPr>
-        <c:crossAx val="2094734552"/>
-        <c:crosses val="autoZero"/>
-        <c:auto val="1"/>
-        <c:lblAlgn val="ctr"/>
-        <c:lblOffset val="100"/>
-        <c:noMultiLvlLbl val="1"/>
-      </c:catAx>
-      <c:valAx>
-        <c:axId val="2094734552"/>
-        <c:scaling>
-          <c:orientation val="minMax"/>
-        </c:scaling>
-        <c:delete val="0"/>
-        <c:axPos val="l"/>
-        <c:majorGridlines>
-          <c:spPr>
-            <a:ln w="6350" cap="flat">
-              <a:solidFill>
-                <a:srgbClr val="E2E8F0"/>
-              </a:solidFill>
-              <a:prstDash val="solid"/>
-              <a:round/>
-            </a:ln>
-          </c:spPr>
-        </c:majorGridlines>
-        <c:numFmt formatCode="General" sourceLinked="0"/>
-        <c:majorTickMark val="out"/>
-        <c:minorTickMark val="none"/>
-        <c:tickLblPos val="nextTo"/>
-        <c:spPr>
-          <a:ln w="12700" cap="flat">
-            <a:solidFill>
-              <a:srgbClr val="888888"/>
-            </a:solidFill>
-            <a:prstDash val="solid"/>
-            <a:round/>
-          </a:ln>
-        </c:spPr>
-        <c:txPr>
-          <a:bodyPr/>
-          <a:lstStyle/>
-          <a:p>
-            <a:pPr>
-              <a:defRPr sz="1200" b="0" i="0" u="none" strike="noStrike">
-                <a:solidFill>
-                  <a:srgbClr val="64748B"/>
-                </a:solidFill>
-                <a:latin typeface="Arial"/>
-              </a:defRPr>
-            </a:pPr>
-            <a:endParaRPr lang="en-US"/>
-          </a:p>
-        </c:txPr>
-        <c:crossAx val="2094734554"/>
-        <c:crosses val="autoZero"/>
-        <c:crossBetween val="between"/>
-      </c:valAx>
-      <c:spPr>
-        <a:noFill/>
-        <a:ln>
-          <a:noFill/>
-        </a:ln>
-        <a:effectLst/>
-      </c:spPr>
-    </c:plotArea>
-    <c:legend>
-      <c:legendPos val="b"/>
-      <c:overlay val="0"/>
-      <c:txPr>
-        <a:bodyPr/>
-        <a:lstStyle/>
-        <a:p>
-          <a:pPr>
-            <a:defRPr sz="1100"/>
-          </a:pPr>
-          <a:endParaRPr lang="en-US"/>
-        </a:p>
-      </c:txPr>
-    </c:legend>
-    <c:plotVisOnly val="1"/>
-    <c:dispBlanksAs val="span"/>
-    <c:showDLblsOverMax val="1"/>
-  </c:chart>
-  <c:spPr>
-    <a:solidFill>
-      <a:srgbClr val="FFFFFF"/>
-    </a:solidFill>
-    <a:ln>
-      <a:noFill/>
-    </a:ln>
-    <a:effectLst/>
-  </c:spPr>
-  <c:externalData r:id="rId1">
-    <c:autoUpdate val="0"/>
-  </c:externalData>
-</c:chartSpace>
-</file>
-
-<file path=ppt/charts/chart5.xml><?xml version="1.0" encoding="utf-8"?>
 <c:chartSpace xmlns:c="http://schemas.openxmlformats.org/drawingml/2006/chart" xmlns:a="http://schemas.openxmlformats.org/drawingml/2006/main" xmlns:r="http://schemas.openxmlformats.org/officeDocument/2006/relationships" xmlns:c16r2="http://schemas.microsoft.com/office/drawing/2015/06/chart">
   <c:date1904 val="0"/>
   <c:lang val="es-ES"/>
@@ -1775,7 +1104,7 @@
 </c:chartSpace>
 </file>
 
-<file path=ppt/charts/chart6.xml><?xml version="1.0" encoding="utf-8"?>
+<file path=ppt/charts/chart4.xml><?xml version="1.0" encoding="utf-8"?>
 <c:chartSpace xmlns:c="http://schemas.openxmlformats.org/drawingml/2006/chart" xmlns:a="http://schemas.openxmlformats.org/drawingml/2006/main" xmlns:r="http://schemas.openxmlformats.org/officeDocument/2006/relationships" xmlns:c16r2="http://schemas.microsoft.com/office/drawing/2015/06/chart">
   <c:date1904 val="0"/>
   <c:lang val="es-ES"/>
@@ -2304,12 +1633,19 @@
 </c:chartSpace>
 </file>
 
-<file path=ppt/charts/chart7.xml><?xml version="1.0" encoding="utf-8"?>
+<file path=ppt/charts/chart5.xml><?xml version="1.0" encoding="utf-8"?>
 <c:chartSpace xmlns:c="http://schemas.openxmlformats.org/drawingml/2006/chart" xmlns:a="http://schemas.openxmlformats.org/drawingml/2006/main" xmlns:r="http://schemas.openxmlformats.org/officeDocument/2006/relationships" xmlns:c16r2="http://schemas.microsoft.com/office/drawing/2015/06/chart">
   <c:date1904 val="0"/>
   <c:lang val="es-ES"/>
   <c:roundedCorners val="1"/>
-  <c:style val="2"/>
+  <mc:AlternateContent xmlns:mc="http://schemas.openxmlformats.org/markup-compatibility/2006">
+    <mc:Choice xmlns:c14="http://schemas.microsoft.com/office/drawing/2007/8/2/chart" Requires="c14">
+      <c14:style val="102"/>
+    </mc:Choice>
+    <mc:Fallback>
+      <c:style val="2"/>
+    </mc:Fallback>
+  </mc:AlternateContent>
   <c:chart>
     <c:title>
       <c:tx>
@@ -2368,6 +1704,27 @@
           </c:spPr>
           <c:invertIfNegative val="0"/>
           <c:dLbls>
+            <c:dLbl>
+              <c:idx val="0"/>
+              <c:layout>
+                <c:manualLayout>
+                  <c:x val="-6.9444184060325792E-2"/>
+                  <c:y val="0"/>
+                </c:manualLayout>
+              </c:layout>
+              <c:showLegendKey val="0"/>
+              <c:showVal val="1"/>
+              <c:showCatName val="0"/>
+              <c:showSerName val="0"/>
+              <c:showPercent val="0"/>
+              <c:showBubbleSize val="0"/>
+              <c:extLst>
+                <c:ext xmlns:c15="http://schemas.microsoft.com/office/drawing/2012/chart" uri="{CE6537A1-D6FC-4f65-9D91-7224C49458BB}"/>
+                <c:ext xmlns:c16="http://schemas.microsoft.com/office/drawing/2014/chart" uri="{C3380CC4-5D6E-409C-BE32-E72D297353CC}">
+                  <c16:uniqueId val="{00000001-5D93-4244-9BF0-EEFFE8087AF9}"/>
+                </c:ext>
+              </c:extLst>
+            </c:dLbl>
             <c:numFmt formatCode="#,##0" sourceLinked="0"/>
             <c:spPr>
               <a:noFill/>
@@ -2459,7 +1816,7 @@
           </c:val>
           <c:extLst>
             <c:ext xmlns:c16="http://schemas.microsoft.com/office/drawing/2014/chart" uri="{C3380CC4-5D6E-409C-BE32-E72D297353CC}">
-              <c16:uniqueId val="{00000000-E06D-499C-9733-5B7E68C1A20E}"/>
+              <c16:uniqueId val="{00000000-5D93-4244-9BF0-EEFFE8087AF9}"/>
             </c:ext>
           </c:extLst>
         </c:ser>
@@ -2575,492 +1932,6 @@
         <a:effectLst/>
       </c:spPr>
     </c:plotArea>
-    <c:plotVisOnly val="1"/>
-    <c:dispBlanksAs val="span"/>
-    <c:showDLblsOverMax val="1"/>
-  </c:chart>
-  <c:spPr>
-    <a:solidFill>
-      <a:srgbClr val="FFFFFF"/>
-    </a:solidFill>
-    <a:ln>
-      <a:noFill/>
-    </a:ln>
-    <a:effectLst/>
-  </c:spPr>
-  <c:externalData r:id="rId1">
-    <c:autoUpdate val="0"/>
-  </c:externalData>
-</c:chartSpace>
-</file>
-
-<file path=ppt/charts/chart8.xml><?xml version="1.0" encoding="utf-8"?>
-<c:chartSpace xmlns:c="http://schemas.openxmlformats.org/drawingml/2006/chart" xmlns:a="http://schemas.openxmlformats.org/drawingml/2006/main" xmlns:r="http://schemas.openxmlformats.org/officeDocument/2006/relationships" xmlns:c16r2="http://schemas.microsoft.com/office/drawing/2015/06/chart">
-  <c:date1904 val="0"/>
-  <c:lang val="es-ES"/>
-  <c:roundedCorners val="1"/>
-  <c:style val="2"/>
-  <c:chart>
-    <c:title>
-      <c:tx>
-        <c:rich>
-          <a:bodyPr/>
-          <a:lstStyle/>
-          <a:p>
-            <a:pPr>
-              <a:defRPr sz="1300" b="0" i="0" u="none" strike="noStrike">
-                <a:solidFill>
-                  <a:srgbClr val="0F2D5B"/>
-                </a:solidFill>
-                <a:latin typeface="Arial"/>
-              </a:defRPr>
-            </a:pPr>
-            <a:r>
-              <a:rPr lang="es-ES" sz="1300" b="0" i="0" u="none" strike="noStrike">
-                <a:solidFill>
-                  <a:srgbClr val="0F2D5B"/>
-                </a:solidFill>
-                <a:latin typeface="Arial"/>
-              </a:rPr>
-              <a:t>Métricas según Umbral de Decisión</a:t>
-            </a:r>
-          </a:p>
-        </c:rich>
-      </c:tx>
-      <c:overlay val="0"/>
-    </c:title>
-    <c:autoTitleDeleted val="0"/>
-    <c:plotArea>
-      <c:layout/>
-      <c:barChart>
-        <c:barDir val="col"/>
-        <c:grouping val="clustered"/>
-        <c:varyColors val="0"/>
-        <c:ser>
-          <c:idx val="0"/>
-          <c:order val="0"/>
-          <c:tx>
-            <c:strRef>
-              <c:f>Sheet1!$B$1</c:f>
-              <c:strCache>
-                <c:ptCount val="1"/>
-                <c:pt idx="0">
-                  <c:v>Precision</c:v>
-                </c:pt>
-              </c:strCache>
-            </c:strRef>
-          </c:tx>
-          <c:spPr>
-            <a:solidFill>
-              <a:srgbClr val="0D9488"/>
-            </a:solidFill>
-            <a:effectLst/>
-          </c:spPr>
-          <c:invertIfNegative val="0"/>
-          <c:dLbls>
-            <c:numFmt formatCode="#,##0" sourceLinked="0"/>
-            <c:spPr>
-              <a:noFill/>
-              <a:ln>
-                <a:noFill/>
-              </a:ln>
-              <a:effectLst/>
-            </c:spPr>
-            <c:txPr>
-              <a:bodyPr/>
-              <a:lstStyle/>
-              <a:p>
-                <a:pPr>
-                  <a:defRPr sz="1200" b="0" i="0" u="none" strike="noStrike">
-                    <a:solidFill>
-                      <a:srgbClr val="1E293B"/>
-                    </a:solidFill>
-                    <a:latin typeface="Arial"/>
-                  </a:defRPr>
-                </a:pPr>
-                <a:endParaRPr lang="es-ES"/>
-              </a:p>
-            </c:txPr>
-            <c:showLegendKey val="0"/>
-            <c:showVal val="1"/>
-            <c:showCatName val="0"/>
-            <c:showSerName val="0"/>
-            <c:showPercent val="0"/>
-            <c:showBubbleSize val="0"/>
-            <c:showLeaderLines val="0"/>
-            <c:extLst>
-              <c:ext xmlns:c15="http://schemas.microsoft.com/office/drawing/2012/chart" uri="{CE6537A1-D6FC-4f65-9D91-7224C49458BB}">
-                <c15:showLeaderLines val="0"/>
-              </c:ext>
-            </c:extLst>
-          </c:dLbls>
-          <c:cat>
-            <c:strRef>
-              <c:f>Sheet1!$A$2:$A$4</c:f>
-              <c:strCache>
-                <c:ptCount val="3"/>
-                <c:pt idx="0">
-                  <c:v>Umbral 0.5</c:v>
-                </c:pt>
-                <c:pt idx="1">
-                  <c:v>Umbral 0.6</c:v>
-                </c:pt>
-                <c:pt idx="2">
-                  <c:v>Umbral 0.7</c:v>
-                </c:pt>
-              </c:strCache>
-            </c:strRef>
-          </c:cat>
-          <c:val>
-            <c:numRef>
-              <c:f>Sheet1!$B$2:$B$4</c:f>
-              <c:numCache>
-                <c:formatCode>General</c:formatCode>
-                <c:ptCount val="3"/>
-                <c:pt idx="0">
-                  <c:v>0.68</c:v>
-                </c:pt>
-                <c:pt idx="1">
-                  <c:v>0.75</c:v>
-                </c:pt>
-                <c:pt idx="2">
-                  <c:v>0.79</c:v>
-                </c:pt>
-              </c:numCache>
-            </c:numRef>
-          </c:val>
-          <c:extLst>
-            <c:ext xmlns:c16="http://schemas.microsoft.com/office/drawing/2014/chart" uri="{C3380CC4-5D6E-409C-BE32-E72D297353CC}">
-              <c16:uniqueId val="{00000000-F7CB-47C2-89AD-0F7197159D20}"/>
-            </c:ext>
-          </c:extLst>
-        </c:ser>
-        <c:ser>
-          <c:idx val="1"/>
-          <c:order val="1"/>
-          <c:tx>
-            <c:strRef>
-              <c:f>Sheet1!$C$1</c:f>
-              <c:strCache>
-                <c:ptCount val="1"/>
-                <c:pt idx="0">
-                  <c:v>Recall</c:v>
-                </c:pt>
-              </c:strCache>
-            </c:strRef>
-          </c:tx>
-          <c:spPr>
-            <a:solidFill>
-              <a:srgbClr val="F59E0B"/>
-            </a:solidFill>
-            <a:effectLst/>
-          </c:spPr>
-          <c:invertIfNegative val="0"/>
-          <c:dLbls>
-            <c:numFmt formatCode="#,##0" sourceLinked="0"/>
-            <c:spPr>
-              <a:noFill/>
-              <a:ln>
-                <a:noFill/>
-              </a:ln>
-              <a:effectLst/>
-            </c:spPr>
-            <c:txPr>
-              <a:bodyPr/>
-              <a:lstStyle/>
-              <a:p>
-                <a:pPr>
-                  <a:defRPr sz="1200" b="0" i="0" u="none" strike="noStrike">
-                    <a:solidFill>
-                      <a:srgbClr val="1E293B"/>
-                    </a:solidFill>
-                    <a:latin typeface="Arial"/>
-                  </a:defRPr>
-                </a:pPr>
-                <a:endParaRPr lang="es-ES"/>
-              </a:p>
-            </c:txPr>
-            <c:showLegendKey val="0"/>
-            <c:showVal val="1"/>
-            <c:showCatName val="0"/>
-            <c:showSerName val="0"/>
-            <c:showPercent val="0"/>
-            <c:showBubbleSize val="0"/>
-            <c:showLeaderLines val="0"/>
-            <c:extLst>
-              <c:ext xmlns:c15="http://schemas.microsoft.com/office/drawing/2012/chart" uri="{CE6537A1-D6FC-4f65-9D91-7224C49458BB}">
-                <c15:showLeaderLines val="0"/>
-              </c:ext>
-            </c:extLst>
-          </c:dLbls>
-          <c:cat>
-            <c:strRef>
-              <c:f>Sheet1!$A$2:$A$4</c:f>
-              <c:strCache>
-                <c:ptCount val="3"/>
-                <c:pt idx="0">
-                  <c:v>Umbral 0.5</c:v>
-                </c:pt>
-                <c:pt idx="1">
-                  <c:v>Umbral 0.6</c:v>
-                </c:pt>
-                <c:pt idx="2">
-                  <c:v>Umbral 0.7</c:v>
-                </c:pt>
-              </c:strCache>
-            </c:strRef>
-          </c:cat>
-          <c:val>
-            <c:numRef>
-              <c:f>Sheet1!$C$2:$C$4</c:f>
-              <c:numCache>
-                <c:formatCode>General</c:formatCode>
-                <c:ptCount val="3"/>
-                <c:pt idx="0">
-                  <c:v>0.54</c:v>
-                </c:pt>
-                <c:pt idx="1">
-                  <c:v>0.38</c:v>
-                </c:pt>
-                <c:pt idx="2">
-                  <c:v>0.24</c:v>
-                </c:pt>
-              </c:numCache>
-            </c:numRef>
-          </c:val>
-          <c:extLst>
-            <c:ext xmlns:c16="http://schemas.microsoft.com/office/drawing/2014/chart" uri="{C3380CC4-5D6E-409C-BE32-E72D297353CC}">
-              <c16:uniqueId val="{00000001-F7CB-47C2-89AD-0F7197159D20}"/>
-            </c:ext>
-          </c:extLst>
-        </c:ser>
-        <c:ser>
-          <c:idx val="2"/>
-          <c:order val="2"/>
-          <c:tx>
-            <c:strRef>
-              <c:f>Sheet1!$D$1</c:f>
-              <c:strCache>
-                <c:ptCount val="1"/>
-                <c:pt idx="0">
-                  <c:v>Accuracy</c:v>
-                </c:pt>
-              </c:strCache>
-            </c:strRef>
-          </c:tx>
-          <c:spPr>
-            <a:solidFill>
-              <a:srgbClr val="64748B"/>
-            </a:solidFill>
-            <a:effectLst/>
-          </c:spPr>
-          <c:invertIfNegative val="0"/>
-          <c:dLbls>
-            <c:numFmt formatCode="#,##0" sourceLinked="0"/>
-            <c:spPr>
-              <a:noFill/>
-              <a:ln>
-                <a:noFill/>
-              </a:ln>
-              <a:effectLst/>
-            </c:spPr>
-            <c:txPr>
-              <a:bodyPr/>
-              <a:lstStyle/>
-              <a:p>
-                <a:pPr>
-                  <a:defRPr sz="1200" b="0" i="0" u="none" strike="noStrike">
-                    <a:solidFill>
-                      <a:srgbClr val="1E293B"/>
-                    </a:solidFill>
-                    <a:latin typeface="Arial"/>
-                  </a:defRPr>
-                </a:pPr>
-                <a:endParaRPr lang="es-ES"/>
-              </a:p>
-            </c:txPr>
-            <c:showLegendKey val="0"/>
-            <c:showVal val="1"/>
-            <c:showCatName val="0"/>
-            <c:showSerName val="0"/>
-            <c:showPercent val="0"/>
-            <c:showBubbleSize val="0"/>
-            <c:showLeaderLines val="0"/>
-            <c:extLst>
-              <c:ext xmlns:c15="http://schemas.microsoft.com/office/drawing/2012/chart" uri="{CE6537A1-D6FC-4f65-9D91-7224C49458BB}">
-                <c15:showLeaderLines val="0"/>
-              </c:ext>
-            </c:extLst>
-          </c:dLbls>
-          <c:cat>
-            <c:strRef>
-              <c:f>Sheet1!$A$2:$A$4</c:f>
-              <c:strCache>
-                <c:ptCount val="3"/>
-                <c:pt idx="0">
-                  <c:v>Umbral 0.5</c:v>
-                </c:pt>
-                <c:pt idx="1">
-                  <c:v>Umbral 0.6</c:v>
-                </c:pt>
-                <c:pt idx="2">
-                  <c:v>Umbral 0.7</c:v>
-                </c:pt>
-              </c:strCache>
-            </c:strRef>
-          </c:cat>
-          <c:val>
-            <c:numRef>
-              <c:f>Sheet1!$D$2:$D$4</c:f>
-              <c:numCache>
-                <c:formatCode>General</c:formatCode>
-                <c:ptCount val="3"/>
-                <c:pt idx="0">
-                  <c:v>0.72</c:v>
-                </c:pt>
-                <c:pt idx="1">
-                  <c:v>0.71</c:v>
-                </c:pt>
-                <c:pt idx="2">
-                  <c:v>0.68</c:v>
-                </c:pt>
-              </c:numCache>
-            </c:numRef>
-          </c:val>
-          <c:extLst>
-            <c:ext xmlns:c16="http://schemas.microsoft.com/office/drawing/2014/chart" uri="{C3380CC4-5D6E-409C-BE32-E72D297353CC}">
-              <c16:uniqueId val="{00000002-F7CB-47C2-89AD-0F7197159D20}"/>
-            </c:ext>
-          </c:extLst>
-        </c:ser>
-        <c:dLbls>
-          <c:showLegendKey val="0"/>
-          <c:showVal val="1"/>
-          <c:showCatName val="0"/>
-          <c:showSerName val="0"/>
-          <c:showPercent val="0"/>
-          <c:showBubbleSize val="0"/>
-        </c:dLbls>
-        <c:gapWidth val="150"/>
-        <c:axId val="2094734554"/>
-        <c:axId val="2094734552"/>
-      </c:barChart>
-      <c:catAx>
-        <c:axId val="2094734554"/>
-        <c:scaling>
-          <c:orientation val="minMax"/>
-        </c:scaling>
-        <c:delete val="0"/>
-        <c:axPos val="b"/>
-        <c:numFmt formatCode="General" sourceLinked="1"/>
-        <c:majorTickMark val="out"/>
-        <c:minorTickMark val="none"/>
-        <c:tickLblPos val="low"/>
-        <c:spPr>
-          <a:ln w="12700" cap="flat">
-            <a:solidFill>
-              <a:srgbClr val="888888"/>
-            </a:solidFill>
-            <a:prstDash val="solid"/>
-            <a:round/>
-          </a:ln>
-        </c:spPr>
-        <c:txPr>
-          <a:bodyPr/>
-          <a:lstStyle/>
-          <a:p>
-            <a:pPr>
-              <a:defRPr sz="1200" b="0" i="0" u="none" strike="noStrike">
-                <a:solidFill>
-                  <a:srgbClr val="1E293B"/>
-                </a:solidFill>
-                <a:latin typeface="Arial"/>
-              </a:defRPr>
-            </a:pPr>
-            <a:endParaRPr lang="en-US"/>
-          </a:p>
-        </c:txPr>
-        <c:crossAx val="2094734552"/>
-        <c:crosses val="autoZero"/>
-        <c:auto val="1"/>
-        <c:lblAlgn val="ctr"/>
-        <c:lblOffset val="100"/>
-        <c:noMultiLvlLbl val="1"/>
-      </c:catAx>
-      <c:valAx>
-        <c:axId val="2094734552"/>
-        <c:scaling>
-          <c:orientation val="minMax"/>
-          <c:max val="1"/>
-          <c:min val="0"/>
-        </c:scaling>
-        <c:delete val="0"/>
-        <c:axPos val="l"/>
-        <c:majorGridlines>
-          <c:spPr>
-            <a:ln w="6350" cap="flat">
-              <a:solidFill>
-                <a:srgbClr val="E2E8F0"/>
-              </a:solidFill>
-              <a:prstDash val="solid"/>
-              <a:round/>
-            </a:ln>
-          </c:spPr>
-        </c:majorGridlines>
-        <c:numFmt formatCode="General" sourceLinked="0"/>
-        <c:majorTickMark val="out"/>
-        <c:minorTickMark val="none"/>
-        <c:tickLblPos val="nextTo"/>
-        <c:spPr>
-          <a:ln w="12700" cap="flat">
-            <a:solidFill>
-              <a:srgbClr val="888888"/>
-            </a:solidFill>
-            <a:prstDash val="solid"/>
-            <a:round/>
-          </a:ln>
-        </c:spPr>
-        <c:txPr>
-          <a:bodyPr/>
-          <a:lstStyle/>
-          <a:p>
-            <a:pPr>
-              <a:defRPr sz="1200" b="0" i="0" u="none" strike="noStrike">
-                <a:solidFill>
-                  <a:srgbClr val="64748B"/>
-                </a:solidFill>
-                <a:latin typeface="Arial"/>
-              </a:defRPr>
-            </a:pPr>
-            <a:endParaRPr lang="en-US"/>
-          </a:p>
-        </c:txPr>
-        <c:crossAx val="2094734554"/>
-        <c:crosses val="autoZero"/>
-        <c:crossBetween val="between"/>
-      </c:valAx>
-      <c:spPr>
-        <a:noFill/>
-        <a:ln>
-          <a:noFill/>
-        </a:ln>
-        <a:effectLst/>
-      </c:spPr>
-    </c:plotArea>
-    <c:legend>
-      <c:legendPos val="b"/>
-      <c:overlay val="0"/>
-      <c:txPr>
-        <a:bodyPr/>
-        <a:lstStyle/>
-        <a:p>
-          <a:pPr>
-            <a:defRPr sz="1100"/>
-          </a:pPr>
-          <a:endParaRPr lang="en-US"/>
-        </a:p>
-      </c:txPr>
-    </c:legend>
     <c:plotVisOnly val="1"/>
     <c:dispBlanksAs val="span"/>
     <c:showDLblsOverMax val="1"/>
@@ -3289,90 +2160,6 @@
 </p:notes>
 </file>
 
-<file path=ppt/notesSlides/notesSlide10.xml><?xml version="1.0" encoding="utf-8"?>
-<p:notes xmlns:a="http://schemas.openxmlformats.org/drawingml/2006/main" xmlns:r="http://schemas.openxmlformats.org/officeDocument/2006/relationships" xmlns:p="http://schemas.openxmlformats.org/presentationml/2006/main">
-  <p:cSld>
-    <p:spTree>
-      <p:nvGrpSpPr>
-        <p:cNvPr id="1" name=""/>
-        <p:cNvGrpSpPr/>
-        <p:nvPr/>
-      </p:nvGrpSpPr>
-      <p:grpSpPr>
-        <a:xfrm>
-          <a:off x="0" y="0"/>
-          <a:ext cx="0" cy="0"/>
-          <a:chOff x="0" y="0"/>
-          <a:chExt cx="0" cy="0"/>
-        </a:xfrm>
-      </p:grpSpPr>
-      <p:sp>
-        <p:nvSpPr>
-          <p:cNvPr id="2" name="Slide Image Placeholder 1"/>
-          <p:cNvSpPr>
-            <a:spLocks noGrp="1" noRot="1" noChangeAspect="1"/>
-          </p:cNvSpPr>
-          <p:nvPr>
-            <p:ph type="sldImg"/>
-          </p:nvPr>
-        </p:nvSpPr>
-        <p:spPr/>
-      </p:sp>
-      <p:sp>
-        <p:nvSpPr>
-          <p:cNvPr id="3" name="Notes Placeholder 2"/>
-          <p:cNvSpPr>
-            <a:spLocks noGrp="1"/>
-          </p:cNvSpPr>
-          <p:nvPr>
-            <p:ph type="body" idx="1"/>
-          </p:nvPr>
-        </p:nvSpPr>
-        <p:spPr/>
-        <p:txBody>
-          <a:bodyPr/>
-          <a:lstStyle/>
-          <a:p>
-            <a:endParaRPr lang="en-US" dirty="0"/>
-          </a:p>
-        </p:txBody>
-      </p:sp>
-      <p:sp>
-        <p:nvSpPr>
-          <p:cNvPr id="4" name="Slide Number Placeholder 3"/>
-          <p:cNvSpPr>
-            <a:spLocks noGrp="1"/>
-          </p:cNvSpPr>
-          <p:nvPr>
-            <p:ph type="sldNum" sz="quarter" idx="10"/>
-          </p:nvPr>
-        </p:nvSpPr>
-        <p:spPr/>
-        <p:txBody>
-          <a:bodyPr/>
-          <a:lstStyle/>
-          <a:p>
-            <a:fld id="{F7021451-1387-4CA6-816F-3879F97B5CBC}" type="slidenum">
-              <a:rPr lang="en-US"/>
-              <a:t>10</a:t>
-            </a:fld>
-            <a:endParaRPr lang="en-US"/>
-          </a:p>
-        </p:txBody>
-      </p:sp>
-    </p:spTree>
-    <p:extLst>
-      <p:ext uri="{BB962C8B-B14F-4D97-AF65-F5344CB8AC3E}">
-        <p14:creationId xmlns:p14="http://schemas.microsoft.com/office/powerpoint/2010/main" val="1024086991"/>
-      </p:ext>
-    </p:extLst>
-  </p:cSld>
-  <p:clrMapOvr>
-    <a:masterClrMapping/>
-  </p:clrMapOvr>
-</p:notes>
-</file>
-
 <file path=ppt/notesSlides/notesSlide2.xml><?xml version="1.0" encoding="utf-8"?>
 <p:notes xmlns:a="http://schemas.openxmlformats.org/drawingml/2006/main" xmlns:r="http://schemas.openxmlformats.org/officeDocument/2006/relationships" xmlns:p="http://schemas.openxmlformats.org/presentationml/2006/main">
   <p:cSld>
@@ -3943,90 +2730,6 @@
             <a:fld id="{F7021451-1387-4CA6-816F-3879F97B5CBC}" type="slidenum">
               <a:rPr lang="en-US"/>
               <a:t>8</a:t>
-            </a:fld>
-            <a:endParaRPr lang="en-US"/>
-          </a:p>
-        </p:txBody>
-      </p:sp>
-    </p:spTree>
-    <p:extLst>
-      <p:ext uri="{BB962C8B-B14F-4D97-AF65-F5344CB8AC3E}">
-        <p14:creationId xmlns:p14="http://schemas.microsoft.com/office/powerpoint/2010/main" val="1024086991"/>
-      </p:ext>
-    </p:extLst>
-  </p:cSld>
-  <p:clrMapOvr>
-    <a:masterClrMapping/>
-  </p:clrMapOvr>
-</p:notes>
-</file>
-
-<file path=ppt/notesSlides/notesSlide9.xml><?xml version="1.0" encoding="utf-8"?>
-<p:notes xmlns:a="http://schemas.openxmlformats.org/drawingml/2006/main" xmlns:r="http://schemas.openxmlformats.org/officeDocument/2006/relationships" xmlns:p="http://schemas.openxmlformats.org/presentationml/2006/main">
-  <p:cSld>
-    <p:spTree>
-      <p:nvGrpSpPr>
-        <p:cNvPr id="1" name=""/>
-        <p:cNvGrpSpPr/>
-        <p:nvPr/>
-      </p:nvGrpSpPr>
-      <p:grpSpPr>
-        <a:xfrm>
-          <a:off x="0" y="0"/>
-          <a:ext cx="0" cy="0"/>
-          <a:chOff x="0" y="0"/>
-          <a:chExt cx="0" cy="0"/>
-        </a:xfrm>
-      </p:grpSpPr>
-      <p:sp>
-        <p:nvSpPr>
-          <p:cNvPr id="2" name="Slide Image Placeholder 1"/>
-          <p:cNvSpPr>
-            <a:spLocks noGrp="1" noRot="1" noChangeAspect="1"/>
-          </p:cNvSpPr>
-          <p:nvPr>
-            <p:ph type="sldImg"/>
-          </p:nvPr>
-        </p:nvSpPr>
-        <p:spPr/>
-      </p:sp>
-      <p:sp>
-        <p:nvSpPr>
-          <p:cNvPr id="3" name="Notes Placeholder 2"/>
-          <p:cNvSpPr>
-            <a:spLocks noGrp="1"/>
-          </p:cNvSpPr>
-          <p:nvPr>
-            <p:ph type="body" idx="1"/>
-          </p:nvPr>
-        </p:nvSpPr>
-        <p:spPr/>
-        <p:txBody>
-          <a:bodyPr/>
-          <a:lstStyle/>
-          <a:p>
-            <a:endParaRPr lang="en-US" dirty="0"/>
-          </a:p>
-        </p:txBody>
-      </p:sp>
-      <p:sp>
-        <p:nvSpPr>
-          <p:cNvPr id="4" name="Slide Number Placeholder 3"/>
-          <p:cNvSpPr>
-            <a:spLocks noGrp="1"/>
-          </p:cNvSpPr>
-          <p:nvPr>
-            <p:ph type="sldNum" sz="quarter" idx="10"/>
-          </p:nvPr>
-        </p:nvSpPr>
-        <p:spPr/>
-        <p:txBody>
-          <a:bodyPr/>
-          <a:lstStyle/>
-          <a:p>
-            <a:fld id="{F7021451-1387-4CA6-816F-3879F97B5CBC}" type="slidenum">
-              <a:rPr lang="en-US"/>
-              <a:t>9</a:t>
             </a:fld>
             <a:endParaRPr lang="en-US"/>
           </a:p>
@@ -4574,7 +3277,7 @@
                 <a:ea typeface="Calibri" pitchFamily="34" charset="-122"/>
                 <a:cs typeface="Calibri" pitchFamily="34" charset="-120"/>
               </a:rPr>
-              <a:t>Víctor Horcas Puertas  ·  Máster Data Science &amp; IA </a:t>
+              <a:t>Víctor Horcas Puertas  ·  Máster Data Science &amp; IA · Evolve Academy </a:t>
             </a:r>
             <a:endParaRPr lang="en-US" sz="1200" dirty="0"/>
           </a:p>
@@ -4588,8 +3291,8 @@
         </p:nvSpPr>
         <p:spPr>
           <a:xfrm>
-            <a:off x="6583680" y="731520"/>
-            <a:ext cx="2286000" cy="3749040"/>
+            <a:off x="6720840" y="697230"/>
+            <a:ext cx="2286000" cy="2814066"/>
           </a:xfrm>
           <a:prstGeom prst="rect">
             <a:avLst/>
@@ -4629,7 +3332,7 @@
         </p:nvSpPr>
         <p:spPr>
           <a:xfrm>
-            <a:off x="6720840" y="914400"/>
+            <a:off x="6858000" y="1143000"/>
             <a:ext cx="2011680" cy="384048"/>
           </a:xfrm>
           <a:prstGeom prst="rect">
@@ -4668,7 +3371,7 @@
         </p:nvSpPr>
         <p:spPr>
           <a:xfrm>
-            <a:off x="6720840" y="1261872"/>
+            <a:off x="6858000" y="1429730"/>
             <a:ext cx="2011680" cy="256032"/>
           </a:xfrm>
           <a:prstGeom prst="rect">
@@ -4707,7 +3410,7 @@
         </p:nvSpPr>
         <p:spPr>
           <a:xfrm>
-            <a:off x="6720840" y="1737360"/>
+            <a:off x="6858000" y="1892808"/>
             <a:ext cx="2011680" cy="384048"/>
           </a:xfrm>
           <a:prstGeom prst="rect">
@@ -4732,7 +3435,7 @@
                 <a:ea typeface="Calibri" pitchFamily="34" charset="-122"/>
                 <a:cs typeface="Calibri" pitchFamily="34" charset="-120"/>
               </a:rPr>
-              <a:t>AUC 0.79</a:t>
+              <a:t>AUC 0.7938</a:t>
             </a:r>
             <a:endParaRPr lang="en-US" sz="1800" dirty="0"/>
           </a:p>
@@ -4746,7 +3449,7 @@
         </p:nvSpPr>
         <p:spPr>
           <a:xfrm>
-            <a:off x="6720840" y="2084832"/>
+            <a:off x="6864531" y="2159943"/>
             <a:ext cx="2011680" cy="256032"/>
           </a:xfrm>
           <a:prstGeom prst="rect">
@@ -4785,7 +3488,7 @@
         </p:nvSpPr>
         <p:spPr>
           <a:xfrm>
-            <a:off x="6720840" y="2560320"/>
+            <a:off x="6858000" y="2566851"/>
             <a:ext cx="2011680" cy="384048"/>
           </a:xfrm>
           <a:prstGeom prst="rect">
@@ -4810,7 +3513,7 @@
                 <a:ea typeface="Calibri" pitchFamily="34" charset="-122"/>
                 <a:cs typeface="Calibri" pitchFamily="34" charset="-120"/>
               </a:rPr>
-              <a:t>~4.300</a:t>
+              <a:t>~5.400</a:t>
             </a:r>
             <a:endParaRPr lang="en-US" sz="1800" dirty="0"/>
           </a:p>
@@ -4824,7 +3527,7 @@
         </p:nvSpPr>
         <p:spPr>
           <a:xfrm>
-            <a:off x="6720840" y="2907792"/>
+            <a:off x="6864531" y="2839865"/>
             <a:ext cx="2011680" cy="256032"/>
           </a:xfrm>
           <a:prstGeom prst="rect">
@@ -4879,17 +3582,6 @@
             <a:pPr marL="0" indent="0" algn="ctr">
               <a:buNone/>
             </a:pPr>
-            <a:r>
-              <a:rPr lang="en-US" sz="1800" b="1" dirty="0">
-                <a:solidFill>
-                  <a:srgbClr val="FFFFFF"/>
-                </a:solidFill>
-                <a:latin typeface="Calibri" pitchFamily="34" charset="0"/>
-                <a:ea typeface="Calibri" pitchFamily="34" charset="-122"/>
-                <a:cs typeface="Calibri" pitchFamily="34" charset="-120"/>
-              </a:rPr>
-              <a:t>3 Segmentos</a:t>
-            </a:r>
             <a:endParaRPr lang="en-US" sz="1800" dirty="0"/>
           </a:p>
         </p:txBody>
@@ -4918,928 +3610,6 @@
             <a:pPr marL="0" indent="0" algn="ctr">
               <a:buNone/>
             </a:pPr>
-            <a:r>
-              <a:rPr lang="en-US" sz="1100" dirty="0">
-                <a:solidFill>
-                  <a:srgbClr val="14B8A6"/>
-                </a:solidFill>
-                <a:latin typeface="Calibri" pitchFamily="34" charset="0"/>
-                <a:ea typeface="Calibri" pitchFamily="34" charset="-122"/>
-                <a:cs typeface="Calibri" pitchFamily="34" charset="-120"/>
-              </a:rPr>
-              <a:t>de acción</a:t>
-            </a:r>
-            <a:endParaRPr lang="en-US" sz="1100" dirty="0"/>
-          </a:p>
-        </p:txBody>
-      </p:sp>
-    </p:spTree>
-  </p:cSld>
-  <p:clrMapOvr>
-    <a:masterClrMapping/>
-  </p:clrMapOvr>
-</p:sld>
-</file>
-
-<file path=ppt/slides/slide10.xml><?xml version="1.0" encoding="utf-8"?>
-<p:sld xmlns:a="http://schemas.openxmlformats.org/drawingml/2006/main" xmlns:r="http://schemas.openxmlformats.org/officeDocument/2006/relationships" xmlns:p="http://schemas.openxmlformats.org/presentationml/2006/main">
-  <p:cSld name="Slide 11">
-    <p:bg>
-      <p:bgPr>
-        <a:solidFill>
-          <a:srgbClr val="0F2D5B"/>
-        </a:solidFill>
-        <a:effectLst/>
-      </p:bgPr>
-    </p:bg>
-    <p:spTree>
-      <p:nvGrpSpPr>
-        <p:cNvPr id="1" name=""/>
-        <p:cNvGrpSpPr/>
-        <p:nvPr/>
-      </p:nvGrpSpPr>
-      <p:grpSpPr>
-        <a:xfrm>
-          <a:off x="0" y="0"/>
-          <a:ext cx="0" cy="0"/>
-          <a:chOff x="0" y="0"/>
-          <a:chExt cx="0" cy="0"/>
-        </a:xfrm>
-      </p:grpSpPr>
-      <p:sp>
-        <p:nvSpPr>
-          <p:cNvPr id="2" name="Shape 0"/>
-          <p:cNvSpPr/>
-          <p:nvPr/>
-        </p:nvSpPr>
-        <p:spPr>
-          <a:xfrm>
-            <a:off x="0" y="0"/>
-            <a:ext cx="4754880" cy="5143500"/>
-          </a:xfrm>
-          <a:prstGeom prst="rect">
-            <a:avLst/>
-          </a:prstGeom>
-          <a:solidFill>
-            <a:srgbClr val="0B6E6E"/>
-          </a:solidFill>
-          <a:ln w="12700">
-            <a:solidFill>
-              <a:srgbClr val="0B6E6E"/>
-            </a:solidFill>
-            <a:prstDash val="solid"/>
-          </a:ln>
-        </p:spPr>
-        <p:txBody>
-          <a:bodyPr/>
-          <a:lstStyle/>
-          <a:p>
-            <a:endParaRPr lang="es-ES"/>
-          </a:p>
-        </p:txBody>
-      </p:sp>
-      <p:sp>
-        <p:nvSpPr>
-          <p:cNvPr id="3" name="Text 1"/>
-          <p:cNvSpPr/>
-          <p:nvPr/>
-        </p:nvSpPr>
-        <p:spPr>
-          <a:xfrm>
-            <a:off x="320040" y="274320"/>
-            <a:ext cx="4297680" cy="548640"/>
-          </a:xfrm>
-          <a:prstGeom prst="rect">
-            <a:avLst/>
-          </a:prstGeom>
-          <a:noFill/>
-          <a:ln/>
-        </p:spPr>
-        <p:txBody>
-          <a:bodyPr wrap="square" rtlCol="0" anchor="ctr"/>
-          <a:lstStyle/>
-          <a:p>
-            <a:pPr marL="0" indent="0">
-              <a:buNone/>
-            </a:pPr>
-            <a:r>
-              <a:rPr lang="en-US" sz="2400" b="1" dirty="0">
-                <a:solidFill>
-                  <a:srgbClr val="FFFFFF"/>
-                </a:solidFill>
-                <a:latin typeface="Calibri" pitchFamily="34" charset="0"/>
-                <a:ea typeface="Calibri" pitchFamily="34" charset="-122"/>
-                <a:cs typeface="Calibri" pitchFamily="34" charset="-120"/>
-              </a:rPr>
-              <a:t>Conclusiones</a:t>
-            </a:r>
-            <a:endParaRPr lang="en-US" sz="2400" dirty="0"/>
-          </a:p>
-        </p:txBody>
-      </p:sp>
-      <p:sp>
-        <p:nvSpPr>
-          <p:cNvPr id="4" name="Text 2"/>
-          <p:cNvSpPr/>
-          <p:nvPr/>
-        </p:nvSpPr>
-        <p:spPr>
-          <a:xfrm>
-            <a:off x="320040" y="1005840"/>
-            <a:ext cx="4206240" cy="292608"/>
-          </a:xfrm>
-          <a:prstGeom prst="rect">
-            <a:avLst/>
-          </a:prstGeom>
-          <a:noFill/>
-          <a:ln/>
-        </p:spPr>
-        <p:txBody>
-          <a:bodyPr wrap="square" rtlCol="0" anchor="ctr"/>
-          <a:lstStyle/>
-          <a:p>
-            <a:pPr marL="0" indent="0">
-              <a:buNone/>
-            </a:pPr>
-            <a:r>
-              <a:rPr lang="en-US" sz="1300" b="1" dirty="0">
-                <a:solidFill>
-                  <a:srgbClr val="FFFFFF"/>
-                </a:solidFill>
-                <a:latin typeface="Calibri" pitchFamily="34" charset="0"/>
-                <a:ea typeface="Calibri" pitchFamily="34" charset="-122"/>
-                <a:cs typeface="Calibri" pitchFamily="34" charset="-120"/>
-              </a:rPr>
-              <a:t>1. XGBoost es el modelo ganador</a:t>
-            </a:r>
-            <a:endParaRPr lang="en-US" sz="1300" dirty="0"/>
-          </a:p>
-        </p:txBody>
-      </p:sp>
-      <p:sp>
-        <p:nvSpPr>
-          <p:cNvPr id="5" name="Text 3"/>
-          <p:cNvSpPr/>
-          <p:nvPr/>
-        </p:nvSpPr>
-        <p:spPr>
-          <a:xfrm>
-            <a:off x="457200" y="1298448"/>
-            <a:ext cx="4023360" cy="438912"/>
-          </a:xfrm>
-          <a:prstGeom prst="rect">
-            <a:avLst/>
-          </a:prstGeom>
-          <a:noFill/>
-          <a:ln/>
-        </p:spPr>
-        <p:txBody>
-          <a:bodyPr wrap="square" rtlCol="0" anchor="ctr"/>
-          <a:lstStyle/>
-          <a:p>
-            <a:pPr marL="0" indent="0">
-              <a:buNone/>
-            </a:pPr>
-            <a:r>
-              <a:rPr lang="en-US" sz="1100" i="1" dirty="0">
-                <a:solidFill>
-                  <a:srgbClr val="14B8A6"/>
-                </a:solidFill>
-                <a:latin typeface="Calibri" pitchFamily="34" charset="0"/>
-                <a:ea typeface="Calibri" pitchFamily="34" charset="-122"/>
-                <a:cs typeface="Calibri" pitchFamily="34" charset="-120"/>
-              </a:rPr>
-              <a:t>AUC de 0.79 en test, con diferencia mínima respecto al CV (0.001). Sin overfitting.</a:t>
-            </a:r>
-            <a:endParaRPr lang="en-US" sz="1100" dirty="0"/>
-          </a:p>
-        </p:txBody>
-      </p:sp>
-      <p:sp>
-        <p:nvSpPr>
-          <p:cNvPr id="6" name="Text 4"/>
-          <p:cNvSpPr/>
-          <p:nvPr/>
-        </p:nvSpPr>
-        <p:spPr>
-          <a:xfrm>
-            <a:off x="320040" y="1920240"/>
-            <a:ext cx="4206240" cy="292608"/>
-          </a:xfrm>
-          <a:prstGeom prst="rect">
-            <a:avLst/>
-          </a:prstGeom>
-          <a:noFill/>
-          <a:ln/>
-        </p:spPr>
-        <p:txBody>
-          <a:bodyPr wrap="square" rtlCol="0" anchor="ctr"/>
-          <a:lstStyle/>
-          <a:p>
-            <a:pPr marL="0" indent="0">
-              <a:buNone/>
-            </a:pPr>
-            <a:r>
-              <a:rPr lang="en-US" sz="1300" b="1" dirty="0">
-                <a:solidFill>
-                  <a:srgbClr val="FFFFFF"/>
-                </a:solidFill>
-                <a:latin typeface="Calibri" pitchFamily="34" charset="0"/>
-                <a:ea typeface="Calibri" pitchFamily="34" charset="-122"/>
-                <a:cs typeface="Calibri" pitchFamily="34" charset="-120"/>
-              </a:rPr>
-              <a:t>2. Recencia y frecuencia, clave</a:t>
-            </a:r>
-            <a:endParaRPr lang="en-US" sz="1300" dirty="0"/>
-          </a:p>
-        </p:txBody>
-      </p:sp>
-      <p:sp>
-        <p:nvSpPr>
-          <p:cNvPr id="7" name="Text 5"/>
-          <p:cNvSpPr/>
-          <p:nvPr/>
-        </p:nvSpPr>
-        <p:spPr>
-          <a:xfrm>
-            <a:off x="457200" y="2212848"/>
-            <a:ext cx="4023360" cy="438912"/>
-          </a:xfrm>
-          <a:prstGeom prst="rect">
-            <a:avLst/>
-          </a:prstGeom>
-          <a:noFill/>
-          <a:ln/>
-        </p:spPr>
-        <p:txBody>
-          <a:bodyPr wrap="square" rtlCol="0" anchor="ctr"/>
-          <a:lstStyle/>
-          <a:p>
-            <a:pPr marL="0" indent="0">
-              <a:buNone/>
-            </a:pPr>
-            <a:r>
-              <a:rPr lang="en-US" sz="1100" i="1" dirty="0">
-                <a:solidFill>
-                  <a:srgbClr val="14B8A6"/>
-                </a:solidFill>
-                <a:latin typeface="Calibri" pitchFamily="34" charset="0"/>
-                <a:ea typeface="Calibri" pitchFamily="34" charset="-122"/>
-                <a:cs typeface="Calibri" pitchFamily="34" charset="-120"/>
-              </a:rPr>
-              <a:t>Son las dos variables más predictoras. Un cliente que compró recientemente y con frecuencia tiene un 70%+ de probabilidad de recompra.</a:t>
-            </a:r>
-            <a:endParaRPr lang="en-US" sz="1100" dirty="0"/>
-          </a:p>
-        </p:txBody>
-      </p:sp>
-      <p:sp>
-        <p:nvSpPr>
-          <p:cNvPr id="8" name="Text 6"/>
-          <p:cNvSpPr/>
-          <p:nvPr/>
-        </p:nvSpPr>
-        <p:spPr>
-          <a:xfrm>
-            <a:off x="320040" y="2834640"/>
-            <a:ext cx="4206240" cy="292608"/>
-          </a:xfrm>
-          <a:prstGeom prst="rect">
-            <a:avLst/>
-          </a:prstGeom>
-          <a:noFill/>
-          <a:ln/>
-        </p:spPr>
-        <p:txBody>
-          <a:bodyPr wrap="square" rtlCol="0" anchor="ctr"/>
-          <a:lstStyle/>
-          <a:p>
-            <a:pPr marL="0" indent="0">
-              <a:buNone/>
-            </a:pPr>
-            <a:r>
-              <a:rPr lang="en-US" sz="1300" b="1" dirty="0">
-                <a:solidFill>
-                  <a:srgbClr val="FFFFFF"/>
-                </a:solidFill>
-                <a:latin typeface="Calibri" pitchFamily="34" charset="0"/>
-                <a:ea typeface="Calibri" pitchFamily="34" charset="-122"/>
-                <a:cs typeface="Calibri" pitchFamily="34" charset="-120"/>
-              </a:rPr>
-              <a:t>3. Umbral ajustable al negocio</a:t>
-            </a:r>
-            <a:endParaRPr lang="en-US" sz="1300" dirty="0"/>
-          </a:p>
-        </p:txBody>
-      </p:sp>
-      <p:sp>
-        <p:nvSpPr>
-          <p:cNvPr id="9" name="Text 7"/>
-          <p:cNvSpPr/>
-          <p:nvPr/>
-        </p:nvSpPr>
-        <p:spPr>
-          <a:xfrm>
-            <a:off x="457200" y="3127248"/>
-            <a:ext cx="4023360" cy="438912"/>
-          </a:xfrm>
-          <a:prstGeom prst="rect">
-            <a:avLst/>
-          </a:prstGeom>
-          <a:noFill/>
-          <a:ln/>
-        </p:spPr>
-        <p:txBody>
-          <a:bodyPr wrap="square" rtlCol="0" anchor="ctr"/>
-          <a:lstStyle/>
-          <a:p>
-            <a:pPr marL="0" indent="0">
-              <a:buNone/>
-            </a:pPr>
-            <a:r>
-              <a:rPr lang="en-US" sz="1100" i="1" dirty="0">
-                <a:solidFill>
-                  <a:srgbClr val="14B8A6"/>
-                </a:solidFill>
-                <a:latin typeface="Calibri" pitchFamily="34" charset="0"/>
-                <a:ea typeface="Calibri" pitchFamily="34" charset="-122"/>
-                <a:cs typeface="Calibri" pitchFamily="34" charset="-120"/>
-              </a:rPr>
-              <a:t>El umbral por defecto (0.5) puede ajustarse a 0.6-0.7 para priorizar precisión sobre cobertura según el coste del incentivo.</a:t>
-            </a:r>
-            <a:endParaRPr lang="en-US" sz="1100" dirty="0"/>
-          </a:p>
-        </p:txBody>
-      </p:sp>
-      <p:sp>
-        <p:nvSpPr>
-          <p:cNvPr id="10" name="Text 8"/>
-          <p:cNvSpPr/>
-          <p:nvPr/>
-        </p:nvSpPr>
-        <p:spPr>
-          <a:xfrm>
-            <a:off x="320040" y="3749040"/>
-            <a:ext cx="4206240" cy="292608"/>
-          </a:xfrm>
-          <a:prstGeom prst="rect">
-            <a:avLst/>
-          </a:prstGeom>
-          <a:noFill/>
-          <a:ln/>
-        </p:spPr>
-        <p:txBody>
-          <a:bodyPr wrap="square" rtlCol="0" anchor="ctr"/>
-          <a:lstStyle/>
-          <a:p>
-            <a:pPr marL="0" indent="0">
-              <a:buNone/>
-            </a:pPr>
-            <a:r>
-              <a:rPr lang="en-US" sz="1300" b="1" dirty="0">
-                <a:solidFill>
-                  <a:srgbClr val="FFFFFF"/>
-                </a:solidFill>
-                <a:latin typeface="Calibri" pitchFamily="34" charset="0"/>
-                <a:ea typeface="Calibri" pitchFamily="34" charset="-122"/>
-                <a:cs typeface="Calibri" pitchFamily="34" charset="-120"/>
-              </a:rPr>
-              <a:t>4. Dataset limpio y sin leakage</a:t>
-            </a:r>
-            <a:endParaRPr lang="en-US" sz="1300" dirty="0"/>
-          </a:p>
-        </p:txBody>
-      </p:sp>
-      <p:sp>
-        <p:nvSpPr>
-          <p:cNvPr id="11" name="Text 9"/>
-          <p:cNvSpPr/>
-          <p:nvPr/>
-        </p:nvSpPr>
-        <p:spPr>
-          <a:xfrm>
-            <a:off x="457200" y="4041648"/>
-            <a:ext cx="4023360" cy="438912"/>
-          </a:xfrm>
-          <a:prstGeom prst="rect">
-            <a:avLst/>
-          </a:prstGeom>
-          <a:noFill/>
-          <a:ln/>
-        </p:spPr>
-        <p:txBody>
-          <a:bodyPr wrap="square" rtlCol="0" anchor="ctr"/>
-          <a:lstStyle/>
-          <a:p>
-            <a:pPr marL="0" indent="0">
-              <a:buNone/>
-            </a:pPr>
-            <a:r>
-              <a:rPr lang="en-US" sz="1100" i="1" dirty="0">
-                <a:solidFill>
-                  <a:srgbClr val="14B8A6"/>
-                </a:solidFill>
-                <a:latin typeface="Calibri" pitchFamily="34" charset="0"/>
-                <a:ea typeface="Calibri" pitchFamily="34" charset="-122"/>
-                <a:cs typeface="Calibri" pitchFamily="34" charset="-120"/>
-              </a:rPr>
-              <a:t>Separación temporal estricta entre features y etiqueta garantiza evaluación honesta del modelo.</a:t>
-            </a:r>
-            <a:endParaRPr lang="en-US" sz="1100" dirty="0"/>
-          </a:p>
-        </p:txBody>
-      </p:sp>
-      <p:sp>
-        <p:nvSpPr>
-          <p:cNvPr id="12" name="Text 10"/>
-          <p:cNvSpPr/>
-          <p:nvPr/>
-        </p:nvSpPr>
-        <p:spPr>
-          <a:xfrm>
-            <a:off x="5074920" y="274320"/>
-            <a:ext cx="3749040" cy="548640"/>
-          </a:xfrm>
-          <a:prstGeom prst="rect">
-            <a:avLst/>
-          </a:prstGeom>
-          <a:noFill/>
-          <a:ln/>
-        </p:spPr>
-        <p:txBody>
-          <a:bodyPr wrap="square" rtlCol="0" anchor="ctr"/>
-          <a:lstStyle/>
-          <a:p>
-            <a:pPr marL="0" indent="0">
-              <a:buNone/>
-            </a:pPr>
-            <a:r>
-              <a:rPr lang="en-US" sz="2400" b="1" dirty="0">
-                <a:solidFill>
-                  <a:srgbClr val="FFFFFF"/>
-                </a:solidFill>
-                <a:latin typeface="Calibri" pitchFamily="34" charset="0"/>
-                <a:ea typeface="Calibri" pitchFamily="34" charset="-122"/>
-                <a:cs typeface="Calibri" pitchFamily="34" charset="-120"/>
-              </a:rPr>
-              <a:t>Próximos Pasos</a:t>
-            </a:r>
-            <a:endParaRPr lang="en-US" sz="2400" dirty="0"/>
-          </a:p>
-        </p:txBody>
-      </p:sp>
-      <p:sp>
-        <p:nvSpPr>
-          <p:cNvPr id="13" name="Shape 11"/>
-          <p:cNvSpPr/>
-          <p:nvPr/>
-        </p:nvSpPr>
-        <p:spPr>
-          <a:xfrm>
-            <a:off x="4983480" y="1005840"/>
-            <a:ext cx="3840480" cy="868680"/>
-          </a:xfrm>
-          <a:prstGeom prst="rect">
-            <a:avLst/>
-          </a:prstGeom>
-          <a:solidFill>
-            <a:srgbClr val="FFFFFF">
-              <a:alpha val="90000"/>
-            </a:srgbClr>
-          </a:solidFill>
-          <a:ln w="12700">
-            <a:solidFill>
-              <a:srgbClr val="FFFFFF">
-                <a:alpha val="40000"/>
-              </a:srgbClr>
-            </a:solidFill>
-            <a:prstDash val="solid"/>
-          </a:ln>
-        </p:spPr>
-        <p:txBody>
-          <a:bodyPr/>
-          <a:lstStyle/>
-          <a:p>
-            <a:endParaRPr lang="es-ES"/>
-          </a:p>
-        </p:txBody>
-      </p:sp>
-      <p:sp>
-        <p:nvSpPr>
-          <p:cNvPr id="14" name="Text 12"/>
-          <p:cNvSpPr/>
-          <p:nvPr/>
-        </p:nvSpPr>
-        <p:spPr>
-          <a:xfrm>
-            <a:off x="5120640" y="1024128"/>
-            <a:ext cx="3566160" cy="292608"/>
-          </a:xfrm>
-          <a:prstGeom prst="rect">
-            <a:avLst/>
-          </a:prstGeom>
-          <a:noFill/>
-          <a:ln/>
-        </p:spPr>
-        <p:txBody>
-          <a:bodyPr wrap="square" rtlCol="0" anchor="ctr"/>
-          <a:lstStyle/>
-          <a:p>
-            <a:pPr marL="0" indent="0">
-              <a:buNone/>
-            </a:pPr>
-            <a:r>
-              <a:rPr lang="en-US" sz="1200" b="1" dirty="0">
-                <a:solidFill>
-                  <a:srgbClr val="FFFFFF"/>
-                </a:solidFill>
-                <a:latin typeface="Calibri" pitchFamily="34" charset="0"/>
-                <a:ea typeface="Calibri" pitchFamily="34" charset="-122"/>
-                <a:cs typeface="Calibri" pitchFamily="34" charset="-120"/>
-              </a:rPr>
-              <a:t>📐 Ajuste fino del umbral</a:t>
-            </a:r>
-            <a:endParaRPr lang="en-US" sz="1200" dirty="0"/>
-          </a:p>
-        </p:txBody>
-      </p:sp>
-      <p:sp>
-        <p:nvSpPr>
-          <p:cNvPr id="15" name="Text 13"/>
-          <p:cNvSpPr/>
-          <p:nvPr/>
-        </p:nvSpPr>
-        <p:spPr>
-          <a:xfrm>
-            <a:off x="5120640" y="1316736"/>
-            <a:ext cx="3566160" cy="457200"/>
-          </a:xfrm>
-          <a:prstGeom prst="rect">
-            <a:avLst/>
-          </a:prstGeom>
-          <a:noFill/>
-          <a:ln/>
-        </p:spPr>
-        <p:txBody>
-          <a:bodyPr wrap="square" rtlCol="0" anchor="ctr"/>
-          <a:lstStyle/>
-          <a:p>
-            <a:pPr marL="0" indent="0">
-              <a:buNone/>
-            </a:pPr>
-            <a:r>
-              <a:rPr lang="en-US" sz="1100" i="1" dirty="0">
-                <a:solidFill>
-                  <a:srgbClr val="14B8A6"/>
-                </a:solidFill>
-                <a:latin typeface="Calibri" pitchFamily="34" charset="0"/>
-                <a:ea typeface="Calibri" pitchFamily="34" charset="-122"/>
-                <a:cs typeface="Calibri" pitchFamily="34" charset="-120"/>
-              </a:rPr>
-              <a:t>Cuantificar coste real de FP (campaña desperdiciada) vs FN (cliente perdido) para elegir el umbral óptimo de negocio.</a:t>
-            </a:r>
-            <a:endParaRPr lang="en-US" sz="1100" dirty="0"/>
-          </a:p>
-        </p:txBody>
-      </p:sp>
-      <p:sp>
-        <p:nvSpPr>
-          <p:cNvPr id="16" name="Shape 14"/>
-          <p:cNvSpPr/>
-          <p:nvPr/>
-        </p:nvSpPr>
-        <p:spPr>
-          <a:xfrm>
-            <a:off x="4983480" y="1965960"/>
-            <a:ext cx="3840480" cy="868680"/>
-          </a:xfrm>
-          <a:prstGeom prst="rect">
-            <a:avLst/>
-          </a:prstGeom>
-          <a:solidFill>
-            <a:srgbClr val="FFFFFF">
-              <a:alpha val="90000"/>
-            </a:srgbClr>
-          </a:solidFill>
-          <a:ln w="12700">
-            <a:solidFill>
-              <a:srgbClr val="FFFFFF">
-                <a:alpha val="40000"/>
-              </a:srgbClr>
-            </a:solidFill>
-            <a:prstDash val="solid"/>
-          </a:ln>
-        </p:spPr>
-        <p:txBody>
-          <a:bodyPr/>
-          <a:lstStyle/>
-          <a:p>
-            <a:endParaRPr lang="es-ES"/>
-          </a:p>
-        </p:txBody>
-      </p:sp>
-      <p:sp>
-        <p:nvSpPr>
-          <p:cNvPr id="17" name="Text 15"/>
-          <p:cNvSpPr/>
-          <p:nvPr/>
-        </p:nvSpPr>
-        <p:spPr>
-          <a:xfrm>
-            <a:off x="5120640" y="1984248"/>
-            <a:ext cx="3566160" cy="292608"/>
-          </a:xfrm>
-          <a:prstGeom prst="rect">
-            <a:avLst/>
-          </a:prstGeom>
-          <a:noFill/>
-          <a:ln/>
-        </p:spPr>
-        <p:txBody>
-          <a:bodyPr wrap="square" rtlCol="0" anchor="ctr"/>
-          <a:lstStyle/>
-          <a:p>
-            <a:pPr marL="0" indent="0">
-              <a:buNone/>
-            </a:pPr>
-            <a:r>
-              <a:rPr lang="en-US" sz="1200" b="1" dirty="0">
-                <a:solidFill>
-                  <a:srgbClr val="FFFFFF"/>
-                </a:solidFill>
-                <a:latin typeface="Calibri" pitchFamily="34" charset="0"/>
-                <a:ea typeface="Calibri" pitchFamily="34" charset="-122"/>
-                <a:cs typeface="Calibri" pitchFamily="34" charset="-120"/>
-              </a:rPr>
-              <a:t>🔧 Features adicionales</a:t>
-            </a:r>
-            <a:endParaRPr lang="en-US" sz="1200" dirty="0"/>
-          </a:p>
-        </p:txBody>
-      </p:sp>
-      <p:sp>
-        <p:nvSpPr>
-          <p:cNvPr id="18" name="Text 16"/>
-          <p:cNvSpPr/>
-          <p:nvPr/>
-        </p:nvSpPr>
-        <p:spPr>
-          <a:xfrm>
-            <a:off x="5120640" y="2276856"/>
-            <a:ext cx="3566160" cy="457200"/>
-          </a:xfrm>
-          <a:prstGeom prst="rect">
-            <a:avLst/>
-          </a:prstGeom>
-          <a:noFill/>
-          <a:ln/>
-        </p:spPr>
-        <p:txBody>
-          <a:bodyPr wrap="square" rtlCol="0" anchor="ctr"/>
-          <a:lstStyle/>
-          <a:p>
-            <a:pPr marL="0" indent="0">
-              <a:buNone/>
-            </a:pPr>
-            <a:r>
-              <a:rPr lang="en-US" sz="1100" i="1" dirty="0">
-                <a:solidFill>
-                  <a:srgbClr val="14B8A6"/>
-                </a:solidFill>
-                <a:latin typeface="Calibri" pitchFamily="34" charset="0"/>
-                <a:ea typeface="Calibri" pitchFamily="34" charset="-122"/>
-                <a:cs typeface="Calibri" pitchFamily="34" charset="-120"/>
-              </a:rPr>
-              <a:t>Estacionalidad, días entre compras, categoría de producto preferida, RFM avanzado.</a:t>
-            </a:r>
-            <a:endParaRPr lang="en-US" sz="1100" dirty="0"/>
-          </a:p>
-        </p:txBody>
-      </p:sp>
-      <p:sp>
-        <p:nvSpPr>
-          <p:cNvPr id="19" name="Shape 17"/>
-          <p:cNvSpPr/>
-          <p:nvPr/>
-        </p:nvSpPr>
-        <p:spPr>
-          <a:xfrm>
-            <a:off x="4983480" y="2926080"/>
-            <a:ext cx="3840480" cy="868680"/>
-          </a:xfrm>
-          <a:prstGeom prst="rect">
-            <a:avLst/>
-          </a:prstGeom>
-          <a:solidFill>
-            <a:srgbClr val="FFFFFF">
-              <a:alpha val="90000"/>
-            </a:srgbClr>
-          </a:solidFill>
-          <a:ln w="12700">
-            <a:solidFill>
-              <a:srgbClr val="FFFFFF">
-                <a:alpha val="40000"/>
-              </a:srgbClr>
-            </a:solidFill>
-            <a:prstDash val="solid"/>
-          </a:ln>
-        </p:spPr>
-        <p:txBody>
-          <a:bodyPr/>
-          <a:lstStyle/>
-          <a:p>
-            <a:endParaRPr lang="es-ES"/>
-          </a:p>
-        </p:txBody>
-      </p:sp>
-      <p:sp>
-        <p:nvSpPr>
-          <p:cNvPr id="20" name="Text 18"/>
-          <p:cNvSpPr/>
-          <p:nvPr/>
-        </p:nvSpPr>
-        <p:spPr>
-          <a:xfrm>
-            <a:off x="5120640" y="2944368"/>
-            <a:ext cx="3566160" cy="292608"/>
-          </a:xfrm>
-          <a:prstGeom prst="rect">
-            <a:avLst/>
-          </a:prstGeom>
-          <a:noFill/>
-          <a:ln/>
-        </p:spPr>
-        <p:txBody>
-          <a:bodyPr wrap="square" rtlCol="0" anchor="ctr"/>
-          <a:lstStyle/>
-          <a:p>
-            <a:pPr marL="0" indent="0">
-              <a:buNone/>
-            </a:pPr>
-            <a:r>
-              <a:rPr lang="en-US" sz="1200" b="1" dirty="0">
-                <a:solidFill>
-                  <a:srgbClr val="FFFFFF"/>
-                </a:solidFill>
-                <a:latin typeface="Calibri" pitchFamily="34" charset="0"/>
-                <a:ea typeface="Calibri" pitchFamily="34" charset="-122"/>
-                <a:cs typeface="Calibri" pitchFamily="34" charset="-120"/>
-              </a:rPr>
-              <a:t>♻️ Reentrenamiento periódico</a:t>
-            </a:r>
-            <a:endParaRPr lang="en-US" sz="1200" dirty="0"/>
-          </a:p>
-        </p:txBody>
-      </p:sp>
-      <p:sp>
-        <p:nvSpPr>
-          <p:cNvPr id="21" name="Text 19"/>
-          <p:cNvSpPr/>
-          <p:nvPr/>
-        </p:nvSpPr>
-        <p:spPr>
-          <a:xfrm>
-            <a:off x="5120640" y="3236976"/>
-            <a:ext cx="3566160" cy="457200"/>
-          </a:xfrm>
-          <a:prstGeom prst="rect">
-            <a:avLst/>
-          </a:prstGeom>
-          <a:noFill/>
-          <a:ln/>
-        </p:spPr>
-        <p:txBody>
-          <a:bodyPr wrap="square" rtlCol="0" anchor="ctr"/>
-          <a:lstStyle/>
-          <a:p>
-            <a:pPr marL="0" indent="0">
-              <a:buNone/>
-            </a:pPr>
-            <a:r>
-              <a:rPr lang="en-US" sz="1100" i="1" dirty="0">
-                <a:solidFill>
-                  <a:srgbClr val="14B8A6"/>
-                </a:solidFill>
-                <a:latin typeface="Calibri" pitchFamily="34" charset="0"/>
-                <a:ea typeface="Calibri" pitchFamily="34" charset="-122"/>
-                <a:cs typeface="Calibri" pitchFamily="34" charset="-120"/>
-              </a:rPr>
-              <a:t>El comportamiento de los clientes cambia. Programar reentrenamiento mensual o trimestral.</a:t>
-            </a:r>
-            <a:endParaRPr lang="en-US" sz="1100" dirty="0"/>
-          </a:p>
-        </p:txBody>
-      </p:sp>
-      <p:sp>
-        <p:nvSpPr>
-          <p:cNvPr id="22" name="Shape 20"/>
-          <p:cNvSpPr/>
-          <p:nvPr/>
-        </p:nvSpPr>
-        <p:spPr>
-          <a:xfrm>
-            <a:off x="4983480" y="3886200"/>
-            <a:ext cx="3840480" cy="868680"/>
-          </a:xfrm>
-          <a:prstGeom prst="rect">
-            <a:avLst/>
-          </a:prstGeom>
-          <a:solidFill>
-            <a:srgbClr val="FFFFFF">
-              <a:alpha val="90000"/>
-            </a:srgbClr>
-          </a:solidFill>
-          <a:ln w="12700">
-            <a:solidFill>
-              <a:srgbClr val="FFFFFF">
-                <a:alpha val="40000"/>
-              </a:srgbClr>
-            </a:solidFill>
-            <a:prstDash val="solid"/>
-          </a:ln>
-        </p:spPr>
-        <p:txBody>
-          <a:bodyPr/>
-          <a:lstStyle/>
-          <a:p>
-            <a:endParaRPr lang="es-ES"/>
-          </a:p>
-        </p:txBody>
-      </p:sp>
-      <p:sp>
-        <p:nvSpPr>
-          <p:cNvPr id="23" name="Text 21"/>
-          <p:cNvSpPr/>
-          <p:nvPr/>
-        </p:nvSpPr>
-        <p:spPr>
-          <a:xfrm>
-            <a:off x="5120640" y="3904488"/>
-            <a:ext cx="3566160" cy="292608"/>
-          </a:xfrm>
-          <a:prstGeom prst="rect">
-            <a:avLst/>
-          </a:prstGeom>
-          <a:noFill/>
-          <a:ln/>
-        </p:spPr>
-        <p:txBody>
-          <a:bodyPr wrap="square" rtlCol="0" anchor="ctr"/>
-          <a:lstStyle/>
-          <a:p>
-            <a:pPr marL="0" indent="0">
-              <a:buNone/>
-            </a:pPr>
-            <a:r>
-              <a:rPr lang="en-US" sz="1200" b="1" dirty="0">
-                <a:solidFill>
-                  <a:srgbClr val="FFFFFF"/>
-                </a:solidFill>
-                <a:latin typeface="Calibri" pitchFamily="34" charset="0"/>
-                <a:ea typeface="Calibri" pitchFamily="34" charset="-122"/>
-                <a:cs typeface="Calibri" pitchFamily="34" charset="-120"/>
-              </a:rPr>
-              <a:t>👥 Segmentación mayorista/minorista</a:t>
-            </a:r>
-            <a:endParaRPr lang="en-US" sz="1200" dirty="0"/>
-          </a:p>
-        </p:txBody>
-      </p:sp>
-      <p:sp>
-        <p:nvSpPr>
-          <p:cNvPr id="24" name="Text 22"/>
-          <p:cNvSpPr/>
-          <p:nvPr/>
-        </p:nvSpPr>
-        <p:spPr>
-          <a:xfrm>
-            <a:off x="5120640" y="4197096"/>
-            <a:ext cx="3566160" cy="457200"/>
-          </a:xfrm>
-          <a:prstGeom prst="rect">
-            <a:avLst/>
-          </a:prstGeom>
-          <a:noFill/>
-          <a:ln/>
-        </p:spPr>
-        <p:txBody>
-          <a:bodyPr wrap="square" rtlCol="0" anchor="ctr"/>
-          <a:lstStyle/>
-          <a:p>
-            <a:pPr marL="0" indent="0">
-              <a:buNone/>
-            </a:pPr>
-            <a:r>
-              <a:rPr lang="en-US" sz="1100" i="1" dirty="0">
-                <a:solidFill>
-                  <a:srgbClr val="14B8A6"/>
-                </a:solidFill>
-                <a:latin typeface="Calibri" pitchFamily="34" charset="0"/>
-                <a:ea typeface="Calibri" pitchFamily="34" charset="-122"/>
-                <a:cs typeface="Calibri" pitchFamily="34" charset="-120"/>
-              </a:rPr>
-              <a:t>Construir modelos separados para perfiles de compra muy distintos.</a:t>
-            </a:r>
             <a:endParaRPr lang="en-US" sz="1100" dirty="0"/>
           </a:p>
         </p:txBody>
@@ -5950,53 +3720,14 @@
       </p:sp>
       <p:sp>
         <p:nvSpPr>
-          <p:cNvPr id="4" name="Shape 2"/>
-          <p:cNvSpPr/>
-          <p:nvPr/>
-        </p:nvSpPr>
-        <p:spPr>
-          <a:xfrm>
-            <a:off x="320040" y="960120"/>
-            <a:ext cx="1965960" cy="960120"/>
-          </a:xfrm>
-          <a:prstGeom prst="rect">
-            <a:avLst/>
-          </a:prstGeom>
-          <a:solidFill>
-            <a:srgbClr val="0B6E6E"/>
-          </a:solidFill>
-          <a:ln w="12700">
-            <a:solidFill>
-              <a:srgbClr val="0B6E6E"/>
-            </a:solidFill>
-            <a:prstDash val="solid"/>
-          </a:ln>
-          <a:effectLst>
-            <a:outerShdw blurRad="101600" dist="38100" dir="8100000" algn="bl" rotWithShape="0">
-              <a:srgbClr val="000000">
-                <a:alpha val="10000"/>
-              </a:srgbClr>
-            </a:outerShdw>
-          </a:effectLst>
-        </p:spPr>
-        <p:txBody>
-          <a:bodyPr/>
-          <a:lstStyle/>
-          <a:p>
-            <a:endParaRPr lang="es-ES"/>
-          </a:p>
-        </p:txBody>
-      </p:sp>
-      <p:sp>
-        <p:nvSpPr>
-          <p:cNvPr id="5" name="Text 3"/>
-          <p:cNvSpPr/>
-          <p:nvPr/>
-        </p:nvSpPr>
-        <p:spPr>
-          <a:xfrm>
-            <a:off x="320040" y="1005840"/>
-            <a:ext cx="1965960" cy="475488"/>
+          <p:cNvPr id="16" name="Text 14"/>
+          <p:cNvSpPr/>
+          <p:nvPr/>
+        </p:nvSpPr>
+        <p:spPr>
+          <a:xfrm>
+            <a:off x="2122714" y="1293223"/>
+            <a:ext cx="4114800" cy="320040"/>
           </a:xfrm>
           <a:prstGeom prst="rect">
             <a:avLst/>
@@ -6012,436 +3743,7 @@
               <a:buNone/>
             </a:pPr>
             <a:r>
-              <a:rPr lang="en-US" sz="2200" b="1" dirty="0">
-                <a:solidFill>
-                  <a:srgbClr val="FFFFFF"/>
-                </a:solidFill>
-                <a:latin typeface="Calibri" pitchFamily="34" charset="0"/>
-                <a:ea typeface="Calibri" pitchFamily="34" charset="-122"/>
-                <a:cs typeface="Calibri" pitchFamily="34" charset="-120"/>
-              </a:rPr>
-              <a:t>1,067,371</a:t>
-            </a:r>
-            <a:endParaRPr lang="en-US" sz="2200" dirty="0"/>
-          </a:p>
-        </p:txBody>
-      </p:sp>
-      <p:sp>
-        <p:nvSpPr>
-          <p:cNvPr id="6" name="Text 4"/>
-          <p:cNvSpPr/>
-          <p:nvPr/>
-        </p:nvSpPr>
-        <p:spPr>
-          <a:xfrm>
-            <a:off x="320040" y="1463040"/>
-            <a:ext cx="1965960" cy="347472"/>
-          </a:xfrm>
-          <a:prstGeom prst="rect">
-            <a:avLst/>
-          </a:prstGeom>
-          <a:noFill/>
-          <a:ln/>
-        </p:spPr>
-        <p:txBody>
-          <a:bodyPr wrap="square" rtlCol="0" anchor="ctr"/>
-          <a:lstStyle/>
-          <a:p>
-            <a:pPr marL="0" indent="0" algn="ctr">
-              <a:buNone/>
-            </a:pPr>
-            <a:r>
-              <a:rPr lang="en-US" sz="1100" dirty="0">
-                <a:solidFill>
-                  <a:srgbClr val="14B8A6"/>
-                </a:solidFill>
-                <a:latin typeface="Calibri" pitchFamily="34" charset="0"/>
-                <a:ea typeface="Calibri" pitchFamily="34" charset="-122"/>
-                <a:cs typeface="Calibri" pitchFamily="34" charset="-120"/>
-              </a:rPr>
-              <a:t>filas originales</a:t>
-            </a:r>
-            <a:endParaRPr lang="en-US" sz="1100" dirty="0"/>
-          </a:p>
-        </p:txBody>
-      </p:sp>
-      <p:sp>
-        <p:nvSpPr>
-          <p:cNvPr id="7" name="Shape 5"/>
-          <p:cNvSpPr/>
-          <p:nvPr/>
-        </p:nvSpPr>
-        <p:spPr>
-          <a:xfrm>
-            <a:off x="2468880" y="960120"/>
-            <a:ext cx="1965960" cy="960120"/>
-          </a:xfrm>
-          <a:prstGeom prst="rect">
-            <a:avLst/>
-          </a:prstGeom>
-          <a:solidFill>
-            <a:srgbClr val="0B6E6E"/>
-          </a:solidFill>
-          <a:ln w="12700">
-            <a:solidFill>
-              <a:srgbClr val="0B6E6E"/>
-            </a:solidFill>
-            <a:prstDash val="solid"/>
-          </a:ln>
-          <a:effectLst>
-            <a:outerShdw blurRad="101600" dist="38100" dir="8100000" algn="bl" rotWithShape="0">
-              <a:srgbClr val="000000">
-                <a:alpha val="10000"/>
-              </a:srgbClr>
-            </a:outerShdw>
-          </a:effectLst>
-        </p:spPr>
-        <p:txBody>
-          <a:bodyPr/>
-          <a:lstStyle/>
-          <a:p>
-            <a:endParaRPr lang="es-ES"/>
-          </a:p>
-        </p:txBody>
-      </p:sp>
-      <p:sp>
-        <p:nvSpPr>
-          <p:cNvPr id="8" name="Text 6"/>
-          <p:cNvSpPr/>
-          <p:nvPr/>
-        </p:nvSpPr>
-        <p:spPr>
-          <a:xfrm>
-            <a:off x="2468880" y="1005840"/>
-            <a:ext cx="1965960" cy="475488"/>
-          </a:xfrm>
-          <a:prstGeom prst="rect">
-            <a:avLst/>
-          </a:prstGeom>
-          <a:noFill/>
-          <a:ln/>
-        </p:spPr>
-        <p:txBody>
-          <a:bodyPr wrap="square" rtlCol="0" anchor="ctr"/>
-          <a:lstStyle/>
-          <a:p>
-            <a:pPr marL="0" indent="0" algn="ctr">
-              <a:buNone/>
-            </a:pPr>
-            <a:r>
-              <a:rPr lang="en-US" sz="2200" b="1" dirty="0">
-                <a:solidFill>
-                  <a:srgbClr val="FFFFFF"/>
-                </a:solidFill>
-                <a:latin typeface="Calibri" pitchFamily="34" charset="0"/>
-                <a:ea typeface="Calibri" pitchFamily="34" charset="-122"/>
-                <a:cs typeface="Calibri" pitchFamily="34" charset="-120"/>
-              </a:rPr>
-              <a:t>~797K</a:t>
-            </a:r>
-            <a:endParaRPr lang="en-US" sz="2200" dirty="0"/>
-          </a:p>
-        </p:txBody>
-      </p:sp>
-      <p:sp>
-        <p:nvSpPr>
-          <p:cNvPr id="9" name="Text 7"/>
-          <p:cNvSpPr/>
-          <p:nvPr/>
-        </p:nvSpPr>
-        <p:spPr>
-          <a:xfrm>
-            <a:off x="2468880" y="1463040"/>
-            <a:ext cx="1965960" cy="347472"/>
-          </a:xfrm>
-          <a:prstGeom prst="rect">
-            <a:avLst/>
-          </a:prstGeom>
-          <a:noFill/>
-          <a:ln/>
-        </p:spPr>
-        <p:txBody>
-          <a:bodyPr wrap="square" rtlCol="0" anchor="ctr"/>
-          <a:lstStyle/>
-          <a:p>
-            <a:pPr marL="0" indent="0" algn="ctr">
-              <a:buNone/>
-            </a:pPr>
-            <a:r>
-              <a:rPr lang="en-US" sz="1100" dirty="0">
-                <a:solidFill>
-                  <a:srgbClr val="14B8A6"/>
-                </a:solidFill>
-                <a:latin typeface="Calibri" pitchFamily="34" charset="0"/>
-                <a:ea typeface="Calibri" pitchFamily="34" charset="-122"/>
-                <a:cs typeface="Calibri" pitchFamily="34" charset="-120"/>
-              </a:rPr>
-              <a:t>filas limpias</a:t>
-            </a:r>
-            <a:endParaRPr lang="en-US" sz="1100" dirty="0"/>
-          </a:p>
-        </p:txBody>
-      </p:sp>
-      <p:sp>
-        <p:nvSpPr>
-          <p:cNvPr id="10" name="Shape 8"/>
-          <p:cNvSpPr/>
-          <p:nvPr/>
-        </p:nvSpPr>
-        <p:spPr>
-          <a:xfrm>
-            <a:off x="4617720" y="960120"/>
-            <a:ext cx="1965960" cy="960120"/>
-          </a:xfrm>
-          <a:prstGeom prst="rect">
-            <a:avLst/>
-          </a:prstGeom>
-          <a:solidFill>
-            <a:srgbClr val="0B6E6E"/>
-          </a:solidFill>
-          <a:ln w="12700">
-            <a:solidFill>
-              <a:srgbClr val="0B6E6E"/>
-            </a:solidFill>
-            <a:prstDash val="solid"/>
-          </a:ln>
-          <a:effectLst>
-            <a:outerShdw blurRad="101600" dist="38100" dir="8100000" algn="bl" rotWithShape="0">
-              <a:srgbClr val="000000">
-                <a:alpha val="10000"/>
-              </a:srgbClr>
-            </a:outerShdw>
-          </a:effectLst>
-        </p:spPr>
-        <p:txBody>
-          <a:bodyPr/>
-          <a:lstStyle/>
-          <a:p>
-            <a:endParaRPr lang="es-ES"/>
-          </a:p>
-        </p:txBody>
-      </p:sp>
-      <p:sp>
-        <p:nvSpPr>
-          <p:cNvPr id="11" name="Text 9"/>
-          <p:cNvSpPr/>
-          <p:nvPr/>
-        </p:nvSpPr>
-        <p:spPr>
-          <a:xfrm>
-            <a:off x="4617720" y="1005840"/>
-            <a:ext cx="1965960" cy="475488"/>
-          </a:xfrm>
-          <a:prstGeom prst="rect">
-            <a:avLst/>
-          </a:prstGeom>
-          <a:noFill/>
-          <a:ln/>
-        </p:spPr>
-        <p:txBody>
-          <a:bodyPr wrap="square" rtlCol="0" anchor="ctr"/>
-          <a:lstStyle/>
-          <a:p>
-            <a:pPr marL="0" indent="0" algn="ctr">
-              <a:buNone/>
-            </a:pPr>
-            <a:r>
-              <a:rPr lang="en-US" sz="2200" b="1" dirty="0">
-                <a:solidFill>
-                  <a:srgbClr val="FFFFFF"/>
-                </a:solidFill>
-                <a:latin typeface="Calibri" pitchFamily="34" charset="0"/>
-                <a:ea typeface="Calibri" pitchFamily="34" charset="-122"/>
-                <a:cs typeface="Calibri" pitchFamily="34" charset="-120"/>
-              </a:rPr>
-              <a:t>4,338</a:t>
-            </a:r>
-            <a:endParaRPr lang="en-US" sz="2200" dirty="0"/>
-          </a:p>
-        </p:txBody>
-      </p:sp>
-      <p:sp>
-        <p:nvSpPr>
-          <p:cNvPr id="12" name="Text 10"/>
-          <p:cNvSpPr/>
-          <p:nvPr/>
-        </p:nvSpPr>
-        <p:spPr>
-          <a:xfrm>
-            <a:off x="4617720" y="1463040"/>
-            <a:ext cx="1965960" cy="347472"/>
-          </a:xfrm>
-          <a:prstGeom prst="rect">
-            <a:avLst/>
-          </a:prstGeom>
-          <a:noFill/>
-          <a:ln/>
-        </p:spPr>
-        <p:txBody>
-          <a:bodyPr wrap="square" rtlCol="0" anchor="ctr"/>
-          <a:lstStyle/>
-          <a:p>
-            <a:pPr marL="0" indent="0" algn="ctr">
-              <a:buNone/>
-            </a:pPr>
-            <a:r>
-              <a:rPr lang="en-US" sz="1100" dirty="0">
-                <a:solidFill>
-                  <a:srgbClr val="14B8A6"/>
-                </a:solidFill>
-                <a:latin typeface="Calibri" pitchFamily="34" charset="0"/>
-                <a:ea typeface="Calibri" pitchFamily="34" charset="-122"/>
-                <a:cs typeface="Calibri" pitchFamily="34" charset="-120"/>
-              </a:rPr>
-              <a:t>clientes únicos</a:t>
-            </a:r>
-            <a:endParaRPr lang="en-US" sz="1100" dirty="0"/>
-          </a:p>
-        </p:txBody>
-      </p:sp>
-      <p:sp>
-        <p:nvSpPr>
-          <p:cNvPr id="13" name="Shape 11"/>
-          <p:cNvSpPr/>
-          <p:nvPr/>
-        </p:nvSpPr>
-        <p:spPr>
-          <a:xfrm>
-            <a:off x="6766560" y="960120"/>
-            <a:ext cx="1965960" cy="960120"/>
-          </a:xfrm>
-          <a:prstGeom prst="rect">
-            <a:avLst/>
-          </a:prstGeom>
-          <a:solidFill>
-            <a:srgbClr val="0B6E6E"/>
-          </a:solidFill>
-          <a:ln w="12700">
-            <a:solidFill>
-              <a:srgbClr val="0B6E6E"/>
-            </a:solidFill>
-            <a:prstDash val="solid"/>
-          </a:ln>
-          <a:effectLst>
-            <a:outerShdw blurRad="101600" dist="38100" dir="8100000" algn="bl" rotWithShape="0">
-              <a:srgbClr val="000000">
-                <a:alpha val="10000"/>
-              </a:srgbClr>
-            </a:outerShdw>
-          </a:effectLst>
-        </p:spPr>
-        <p:txBody>
-          <a:bodyPr/>
-          <a:lstStyle/>
-          <a:p>
-            <a:endParaRPr lang="es-ES"/>
-          </a:p>
-        </p:txBody>
-      </p:sp>
-      <p:sp>
-        <p:nvSpPr>
-          <p:cNvPr id="14" name="Text 12"/>
-          <p:cNvSpPr/>
-          <p:nvPr/>
-        </p:nvSpPr>
-        <p:spPr>
-          <a:xfrm>
-            <a:off x="6766560" y="1005840"/>
-            <a:ext cx="1965960" cy="475488"/>
-          </a:xfrm>
-          <a:prstGeom prst="rect">
-            <a:avLst/>
-          </a:prstGeom>
-          <a:noFill/>
-          <a:ln/>
-        </p:spPr>
-        <p:txBody>
-          <a:bodyPr wrap="square" rtlCol="0" anchor="ctr"/>
-          <a:lstStyle/>
-          <a:p>
-            <a:pPr marL="0" indent="0" algn="ctr">
-              <a:buNone/>
-            </a:pPr>
-            <a:r>
-              <a:rPr lang="en-US" sz="2200" b="1" dirty="0">
-                <a:solidFill>
-                  <a:srgbClr val="FFFFFF"/>
-                </a:solidFill>
-                <a:latin typeface="Calibri" pitchFamily="34" charset="0"/>
-                <a:ea typeface="Calibri" pitchFamily="34" charset="-122"/>
-                <a:cs typeface="Calibri" pitchFamily="34" charset="-120"/>
-              </a:rPr>
-              <a:t>2009–2011</a:t>
-            </a:r>
-            <a:endParaRPr lang="en-US" sz="2200" dirty="0"/>
-          </a:p>
-        </p:txBody>
-      </p:sp>
-      <p:sp>
-        <p:nvSpPr>
-          <p:cNvPr id="15" name="Text 13"/>
-          <p:cNvSpPr/>
-          <p:nvPr/>
-        </p:nvSpPr>
-        <p:spPr>
-          <a:xfrm>
-            <a:off x="6766560" y="1463040"/>
-            <a:ext cx="1965960" cy="347472"/>
-          </a:xfrm>
-          <a:prstGeom prst="rect">
-            <a:avLst/>
-          </a:prstGeom>
-          <a:noFill/>
-          <a:ln/>
-        </p:spPr>
-        <p:txBody>
-          <a:bodyPr wrap="square" rtlCol="0" anchor="ctr"/>
-          <a:lstStyle/>
-          <a:p>
-            <a:pPr marL="0" indent="0" algn="ctr">
-              <a:buNone/>
-            </a:pPr>
-            <a:r>
-              <a:rPr lang="en-US" sz="1100" dirty="0">
-                <a:solidFill>
-                  <a:srgbClr val="14B8A6"/>
-                </a:solidFill>
-                <a:latin typeface="Calibri" pitchFamily="34" charset="0"/>
-                <a:ea typeface="Calibri" pitchFamily="34" charset="-122"/>
-                <a:cs typeface="Calibri" pitchFamily="34" charset="-120"/>
-              </a:rPr>
-              <a:t>rango temporal</a:t>
-            </a:r>
-            <a:endParaRPr lang="en-US" sz="1100" dirty="0"/>
-          </a:p>
-        </p:txBody>
-      </p:sp>
-      <p:sp>
-        <p:nvSpPr>
-          <p:cNvPr id="16" name="Text 14"/>
-          <p:cNvSpPr/>
-          <p:nvPr/>
-        </p:nvSpPr>
-        <p:spPr>
-          <a:xfrm>
-            <a:off x="320040" y="2148840"/>
-            <a:ext cx="4114800" cy="320040"/>
-          </a:xfrm>
-          <a:prstGeom prst="rect">
-            <a:avLst/>
-          </a:prstGeom>
-          <a:noFill/>
-          <a:ln/>
-        </p:spPr>
-        <p:txBody>
-          <a:bodyPr wrap="square" rtlCol="0" anchor="ctr"/>
-          <a:lstStyle/>
-          <a:p>
-            <a:pPr marL="0" indent="0">
-              <a:buNone/>
-            </a:pPr>
-            <a:r>
-              <a:rPr lang="en-US" sz="1300" b="1" dirty="0">
+              <a:rPr lang="en-US" b="1" dirty="0">
                 <a:solidFill>
                   <a:srgbClr val="0F2D5B"/>
                 </a:solidFill>
@@ -6451,7 +3753,7 @@
               </a:rPr>
               <a:t>Filtros aplicados</a:t>
             </a:r>
-            <a:endParaRPr lang="en-US" sz="1300" dirty="0"/>
+            <a:endParaRPr lang="en-US" dirty="0"/>
           </a:p>
         </p:txBody>
       </p:sp>
@@ -6464,14 +3766,14 @@
           <p:nvPr>
             <p:extLst>
               <p:ext uri="{D42A27DB-BD31-4B8C-83A1-F6EECF244321}">
-                <p14:modId xmlns:p14="http://schemas.microsoft.com/office/powerpoint/2010/main" val="1579011935"/>
+                <p14:modId xmlns:p14="http://schemas.microsoft.com/office/powerpoint/2010/main" val="738792338"/>
               </p:ext>
             </p:extLst>
           </p:nvPr>
         </p:nvGraphicFramePr>
         <p:xfrm>
-          <a:off x="320040" y="2487168"/>
-          <a:ext cx="8503920" cy="2112264"/>
+          <a:off x="339634" y="1664208"/>
+          <a:ext cx="8503920" cy="2569464"/>
         </p:xfrm>
         <a:graphic>
           <a:graphicData uri="http://schemas.openxmlformats.org/drawingml/2006/table">
@@ -6797,7 +4099,7 @@
                           <a:ea typeface="Calibri" pitchFamily="34" charset="-122"/>
                           <a:cs typeface="Calibri" pitchFamily="34" charset="-120"/>
                         </a:rPr>
-                        <a:t>~9,288</a:t>
+                        <a:t>19.494</a:t>
                       </a:r>
                       <a:endParaRPr lang="en-US" sz="1200" dirty="0">
                         <a:latin typeface="Calibri" charset="0"/>
@@ -7008,7 +4310,7 @@
                           <a:ea typeface="Calibri" pitchFamily="34" charset="-122"/>
                           <a:cs typeface="Calibri" pitchFamily="34" charset="-120"/>
                         </a:rPr>
-                        <a:t>~243,007</a:t>
+                        <a:t>243.007</a:t>
                       </a:r>
                       <a:endParaRPr lang="en-US" sz="1200" dirty="0">
                         <a:latin typeface="Calibri" charset="0"/>
@@ -7219,7 +4521,7 @@
                           <a:ea typeface="Calibri" pitchFamily="34" charset="-122"/>
                           <a:cs typeface="Calibri" pitchFamily="34" charset="-120"/>
                         </a:rPr>
-                        <a:t>~3,868</a:t>
+                        <a:t>22.950</a:t>
                       </a:r>
                       <a:endParaRPr lang="en-US" sz="1200" dirty="0">
                         <a:latin typeface="Calibri" charset="0"/>
@@ -7430,7 +4732,7 @@
                           <a:ea typeface="Calibri" pitchFamily="34" charset="-122"/>
                           <a:cs typeface="Calibri" pitchFamily="34" charset="-120"/>
                         </a:rPr>
-                        <a:t>~2,515</a:t>
+                        <a:t>6.207</a:t>
                       </a:r>
                       <a:endParaRPr lang="en-US" sz="1200" dirty="0">
                         <a:latin typeface="Calibri" charset="0"/>
@@ -7573,7 +4875,73 @@
                           <a:ea typeface="Calibri" pitchFamily="34" charset="-122"/>
                           <a:cs typeface="Calibri" pitchFamily="34" charset="-120"/>
                         </a:rPr>
-                        <a:t>Outliers p99.9 (qty / precio)</a:t>
+                        <a:t>Outliers de </a:t>
+                      </a:r>
+                      <a:r>
+                        <a:rPr lang="en-US" sz="1200" dirty="0" err="1">
+                          <a:solidFill>
+                            <a:srgbClr val="000000"/>
+                          </a:solidFill>
+                          <a:latin typeface="Calibri" pitchFamily="34" charset="0"/>
+                          <a:ea typeface="Calibri" pitchFamily="34" charset="-122"/>
+                          <a:cs typeface="Calibri" pitchFamily="34" charset="-120"/>
+                        </a:rPr>
+                        <a:t>cantidad</a:t>
+                      </a:r>
+                      <a:r>
+                        <a:rPr lang="en-US" sz="1200" dirty="0">
+                          <a:solidFill>
+                            <a:srgbClr val="000000"/>
+                          </a:solidFill>
+                          <a:latin typeface="Calibri" pitchFamily="34" charset="0"/>
+                          <a:ea typeface="Calibri" pitchFamily="34" charset="-122"/>
+                          <a:cs typeface="Calibri" pitchFamily="34" charset="-120"/>
+                        </a:rPr>
+                        <a:t> y </a:t>
+                      </a:r>
+                      <a:r>
+                        <a:rPr lang="en-US" sz="1200" dirty="0" err="1">
+                          <a:solidFill>
+                            <a:srgbClr val="000000"/>
+                          </a:solidFill>
+                          <a:latin typeface="Calibri" pitchFamily="34" charset="0"/>
+                          <a:ea typeface="Calibri" pitchFamily="34" charset="-122"/>
+                          <a:cs typeface="Calibri" pitchFamily="34" charset="-120"/>
+                        </a:rPr>
+                        <a:t>precio</a:t>
+                      </a:r>
+                      <a:r>
+                        <a:rPr lang="en-US" sz="1200" dirty="0">
+                          <a:solidFill>
+                            <a:srgbClr val="000000"/>
+                          </a:solidFill>
+                          <a:latin typeface="Calibri" pitchFamily="34" charset="0"/>
+                          <a:ea typeface="Calibri" pitchFamily="34" charset="-122"/>
+                          <a:cs typeface="Calibri" pitchFamily="34" charset="-120"/>
+                        </a:rPr>
+                        <a:t> (</a:t>
+                      </a:r>
+                      <a:r>
+                        <a:rPr lang="en-US" sz="1200" dirty="0" err="1">
+                          <a:solidFill>
+                            <a:srgbClr val="000000"/>
+                          </a:solidFill>
+                          <a:latin typeface="Calibri" pitchFamily="34" charset="0"/>
+                          <a:ea typeface="Calibri" pitchFamily="34" charset="-122"/>
+                          <a:cs typeface="Calibri" pitchFamily="34" charset="-120"/>
+                        </a:rPr>
+                        <a:t>percentil</a:t>
+                      </a:r>
+                      <a:r>
+                        <a:rPr lang="en-US" sz="1200" dirty="0">
+                          <a:solidFill>
+                            <a:srgbClr val="000000"/>
+                          </a:solidFill>
+                          <a:latin typeface="Calibri" pitchFamily="34" charset="0"/>
+                          <a:ea typeface="Calibri" pitchFamily="34" charset="-122"/>
+                          <a:cs typeface="Calibri" pitchFamily="34" charset="-120"/>
+                        </a:rPr>
+                        <a:t> 99.9)</a:t>
                       </a:r>
                       <a:endParaRPr lang="en-US" sz="1200" dirty="0">
                         <a:latin typeface="Calibri" charset="0"/>
@@ -7641,7 +5009,7 @@
                           <a:ea typeface="Calibri" pitchFamily="34" charset="-122"/>
                           <a:cs typeface="Calibri" pitchFamily="34" charset="-120"/>
                         </a:rPr>
-                        <a:t>~1,050 (0.14%)</a:t>
+                        <a:t>1.513</a:t>
                       </a:r>
                       <a:endParaRPr lang="en-US" sz="1200" dirty="0">
                         <a:latin typeface="Calibri" charset="0"/>
@@ -7776,6 +5144,17 @@
                         <a:buNone/>
                       </a:pPr>
                       <a:r>
+                        <a:rPr lang="en-US" sz="1200" dirty="0" err="1">
+                          <a:solidFill>
+                            <a:srgbClr val="000000"/>
+                          </a:solidFill>
+                          <a:latin typeface="Calibri" pitchFamily="34" charset="0"/>
+                          <a:ea typeface="Calibri" pitchFamily="34" charset="-122"/>
+                          <a:cs typeface="Calibri" pitchFamily="34" charset="-120"/>
+                        </a:rPr>
+                        <a:t>Duplicados</a:t>
+                      </a:r>
+                      <a:r>
                         <a:rPr lang="en-US" sz="1200" dirty="0">
                           <a:solidFill>
                             <a:srgbClr val="000000"/>
@@ -7784,12 +5163,26 @@
                           <a:ea typeface="Calibri" pitchFamily="34" charset="-122"/>
                           <a:cs typeface="Calibri" pitchFamily="34" charset="-120"/>
                         </a:rPr>
-                        <a:t>Duplicados exactos</a:t>
+                        <a:t> </a:t>
+                      </a:r>
+                      <a:r>
+                        <a:rPr lang="en-US" sz="1200" dirty="0" err="1">
+                          <a:solidFill>
+                            <a:srgbClr val="000000"/>
+                          </a:solidFill>
+                          <a:latin typeface="Calibri" pitchFamily="34" charset="0"/>
+                          <a:ea typeface="Calibri" pitchFamily="34" charset="-122"/>
+                          <a:cs typeface="Calibri" pitchFamily="34" charset="-120"/>
+                        </a:rPr>
+                        <a:t>exactos</a:t>
                       </a:r>
                       <a:endParaRPr lang="en-US" sz="1200" dirty="0">
-                        <a:latin typeface="Calibri" charset="0"/>
-                        <a:ea typeface="Calibri" charset="0"/>
-                        <a:cs typeface="Calibri" charset="0"/>
+                        <a:solidFill>
+                          <a:srgbClr val="000000"/>
+                        </a:solidFill>
+                        <a:latin typeface="Calibri" pitchFamily="34" charset="0"/>
+                        <a:ea typeface="Calibri" pitchFamily="34" charset="-122"/>
+                        <a:cs typeface="Calibri" pitchFamily="34" charset="-120"/>
                       </a:endParaRPr>
                     </a:p>
                   </a:txBody>
@@ -7852,7 +5245,7 @@
                           <a:ea typeface="Calibri" pitchFamily="34" charset="-122"/>
                           <a:cs typeface="Calibri" pitchFamily="34" charset="-120"/>
                         </a:rPr>
-                        <a:t>Residuales</a:t>
+                        <a:t>26.124</a:t>
                       </a:r>
                       <a:endParaRPr lang="en-US" sz="1200" dirty="0">
                         <a:latin typeface="Calibri" charset="0"/>
@@ -7977,6 +5370,236 @@
                   </a:ext>
                 </a:extLst>
               </a:tr>
+              <a:tr h="301752">
+                <a:tc>
+                  <a:txBody>
+                    <a:bodyPr/>
+                    <a:lstStyle/>
+                    <a:p>
+                      <a:pPr marL="0" indent="0">
+                        <a:buNone/>
+                      </a:pPr>
+                      <a:r>
+                        <a:rPr lang="en-US" sz="1200" dirty="0">
+                          <a:solidFill>
+                            <a:srgbClr val="000000"/>
+                          </a:solidFill>
+                          <a:latin typeface="Calibri" pitchFamily="34" charset="0"/>
+                          <a:ea typeface="Calibri" pitchFamily="34" charset="-122"/>
+                          <a:cs typeface="Calibri" pitchFamily="34" charset="-120"/>
+                        </a:rPr>
+                        <a:t>Valores </a:t>
+                      </a:r>
+                      <a:r>
+                        <a:rPr lang="en-US" sz="1200" dirty="0" err="1">
+                          <a:solidFill>
+                            <a:srgbClr val="000000"/>
+                          </a:solidFill>
+                          <a:latin typeface="Calibri" pitchFamily="34" charset="0"/>
+                          <a:ea typeface="Calibri" pitchFamily="34" charset="-122"/>
+                          <a:cs typeface="Calibri" pitchFamily="34" charset="-120"/>
+                        </a:rPr>
+                        <a:t>nulos</a:t>
+                      </a:r>
+                      <a:endParaRPr lang="en-US" sz="1200" dirty="0">
+                        <a:solidFill>
+                          <a:srgbClr val="000000"/>
+                        </a:solidFill>
+                        <a:latin typeface="Calibri" pitchFamily="34" charset="0"/>
+                        <a:ea typeface="Calibri" pitchFamily="34" charset="-122"/>
+                        <a:cs typeface="Calibri" pitchFamily="34" charset="-120"/>
+                      </a:endParaRPr>
+                    </a:p>
+                  </a:txBody>
+                  <a:tcPr>
+                    <a:lnL w="6350" cap="flat" cmpd="sng" algn="ctr">
+                      <a:solidFill>
+                        <a:srgbClr val="E2E8F0"/>
+                      </a:solidFill>
+                      <a:prstDash val="solid"/>
+                      <a:round/>
+                      <a:headEnd type="none" w="med" len="med"/>
+                      <a:tailEnd type="none" w="med" len="med"/>
+                    </a:lnL>
+                    <a:lnR w="6350" cap="flat" cmpd="sng" algn="ctr">
+                      <a:solidFill>
+                        <a:srgbClr val="E2E8F0"/>
+                      </a:solidFill>
+                      <a:prstDash val="solid"/>
+                      <a:round/>
+                      <a:headEnd type="none" w="med" len="med"/>
+                      <a:tailEnd type="none" w="med" len="med"/>
+                    </a:lnR>
+                    <a:lnT w="6350" cap="flat" cmpd="sng" algn="ctr">
+                      <a:solidFill>
+                        <a:srgbClr val="E2E8F0"/>
+                      </a:solidFill>
+                      <a:prstDash val="solid"/>
+                      <a:round/>
+                      <a:headEnd type="none" w="med" len="med"/>
+                      <a:tailEnd type="none" w="med" len="med"/>
+                    </a:lnT>
+                    <a:lnB w="6350" cap="flat" cmpd="sng" algn="ctr">
+                      <a:solidFill>
+                        <a:srgbClr val="E2E8F0"/>
+                      </a:solidFill>
+                      <a:prstDash val="solid"/>
+                      <a:round/>
+                      <a:headEnd type="none" w="med" len="med"/>
+                      <a:tailEnd type="none" w="med" len="med"/>
+                    </a:lnB>
+                    <a:solidFill>
+                      <a:srgbClr val="FFFFFF"/>
+                    </a:solidFill>
+                  </a:tcPr>
+                </a:tc>
+                <a:tc>
+                  <a:txBody>
+                    <a:bodyPr/>
+                    <a:lstStyle/>
+                    <a:p>
+                      <a:pPr marL="0" indent="0">
+                        <a:buNone/>
+                      </a:pPr>
+                      <a:r>
+                        <a:rPr lang="en-US" sz="1200" dirty="0">
+                          <a:latin typeface="Calibri" charset="0"/>
+                          <a:ea typeface="Calibri" charset="0"/>
+                          <a:cs typeface="Calibri" charset="0"/>
+                        </a:rPr>
+                        <a:t>0</a:t>
+                      </a:r>
+                    </a:p>
+                  </a:txBody>
+                  <a:tcPr>
+                    <a:lnL w="6350" cap="flat" cmpd="sng" algn="ctr">
+                      <a:solidFill>
+                        <a:srgbClr val="E2E8F0"/>
+                      </a:solidFill>
+                      <a:prstDash val="solid"/>
+                      <a:round/>
+                      <a:headEnd type="none" w="med" len="med"/>
+                      <a:tailEnd type="none" w="med" len="med"/>
+                    </a:lnL>
+                    <a:lnR w="6350" cap="flat" cmpd="sng" algn="ctr">
+                      <a:solidFill>
+                        <a:srgbClr val="E2E8F0"/>
+                      </a:solidFill>
+                      <a:prstDash val="solid"/>
+                      <a:round/>
+                      <a:headEnd type="none" w="med" len="med"/>
+                      <a:tailEnd type="none" w="med" len="med"/>
+                    </a:lnR>
+                    <a:lnT w="6350" cap="flat" cmpd="sng" algn="ctr">
+                      <a:solidFill>
+                        <a:srgbClr val="E2E8F0"/>
+                      </a:solidFill>
+                      <a:prstDash val="solid"/>
+                      <a:round/>
+                      <a:headEnd type="none" w="med" len="med"/>
+                      <a:tailEnd type="none" w="med" len="med"/>
+                    </a:lnT>
+                    <a:lnB w="6350" cap="flat" cmpd="sng" algn="ctr">
+                      <a:solidFill>
+                        <a:srgbClr val="E2E8F0"/>
+                      </a:solidFill>
+                      <a:prstDash val="solid"/>
+                      <a:round/>
+                      <a:headEnd type="none" w="med" len="med"/>
+                      <a:tailEnd type="none" w="med" len="med"/>
+                    </a:lnB>
+                    <a:solidFill>
+                      <a:srgbClr val="FFFFFF"/>
+                    </a:solidFill>
+                  </a:tcPr>
+                </a:tc>
+                <a:tc>
+                  <a:txBody>
+                    <a:bodyPr/>
+                    <a:lstStyle/>
+                    <a:p>
+                      <a:pPr marL="0" indent="0">
+                        <a:buNone/>
+                      </a:pPr>
+                      <a:r>
+                        <a:rPr lang="en-US" sz="1200" dirty="0" err="1">
+                          <a:latin typeface="Calibri" charset="0"/>
+                          <a:ea typeface="Calibri" charset="0"/>
+                          <a:cs typeface="Calibri" charset="0"/>
+                        </a:rPr>
+                        <a:t>Registros</a:t>
+                      </a:r>
+                      <a:r>
+                        <a:rPr lang="en-US" sz="1200" dirty="0">
+                          <a:latin typeface="Calibri" charset="0"/>
+                          <a:ea typeface="Calibri" charset="0"/>
+                          <a:cs typeface="Calibri" charset="0"/>
+                        </a:rPr>
+                        <a:t> </a:t>
+                      </a:r>
+                      <a:r>
+                        <a:rPr lang="en-US" sz="1200" dirty="0" err="1">
+                          <a:latin typeface="Calibri" charset="0"/>
+                          <a:ea typeface="Calibri" charset="0"/>
+                          <a:cs typeface="Calibri" charset="0"/>
+                        </a:rPr>
+                        <a:t>nulos</a:t>
+                      </a:r>
+                      <a:endParaRPr lang="en-US" sz="1200" dirty="0">
+                        <a:latin typeface="Calibri" charset="0"/>
+                        <a:ea typeface="Calibri" charset="0"/>
+                        <a:cs typeface="Calibri" charset="0"/>
+                      </a:endParaRPr>
+                    </a:p>
+                  </a:txBody>
+                  <a:tcPr>
+                    <a:lnL w="6350" cap="flat" cmpd="sng" algn="ctr">
+                      <a:solidFill>
+                        <a:srgbClr val="E2E8F0"/>
+                      </a:solidFill>
+                      <a:prstDash val="solid"/>
+                      <a:round/>
+                      <a:headEnd type="none" w="med" len="med"/>
+                      <a:tailEnd type="none" w="med" len="med"/>
+                    </a:lnL>
+                    <a:lnR w="6350" cap="flat" cmpd="sng" algn="ctr">
+                      <a:solidFill>
+                        <a:srgbClr val="E2E8F0"/>
+                      </a:solidFill>
+                      <a:prstDash val="solid"/>
+                      <a:round/>
+                      <a:headEnd type="none" w="med" len="med"/>
+                      <a:tailEnd type="none" w="med" len="med"/>
+                    </a:lnR>
+                    <a:lnT w="6350" cap="flat" cmpd="sng" algn="ctr">
+                      <a:solidFill>
+                        <a:srgbClr val="E2E8F0"/>
+                      </a:solidFill>
+                      <a:prstDash val="solid"/>
+                      <a:round/>
+                      <a:headEnd type="none" w="med" len="med"/>
+                      <a:tailEnd type="none" w="med" len="med"/>
+                    </a:lnT>
+                    <a:lnB w="6350" cap="flat" cmpd="sng" algn="ctr">
+                      <a:solidFill>
+                        <a:srgbClr val="E2E8F0"/>
+                      </a:solidFill>
+                      <a:prstDash val="solid"/>
+                      <a:round/>
+                      <a:headEnd type="none" w="med" len="med"/>
+                      <a:tailEnd type="none" w="med" len="med"/>
+                    </a:lnB>
+                    <a:solidFill>
+                      <a:srgbClr val="FFFFFF"/>
+                    </a:solidFill>
+                  </a:tcPr>
+                </a:tc>
+                <a:extLst>
+                  <a:ext uri="{0D108BD9-81ED-4DB2-BD59-A6C34878D82A}">
+                    <a16:rowId xmlns:a16="http://schemas.microsoft.com/office/drawing/2014/main" val="2594627615"/>
+                  </a:ext>
+                </a:extLst>
+              </a:tr>
             </a:tbl>
           </a:graphicData>
         </a:graphic>
@@ -7989,7 +5612,7 @@
         </p:nvSpPr>
         <p:spPr>
           <a:xfrm>
-            <a:off x="320040" y="2487168"/>
+            <a:off x="339634" y="1664208"/>
             <a:ext cx="8503920" cy="301752"/>
           </a:xfrm>
           <a:prstGeom prst="rect">
@@ -8021,7 +5644,7 @@
         </p:nvSpPr>
         <p:spPr>
           <a:xfrm>
-            <a:off x="411480" y="2487168"/>
+            <a:off x="431074" y="1664208"/>
             <a:ext cx="2834640" cy="301752"/>
           </a:xfrm>
           <a:prstGeom prst="rect">
@@ -8060,7 +5683,7 @@
         </p:nvSpPr>
         <p:spPr>
           <a:xfrm>
-            <a:off x="3246120" y="2487168"/>
+            <a:off x="3265714" y="1664208"/>
             <a:ext cx="1828800" cy="301752"/>
           </a:xfrm>
           <a:prstGeom prst="rect">
@@ -8099,7 +5722,7 @@
         </p:nvSpPr>
         <p:spPr>
           <a:xfrm>
-            <a:off x="5074920" y="2487168"/>
+            <a:off x="5094514" y="1664208"/>
             <a:ext cx="3657600" cy="301752"/>
           </a:xfrm>
           <a:prstGeom prst="rect">
@@ -8139,6 +5762,540 @@
 </file>
 
 <file path=ppt/slides/slide3.xml><?xml version="1.0" encoding="utf-8"?>
+<p:sld xmlns:a="http://schemas.openxmlformats.org/drawingml/2006/main" xmlns:r="http://schemas.openxmlformats.org/officeDocument/2006/relationships" xmlns:p="http://schemas.openxmlformats.org/presentationml/2006/main">
+  <p:cSld name="Slide 5">
+    <p:bg>
+      <p:bgPr>
+        <a:solidFill>
+          <a:srgbClr val="F4F7F8"/>
+        </a:solidFill>
+        <a:effectLst/>
+      </p:bgPr>
+    </p:bg>
+    <p:spTree>
+      <p:nvGrpSpPr>
+        <p:cNvPr id="1" name=""/>
+        <p:cNvGrpSpPr/>
+        <p:nvPr/>
+      </p:nvGrpSpPr>
+      <p:grpSpPr>
+        <a:xfrm>
+          <a:off x="0" y="0"/>
+          <a:ext cx="0" cy="0"/>
+          <a:chOff x="0" y="0"/>
+          <a:chExt cx="0" cy="0"/>
+        </a:xfrm>
+      </p:grpSpPr>
+      <p:sp>
+        <p:nvSpPr>
+          <p:cNvPr id="2" name="Shape 0"/>
+          <p:cNvSpPr/>
+          <p:nvPr/>
+        </p:nvSpPr>
+        <p:spPr>
+          <a:xfrm>
+            <a:off x="0" y="0"/>
+            <a:ext cx="9144000" cy="822960"/>
+          </a:xfrm>
+          <a:prstGeom prst="rect">
+            <a:avLst/>
+          </a:prstGeom>
+          <a:solidFill>
+            <a:srgbClr val="0F2D5B"/>
+          </a:solidFill>
+          <a:ln w="12700">
+            <a:solidFill>
+              <a:srgbClr val="0F2D5B"/>
+            </a:solidFill>
+            <a:prstDash val="solid"/>
+          </a:ln>
+        </p:spPr>
+        <p:txBody>
+          <a:bodyPr/>
+          <a:lstStyle/>
+          <a:p>
+            <a:endParaRPr lang="es-ES"/>
+          </a:p>
+        </p:txBody>
+      </p:sp>
+      <p:sp>
+        <p:nvSpPr>
+          <p:cNvPr id="3" name="Text 1"/>
+          <p:cNvSpPr/>
+          <p:nvPr/>
+        </p:nvSpPr>
+        <p:spPr>
+          <a:xfrm>
+            <a:off x="365760" y="0"/>
+            <a:ext cx="8412480" cy="822960"/>
+          </a:xfrm>
+          <a:prstGeom prst="rect">
+            <a:avLst/>
+          </a:prstGeom>
+          <a:noFill/>
+          <a:ln/>
+        </p:spPr>
+        <p:txBody>
+          <a:bodyPr wrap="square" rtlCol="0" anchor="ctr"/>
+          <a:lstStyle/>
+          <a:p>
+            <a:pPr marL="0" indent="0">
+              <a:buNone/>
+            </a:pPr>
+            <a:r>
+              <a:rPr lang="en-US" sz="2600" b="1" dirty="0">
+                <a:solidFill>
+                  <a:srgbClr val="FFFFFF"/>
+                </a:solidFill>
+                <a:latin typeface="Calibri" pitchFamily="34" charset="0"/>
+                <a:ea typeface="Calibri" pitchFamily="34" charset="-122"/>
+                <a:cs typeface="Calibri" pitchFamily="34" charset="-120"/>
+              </a:rPr>
+              <a:t>Insights: Comportamiento de Ventas</a:t>
+            </a:r>
+            <a:endParaRPr lang="en-US" sz="2600" dirty="0"/>
+          </a:p>
+        </p:txBody>
+      </p:sp>
+      <p:graphicFrame>
+        <p:nvGraphicFramePr>
+          <p:cNvPr id="4" name="Chart 0"/>
+          <p:cNvGraphicFramePr/>
+          <p:nvPr/>
+        </p:nvGraphicFramePr>
+        <p:xfrm>
+          <a:off x="320040" y="960120"/>
+          <a:ext cx="5303520" cy="2743200"/>
+        </p:xfrm>
+        <a:graphic>
+          <a:graphicData uri="http://schemas.openxmlformats.org/drawingml/2006/chart">
+            <c:chart xmlns:c="http://schemas.openxmlformats.org/drawingml/2006/chart" xmlns:r="http://schemas.openxmlformats.org/officeDocument/2006/relationships" r:id="rId3"/>
+          </a:graphicData>
+        </a:graphic>
+      </p:graphicFrame>
+      <p:sp>
+        <p:nvSpPr>
+          <p:cNvPr id="5" name="Shape 2"/>
+          <p:cNvSpPr/>
+          <p:nvPr/>
+        </p:nvSpPr>
+        <p:spPr>
+          <a:xfrm>
+            <a:off x="320040" y="3767328"/>
+            <a:ext cx="5303520" cy="685800"/>
+          </a:xfrm>
+          <a:prstGeom prst="rect">
+            <a:avLst/>
+          </a:prstGeom>
+          <a:solidFill>
+            <a:srgbClr val="FFFFFF"/>
+          </a:solidFill>
+          <a:ln w="12700">
+            <a:solidFill>
+              <a:srgbClr val="E2E8F0"/>
+            </a:solidFill>
+            <a:prstDash val="solid"/>
+          </a:ln>
+          <a:effectLst>
+            <a:outerShdw blurRad="101600" dist="38100" dir="8100000" algn="bl" rotWithShape="0">
+              <a:srgbClr val="000000">
+                <a:alpha val="10000"/>
+              </a:srgbClr>
+            </a:outerShdw>
+          </a:effectLst>
+        </p:spPr>
+        <p:txBody>
+          <a:bodyPr/>
+          <a:lstStyle/>
+          <a:p>
+            <a:endParaRPr lang="es-ES"/>
+          </a:p>
+        </p:txBody>
+      </p:sp>
+      <p:sp>
+        <p:nvSpPr>
+          <p:cNvPr id="6" name="Text 3"/>
+          <p:cNvSpPr/>
+          <p:nvPr/>
+        </p:nvSpPr>
+        <p:spPr>
+          <a:xfrm>
+            <a:off x="457200" y="3794760"/>
+            <a:ext cx="5029200" cy="640080"/>
+          </a:xfrm>
+          <a:prstGeom prst="rect">
+            <a:avLst/>
+          </a:prstGeom>
+          <a:noFill/>
+          <a:ln/>
+        </p:spPr>
+        <p:txBody>
+          <a:bodyPr wrap="square" rtlCol="0" anchor="ctr"/>
+          <a:lstStyle/>
+          <a:p>
+            <a:pPr marL="0" indent="0">
+              <a:buNone/>
+            </a:pPr>
+            <a:r>
+              <a:rPr lang="en-US" sz="1100" i="1" dirty="0">
+                <a:solidFill>
+                  <a:srgbClr val="1E293B"/>
+                </a:solidFill>
+                <a:latin typeface="Calibri" pitchFamily="34" charset="0"/>
+                <a:ea typeface="Calibri" pitchFamily="34" charset="-122"/>
+                <a:cs typeface="Calibri" pitchFamily="34" charset="-120"/>
+              </a:rPr>
+              <a:t>Picos </a:t>
+            </a:r>
+            <a:r>
+              <a:rPr lang="en-US" sz="1100" i="1" dirty="0" err="1">
+                <a:solidFill>
+                  <a:srgbClr val="1E293B"/>
+                </a:solidFill>
+                <a:latin typeface="Calibri" pitchFamily="34" charset="0"/>
+                <a:ea typeface="Calibri" pitchFamily="34" charset="-122"/>
+                <a:cs typeface="Calibri" pitchFamily="34" charset="-120"/>
+              </a:rPr>
+              <a:t>en</a:t>
+            </a:r>
+            <a:r>
+              <a:rPr lang="en-US" sz="1100" i="1" dirty="0">
+                <a:solidFill>
+                  <a:srgbClr val="1E293B"/>
+                </a:solidFill>
+                <a:latin typeface="Calibri" pitchFamily="34" charset="0"/>
+                <a:ea typeface="Calibri" pitchFamily="34" charset="-122"/>
+                <a:cs typeface="Calibri" pitchFamily="34" charset="-120"/>
+              </a:rPr>
+              <a:t> </a:t>
+            </a:r>
+            <a:r>
+              <a:rPr lang="en-US" sz="1100" i="1" dirty="0" err="1">
+                <a:solidFill>
+                  <a:srgbClr val="1E293B"/>
+                </a:solidFill>
+                <a:latin typeface="Calibri" pitchFamily="34" charset="0"/>
+                <a:ea typeface="Calibri" pitchFamily="34" charset="-122"/>
+                <a:cs typeface="Calibri" pitchFamily="34" charset="-120"/>
+              </a:rPr>
+              <a:t>los</a:t>
+            </a:r>
+            <a:r>
+              <a:rPr lang="en-US" sz="1100" i="1" dirty="0">
+                <a:solidFill>
+                  <a:srgbClr val="1E293B"/>
+                </a:solidFill>
+                <a:latin typeface="Calibri" pitchFamily="34" charset="0"/>
+                <a:ea typeface="Calibri" pitchFamily="34" charset="-122"/>
+                <a:cs typeface="Calibri" pitchFamily="34" charset="-120"/>
+              </a:rPr>
+              <a:t> </a:t>
+            </a:r>
+            <a:r>
+              <a:rPr lang="en-US" sz="1100" i="1" dirty="0" err="1">
+                <a:solidFill>
+                  <a:srgbClr val="1E293B"/>
+                </a:solidFill>
+                <a:latin typeface="Calibri" pitchFamily="34" charset="0"/>
+                <a:ea typeface="Calibri" pitchFamily="34" charset="-122"/>
+                <a:cs typeface="Calibri" pitchFamily="34" charset="-120"/>
+              </a:rPr>
+              <a:t>últimos</a:t>
+            </a:r>
+            <a:r>
+              <a:rPr lang="en-US" sz="1100" i="1" dirty="0">
+                <a:solidFill>
+                  <a:srgbClr val="1E293B"/>
+                </a:solidFill>
+                <a:latin typeface="Calibri" pitchFamily="34" charset="0"/>
+                <a:ea typeface="Calibri" pitchFamily="34" charset="-122"/>
+                <a:cs typeface="Calibri" pitchFamily="34" charset="-120"/>
+              </a:rPr>
+              <a:t> </a:t>
+            </a:r>
+            <a:r>
+              <a:rPr lang="en-US" sz="1100" i="1" dirty="0" err="1">
+                <a:solidFill>
+                  <a:srgbClr val="1E293B"/>
+                </a:solidFill>
+                <a:latin typeface="Calibri" pitchFamily="34" charset="0"/>
+                <a:ea typeface="Calibri" pitchFamily="34" charset="-122"/>
+                <a:cs typeface="Calibri" pitchFamily="34" charset="-120"/>
+              </a:rPr>
+              <a:t>trimestres</a:t>
+            </a:r>
+            <a:r>
+              <a:rPr lang="en-US" sz="1100" i="1" dirty="0">
+                <a:solidFill>
+                  <a:srgbClr val="1E293B"/>
+                </a:solidFill>
+                <a:latin typeface="Calibri" pitchFamily="34" charset="0"/>
+                <a:ea typeface="Calibri" pitchFamily="34" charset="-122"/>
+                <a:cs typeface="Calibri" pitchFamily="34" charset="-120"/>
+              </a:rPr>
+              <a:t> (Oct-Dic) </a:t>
+            </a:r>
+            <a:r>
+              <a:rPr lang="en-US" sz="1100" i="1" dirty="0" err="1">
+                <a:solidFill>
+                  <a:srgbClr val="1E293B"/>
+                </a:solidFill>
+                <a:latin typeface="Calibri" pitchFamily="34" charset="0"/>
+                <a:ea typeface="Calibri" pitchFamily="34" charset="-122"/>
+                <a:cs typeface="Calibri" pitchFamily="34" charset="-120"/>
+              </a:rPr>
+              <a:t>dónde</a:t>
+            </a:r>
+            <a:r>
+              <a:rPr lang="en-US" sz="1100" i="1" dirty="0">
+                <a:solidFill>
+                  <a:srgbClr val="1E293B"/>
+                </a:solidFill>
+                <a:latin typeface="Calibri" pitchFamily="34" charset="0"/>
+                <a:ea typeface="Calibri" pitchFamily="34" charset="-122"/>
+                <a:cs typeface="Calibri" pitchFamily="34" charset="-120"/>
+              </a:rPr>
+              <a:t> se </a:t>
+            </a:r>
+            <a:r>
+              <a:rPr lang="en-US" sz="1100" i="1" dirty="0" err="1">
+                <a:solidFill>
+                  <a:srgbClr val="1E293B"/>
+                </a:solidFill>
+                <a:latin typeface="Calibri" pitchFamily="34" charset="0"/>
+                <a:ea typeface="Calibri" pitchFamily="34" charset="-122"/>
+                <a:cs typeface="Calibri" pitchFamily="34" charset="-120"/>
+              </a:rPr>
+              <a:t>concentra</a:t>
+            </a:r>
+            <a:r>
+              <a:rPr lang="en-US" sz="1100" i="1" dirty="0">
+                <a:solidFill>
+                  <a:srgbClr val="1E293B"/>
+                </a:solidFill>
+                <a:latin typeface="Calibri" pitchFamily="34" charset="0"/>
+                <a:ea typeface="Calibri" pitchFamily="34" charset="-122"/>
+                <a:cs typeface="Calibri" pitchFamily="34" charset="-120"/>
+              </a:rPr>
+              <a:t> </a:t>
+            </a:r>
+            <a:r>
+              <a:rPr lang="en-US" sz="1100" i="1" dirty="0" err="1">
+                <a:solidFill>
+                  <a:srgbClr val="1E293B"/>
+                </a:solidFill>
+                <a:latin typeface="Calibri" pitchFamily="34" charset="0"/>
+                <a:ea typeface="Calibri" pitchFamily="34" charset="-122"/>
+                <a:cs typeface="Calibri" pitchFamily="34" charset="-120"/>
+              </a:rPr>
+              <a:t>más</a:t>
+            </a:r>
+            <a:r>
+              <a:rPr lang="en-US" sz="1100" i="1" dirty="0">
+                <a:solidFill>
+                  <a:srgbClr val="1E293B"/>
+                </a:solidFill>
+                <a:latin typeface="Calibri" pitchFamily="34" charset="0"/>
+                <a:ea typeface="Calibri" pitchFamily="34" charset="-122"/>
+                <a:cs typeface="Calibri" pitchFamily="34" charset="-120"/>
+              </a:rPr>
+              <a:t> o </a:t>
+            </a:r>
+            <a:r>
+              <a:rPr lang="en-US" sz="1100" i="1" dirty="0" err="1">
+                <a:solidFill>
+                  <a:srgbClr val="1E293B"/>
+                </a:solidFill>
+                <a:latin typeface="Calibri" pitchFamily="34" charset="0"/>
+                <a:ea typeface="Calibri" pitchFamily="34" charset="-122"/>
+                <a:cs typeface="Calibri" pitchFamily="34" charset="-120"/>
+              </a:rPr>
+              <a:t>menos</a:t>
+            </a:r>
+            <a:r>
+              <a:rPr lang="en-US" sz="1100" i="1" dirty="0">
+                <a:solidFill>
+                  <a:srgbClr val="1E293B"/>
+                </a:solidFill>
+                <a:latin typeface="Calibri" pitchFamily="34" charset="0"/>
+                <a:ea typeface="Calibri" pitchFamily="34" charset="-122"/>
+                <a:cs typeface="Calibri" pitchFamily="34" charset="-120"/>
+              </a:rPr>
+              <a:t> </a:t>
+            </a:r>
+            <a:r>
+              <a:rPr lang="en-US" sz="1100" i="1" dirty="0" err="1">
+                <a:solidFill>
+                  <a:srgbClr val="1E293B"/>
+                </a:solidFill>
+                <a:latin typeface="Calibri" pitchFamily="34" charset="0"/>
+                <a:ea typeface="Calibri" pitchFamily="34" charset="-122"/>
+                <a:cs typeface="Calibri" pitchFamily="34" charset="-120"/>
+              </a:rPr>
+              <a:t>el</a:t>
+            </a:r>
+            <a:r>
+              <a:rPr lang="en-US" sz="1100" i="1" dirty="0">
+                <a:solidFill>
+                  <a:srgbClr val="1E293B"/>
+                </a:solidFill>
+                <a:latin typeface="Calibri" pitchFamily="34" charset="0"/>
+                <a:ea typeface="Calibri" pitchFamily="34" charset="-122"/>
+                <a:cs typeface="Calibri" pitchFamily="34" charset="-120"/>
+              </a:rPr>
+              <a:t> 35% del revenue anual. Los meses de verano registran caídas sistemáticas. El modelo aprovecha esta estacionalidad a través de la recencia y la frecuencia.</a:t>
+            </a:r>
+            <a:endParaRPr lang="en-US" sz="1100" dirty="0"/>
+          </a:p>
+        </p:txBody>
+      </p:sp>
+      <p:graphicFrame>
+        <p:nvGraphicFramePr>
+          <p:cNvPr id="7" name="Chart 1"/>
+          <p:cNvGraphicFramePr/>
+          <p:nvPr/>
+        </p:nvGraphicFramePr>
+        <p:xfrm>
+          <a:off x="5760720" y="960120"/>
+          <a:ext cx="3200400" cy="2743200"/>
+        </p:xfrm>
+        <a:graphic>
+          <a:graphicData uri="http://schemas.openxmlformats.org/drawingml/2006/chart">
+            <c:chart xmlns:c="http://schemas.openxmlformats.org/drawingml/2006/chart" xmlns:r="http://schemas.openxmlformats.org/officeDocument/2006/relationships" r:id="rId4"/>
+          </a:graphicData>
+        </a:graphic>
+      </p:graphicFrame>
+      <p:sp>
+        <p:nvSpPr>
+          <p:cNvPr id="8" name="Shape 4"/>
+          <p:cNvSpPr/>
+          <p:nvPr/>
+        </p:nvSpPr>
+        <p:spPr>
+          <a:xfrm>
+            <a:off x="5760720" y="3767328"/>
+            <a:ext cx="3200400" cy="685800"/>
+          </a:xfrm>
+          <a:prstGeom prst="rect">
+            <a:avLst/>
+          </a:prstGeom>
+          <a:solidFill>
+            <a:srgbClr val="FFFFFF"/>
+          </a:solidFill>
+          <a:ln w="12700">
+            <a:solidFill>
+              <a:srgbClr val="E2E8F0"/>
+            </a:solidFill>
+            <a:prstDash val="solid"/>
+          </a:ln>
+          <a:effectLst>
+            <a:outerShdw blurRad="101600" dist="38100" dir="8100000" algn="bl" rotWithShape="0">
+              <a:srgbClr val="000000">
+                <a:alpha val="10000"/>
+              </a:srgbClr>
+            </a:outerShdw>
+          </a:effectLst>
+        </p:spPr>
+        <p:txBody>
+          <a:bodyPr/>
+          <a:lstStyle/>
+          <a:p>
+            <a:endParaRPr lang="es-ES"/>
+          </a:p>
+        </p:txBody>
+      </p:sp>
+      <p:sp>
+        <p:nvSpPr>
+          <p:cNvPr id="9" name="Text 5"/>
+          <p:cNvSpPr/>
+          <p:nvPr/>
+        </p:nvSpPr>
+        <p:spPr>
+          <a:xfrm>
+            <a:off x="5897880" y="3794760"/>
+            <a:ext cx="3017520" cy="640080"/>
+          </a:xfrm>
+          <a:prstGeom prst="rect">
+            <a:avLst/>
+          </a:prstGeom>
+          <a:noFill/>
+          <a:ln/>
+        </p:spPr>
+        <p:txBody>
+          <a:bodyPr wrap="square" rtlCol="0" anchor="ctr"/>
+          <a:lstStyle/>
+          <a:p>
+            <a:pPr marL="0" indent="0">
+              <a:buNone/>
+            </a:pPr>
+            <a:r>
+              <a:rPr lang="en-US" sz="1100" i="1" dirty="0">
+                <a:solidFill>
+                  <a:srgbClr val="1E293B"/>
+                </a:solidFill>
+                <a:latin typeface="Calibri" pitchFamily="34" charset="0"/>
+                <a:ea typeface="Calibri" pitchFamily="34" charset="-122"/>
+                <a:cs typeface="Calibri" pitchFamily="34" charset="-120"/>
+              </a:rPr>
+              <a:t>UK domina con </a:t>
+            </a:r>
+            <a:r>
+              <a:rPr lang="en-US" sz="1100" i="1" dirty="0" err="1">
+                <a:solidFill>
+                  <a:srgbClr val="1E293B"/>
+                </a:solidFill>
+                <a:latin typeface="Calibri" pitchFamily="34" charset="0"/>
+                <a:ea typeface="Calibri" pitchFamily="34" charset="-122"/>
+                <a:cs typeface="Calibri" pitchFamily="34" charset="-120"/>
+              </a:rPr>
+              <a:t>el</a:t>
+            </a:r>
+            <a:r>
+              <a:rPr lang="en-US" sz="1100" i="1" dirty="0">
+                <a:solidFill>
+                  <a:srgbClr val="1E293B"/>
+                </a:solidFill>
+                <a:latin typeface="Calibri" pitchFamily="34" charset="0"/>
+                <a:ea typeface="Calibri" pitchFamily="34" charset="-122"/>
+                <a:cs typeface="Calibri" pitchFamily="34" charset="-120"/>
+              </a:rPr>
+              <a:t> 85% </a:t>
+            </a:r>
+            <a:r>
+              <a:rPr lang="en-US" sz="1100" i="1" dirty="0" err="1">
+                <a:solidFill>
+                  <a:srgbClr val="1E293B"/>
+                </a:solidFill>
+                <a:latin typeface="Calibri" pitchFamily="34" charset="0"/>
+                <a:ea typeface="Calibri" pitchFamily="34" charset="-122"/>
+                <a:cs typeface="Calibri" pitchFamily="34" charset="-120"/>
+              </a:rPr>
+              <a:t>aproximadamente</a:t>
+            </a:r>
+            <a:r>
+              <a:rPr lang="en-US" sz="1100" i="1" dirty="0">
+                <a:solidFill>
+                  <a:srgbClr val="1E293B"/>
+                </a:solidFill>
+                <a:latin typeface="Calibri" pitchFamily="34" charset="0"/>
+                <a:ea typeface="Calibri" pitchFamily="34" charset="-122"/>
+                <a:cs typeface="Calibri" pitchFamily="34" charset="-120"/>
+              </a:rPr>
+              <a:t> del revenue. Los 9 países restantes son un nicho de expansión con alto potencial de fidelización.</a:t>
+            </a:r>
+            <a:endParaRPr lang="en-US" sz="1100" dirty="0"/>
+          </a:p>
+        </p:txBody>
+      </p:sp>
+    </p:spTree>
+  </p:cSld>
+  <p:clrMapOvr>
+    <a:masterClrMapping/>
+  </p:clrMapOvr>
+</p:sld>
+</file>
+
+<file path=ppt/slides/slide4.xml><?xml version="1.0" encoding="utf-8"?>
 <p:sld xmlns:a="http://schemas.openxmlformats.org/drawingml/2006/main" xmlns:r="http://schemas.openxmlformats.org/officeDocument/2006/relationships" xmlns:p="http://schemas.openxmlformats.org/presentationml/2006/main">
   <p:cSld name="Slide 4">
     <p:bg>
@@ -8598,6 +6755,50 @@
               <a:buNone/>
             </a:pPr>
             <a:r>
+              <a:rPr lang="en-US" sz="1300" dirty="0">
+                <a:solidFill>
+                  <a:srgbClr val="0F2D5B"/>
+                </a:solidFill>
+                <a:latin typeface="Calibri" pitchFamily="34" charset="0"/>
+                <a:ea typeface="Calibri" pitchFamily="34" charset="-122"/>
+                <a:cs typeface="Calibri" pitchFamily="34" charset="-120"/>
+              </a:rPr>
+              <a:t>Features </a:t>
+            </a:r>
+            <a:r>
+              <a:rPr lang="en-US" sz="1300" dirty="0" err="1">
+                <a:solidFill>
+                  <a:srgbClr val="0F2D5B"/>
+                </a:solidFill>
+                <a:latin typeface="Calibri" pitchFamily="34" charset="0"/>
+                <a:ea typeface="Calibri" pitchFamily="34" charset="-122"/>
+                <a:cs typeface="Calibri" pitchFamily="34" charset="-120"/>
+              </a:rPr>
+              <a:t>construidas</a:t>
+            </a:r>
+            <a:r>
+              <a:rPr lang="en-US" sz="1300" dirty="0">
+                <a:solidFill>
+                  <a:srgbClr val="0F2D5B"/>
+                </a:solidFill>
+                <a:latin typeface="Calibri" pitchFamily="34" charset="0"/>
+                <a:ea typeface="Calibri" pitchFamily="34" charset="-122"/>
+                <a:cs typeface="Calibri" pitchFamily="34" charset="-120"/>
+              </a:rPr>
+              <a:t> (</a:t>
+            </a:r>
+            <a:r>
+              <a:rPr lang="en-US" sz="1300" b="1" dirty="0" err="1">
+                <a:solidFill>
+                  <a:srgbClr val="0F2D5B"/>
+                </a:solidFill>
+                <a:latin typeface="Calibri" pitchFamily="34" charset="0"/>
+                <a:ea typeface="Calibri" pitchFamily="34" charset="-122"/>
+                <a:cs typeface="Calibri" pitchFamily="34" charset="-120"/>
+              </a:rPr>
+              <a:t>Agrupación</a:t>
+            </a:r>
+            <a:r>
               <a:rPr lang="en-US" sz="1300" b="1" dirty="0">
                 <a:solidFill>
                   <a:srgbClr val="0F2D5B"/>
@@ -8606,7 +6807,40 @@
                 <a:ea typeface="Calibri" pitchFamily="34" charset="-122"/>
                 <a:cs typeface="Calibri" pitchFamily="34" charset="-120"/>
               </a:rPr>
-              <a:t>Features construidas (1 fila por cliente)</a:t>
+              <a:t> </a:t>
+            </a:r>
+            <a:r>
+              <a:rPr lang="en-US" sz="1300" b="1" dirty="0" err="1">
+                <a:solidFill>
+                  <a:srgbClr val="0F2D5B"/>
+                </a:solidFill>
+                <a:latin typeface="Calibri" pitchFamily="34" charset="0"/>
+                <a:ea typeface="Calibri" pitchFamily="34" charset="-122"/>
+                <a:cs typeface="Calibri" pitchFamily="34" charset="-120"/>
+              </a:rPr>
+              <a:t>por</a:t>
+            </a:r>
+            <a:r>
+              <a:rPr lang="en-US" sz="1300" b="1" dirty="0">
+                <a:solidFill>
+                  <a:srgbClr val="0F2D5B"/>
+                </a:solidFill>
+                <a:latin typeface="Calibri" pitchFamily="34" charset="0"/>
+                <a:ea typeface="Calibri" pitchFamily="34" charset="-122"/>
+                <a:cs typeface="Calibri" pitchFamily="34" charset="-120"/>
+              </a:rPr>
+              <a:t> cliente</a:t>
+            </a:r>
+            <a:r>
+              <a:rPr lang="en-US" sz="1300" dirty="0">
+                <a:solidFill>
+                  <a:srgbClr val="0F2D5B"/>
+                </a:solidFill>
+                <a:latin typeface="Calibri" pitchFamily="34" charset="0"/>
+                <a:ea typeface="Calibri" pitchFamily="34" charset="-122"/>
+                <a:cs typeface="Calibri" pitchFamily="34" charset="-120"/>
+              </a:rPr>
+              <a:t>)</a:t>
             </a:r>
             <a:endParaRPr lang="en-US" sz="1300" dirty="0"/>
           </a:p>
@@ -8621,7 +6855,7 @@
         <p:spPr>
           <a:xfrm>
             <a:off x="365760" y="3291840"/>
-            <a:ext cx="8412480" cy="237744"/>
+            <a:ext cx="7922623" cy="237744"/>
           </a:xfrm>
           <a:prstGeom prst="rect">
             <a:avLst/>
@@ -8653,7 +6887,7 @@
         <p:spPr>
           <a:xfrm>
             <a:off x="457200" y="3291840"/>
-            <a:ext cx="1280160" cy="237744"/>
+            <a:ext cx="1205617" cy="237744"/>
           </a:xfrm>
           <a:prstGeom prst="rect">
             <a:avLst/>
@@ -8692,7 +6926,7 @@
         <p:spPr>
           <a:xfrm>
             <a:off x="1783080" y="3291840"/>
-            <a:ext cx="3200400" cy="237744"/>
+            <a:ext cx="3014041" cy="237744"/>
           </a:xfrm>
           <a:prstGeom prst="rect">
             <a:avLst/>
@@ -8724,45 +6958,6 @@
       </p:sp>
       <p:sp>
         <p:nvSpPr>
-          <p:cNvPr id="17" name="Text 15"/>
-          <p:cNvSpPr/>
-          <p:nvPr/>
-        </p:nvSpPr>
-        <p:spPr>
-          <a:xfrm>
-            <a:off x="5029200" y="3291840"/>
-            <a:ext cx="3657600" cy="237744"/>
-          </a:xfrm>
-          <a:prstGeom prst="rect">
-            <a:avLst/>
-          </a:prstGeom>
-          <a:noFill/>
-          <a:ln/>
-        </p:spPr>
-        <p:txBody>
-          <a:bodyPr wrap="square" rtlCol="0" anchor="ctr"/>
-          <a:lstStyle/>
-          <a:p>
-            <a:pPr marL="0" indent="0">
-              <a:buNone/>
-            </a:pPr>
-            <a:r>
-              <a:rPr lang="en-US" sz="1000" i="1" dirty="0">
-                <a:solidFill>
-                  <a:srgbClr val="64748B"/>
-                </a:solidFill>
-                <a:latin typeface="Calibri" pitchFamily="34" charset="0"/>
-                <a:ea typeface="Calibri" pitchFamily="34" charset="-122"/>
-                <a:cs typeface="Calibri" pitchFamily="34" charset="-120"/>
-              </a:rPr>
-              <a:t>🔴 Negativo → cuanto más reciente, mejor</a:t>
-            </a:r>
-            <a:endParaRPr lang="en-US" sz="1000" dirty="0"/>
-          </a:p>
-        </p:txBody>
-      </p:sp>
-      <p:sp>
-        <p:nvSpPr>
           <p:cNvPr id="18" name="Shape 16"/>
           <p:cNvSpPr/>
           <p:nvPr/>
@@ -8770,7 +6965,7 @@
         <p:spPr>
           <a:xfrm>
             <a:off x="365760" y="3538728"/>
-            <a:ext cx="8412480" cy="237744"/>
+            <a:ext cx="7922623" cy="237744"/>
           </a:xfrm>
           <a:prstGeom prst="rect">
             <a:avLst/>
@@ -8802,7 +6997,7 @@
         <p:spPr>
           <a:xfrm>
             <a:off x="457200" y="3538728"/>
-            <a:ext cx="1280160" cy="237744"/>
+            <a:ext cx="1205617" cy="237744"/>
           </a:xfrm>
           <a:prstGeom prst="rect">
             <a:avLst/>
@@ -8841,7 +7036,7 @@
         <p:spPr>
           <a:xfrm>
             <a:off x="1783080" y="3538728"/>
-            <a:ext cx="3200400" cy="237744"/>
+            <a:ext cx="3014041" cy="237744"/>
           </a:xfrm>
           <a:prstGeom prst="rect">
             <a:avLst/>
@@ -8857,6 +7052,17 @@
               <a:buNone/>
             </a:pPr>
             <a:r>
+              <a:rPr lang="en-US" sz="1100" dirty="0" err="1">
+                <a:solidFill>
+                  <a:srgbClr val="1E293B"/>
+                </a:solidFill>
+                <a:latin typeface="Calibri" pitchFamily="34" charset="0"/>
+                <a:ea typeface="Calibri" pitchFamily="34" charset="-122"/>
+                <a:cs typeface="Calibri" pitchFamily="34" charset="-120"/>
+              </a:rPr>
+              <a:t>Número</a:t>
+            </a:r>
+            <a:r>
               <a:rPr lang="en-US" sz="1100" dirty="0">
                 <a:solidFill>
                   <a:srgbClr val="1E293B"/>
@@ -8865,7 +7071,7 @@
                 <a:ea typeface="Calibri" pitchFamily="34" charset="-122"/>
                 <a:cs typeface="Calibri" pitchFamily="34" charset="-120"/>
               </a:rPr>
-              <a:t>Nº de facturas distintas</a:t>
+              <a:t> de facturas distintas</a:t>
             </a:r>
             <a:endParaRPr lang="en-US" sz="1100" dirty="0"/>
           </a:p>
@@ -8873,45 +7079,6 @@
       </p:sp>
       <p:sp>
         <p:nvSpPr>
-          <p:cNvPr id="21" name="Text 19"/>
-          <p:cNvSpPr/>
-          <p:nvPr/>
-        </p:nvSpPr>
-        <p:spPr>
-          <a:xfrm>
-            <a:off x="5029200" y="3538728"/>
-            <a:ext cx="3657600" cy="237744"/>
-          </a:xfrm>
-          <a:prstGeom prst="rect">
-            <a:avLst/>
-          </a:prstGeom>
-          <a:noFill/>
-          <a:ln/>
-        </p:spPr>
-        <p:txBody>
-          <a:bodyPr wrap="square" rtlCol="0" anchor="ctr"/>
-          <a:lstStyle/>
-          <a:p>
-            <a:pPr marL="0" indent="0">
-              <a:buNone/>
-            </a:pPr>
-            <a:r>
-              <a:rPr lang="en-US" sz="1000" i="1" dirty="0">
-                <a:solidFill>
-                  <a:srgbClr val="64748B"/>
-                </a:solidFill>
-                <a:latin typeface="Calibri" pitchFamily="34" charset="0"/>
-                <a:ea typeface="Calibri" pitchFamily="34" charset="-122"/>
-                <a:cs typeface="Calibri" pitchFamily="34" charset="-120"/>
-              </a:rPr>
-              <a:t>🟢 Positivo → más facturas = más fidelidad</a:t>
-            </a:r>
-            <a:endParaRPr lang="en-US" sz="1000" dirty="0"/>
-          </a:p>
-        </p:txBody>
-      </p:sp>
-      <p:sp>
-        <p:nvSpPr>
           <p:cNvPr id="22" name="Shape 20"/>
           <p:cNvSpPr/>
           <p:nvPr/>
@@ -8919,7 +7086,7 @@
         <p:spPr>
           <a:xfrm>
             <a:off x="365760" y="3785616"/>
-            <a:ext cx="8412480" cy="237744"/>
+            <a:ext cx="7922623" cy="237744"/>
           </a:xfrm>
           <a:prstGeom prst="rect">
             <a:avLst/>
@@ -8951,7 +7118,7 @@
         <p:spPr>
           <a:xfrm>
             <a:off x="457200" y="3785616"/>
-            <a:ext cx="1280160" cy="237744"/>
+            <a:ext cx="1205617" cy="237744"/>
           </a:xfrm>
           <a:prstGeom prst="rect">
             <a:avLst/>
@@ -8990,7 +7157,7 @@
         <p:spPr>
           <a:xfrm>
             <a:off x="1783080" y="3785616"/>
-            <a:ext cx="3200400" cy="237744"/>
+            <a:ext cx="3014041" cy="237744"/>
           </a:xfrm>
           <a:prstGeom prst="rect">
             <a:avLst/>
@@ -9022,45 +7189,6 @@
       </p:sp>
       <p:sp>
         <p:nvSpPr>
-          <p:cNvPr id="25" name="Text 23"/>
-          <p:cNvSpPr/>
-          <p:nvPr/>
-        </p:nvSpPr>
-        <p:spPr>
-          <a:xfrm>
-            <a:off x="5029200" y="3785616"/>
-            <a:ext cx="3657600" cy="237744"/>
-          </a:xfrm>
-          <a:prstGeom prst="rect">
-            <a:avLst/>
-          </a:prstGeom>
-          <a:noFill/>
-          <a:ln/>
-        </p:spPr>
-        <p:txBody>
-          <a:bodyPr wrap="square" rtlCol="0" anchor="ctr"/>
-          <a:lstStyle/>
-          <a:p>
-            <a:pPr marL="0" indent="0">
-              <a:buNone/>
-            </a:pPr>
-            <a:r>
-              <a:rPr lang="en-US" sz="1000" i="1" dirty="0">
-                <a:solidFill>
-                  <a:srgbClr val="64748B"/>
-                </a:solidFill>
-                <a:latin typeface="Calibri" pitchFamily="34" charset="0"/>
-                <a:ea typeface="Calibri" pitchFamily="34" charset="-122"/>
-                <a:cs typeface="Calibri" pitchFamily="34" charset="-120"/>
-              </a:rPr>
-              <a:t>🟢 Positivo → cliente de mayor valor</a:t>
-            </a:r>
-            <a:endParaRPr lang="en-US" sz="1000" dirty="0"/>
-          </a:p>
-        </p:txBody>
-      </p:sp>
-      <p:sp>
-        <p:nvSpPr>
           <p:cNvPr id="26" name="Shape 24"/>
           <p:cNvSpPr/>
           <p:nvPr/>
@@ -9068,7 +7196,7 @@
         <p:spPr>
           <a:xfrm>
             <a:off x="365760" y="4032504"/>
-            <a:ext cx="8412480" cy="237744"/>
+            <a:ext cx="7922623" cy="237744"/>
           </a:xfrm>
           <a:prstGeom prst="rect">
             <a:avLst/>
@@ -9087,7 +7215,7 @@
           <a:bodyPr/>
           <a:lstStyle/>
           <a:p>
-            <a:endParaRPr lang="es-ES"/>
+            <a:endParaRPr lang="es-ES" dirty="0"/>
           </a:p>
         </p:txBody>
       </p:sp>
@@ -9100,7 +7228,7 @@
         <p:spPr>
           <a:xfrm>
             <a:off x="457200" y="4032504"/>
-            <a:ext cx="1280160" cy="237744"/>
+            <a:ext cx="1205617" cy="237744"/>
           </a:xfrm>
           <a:prstGeom prst="rect">
             <a:avLst/>
@@ -9139,7 +7267,7 @@
         <p:spPr>
           <a:xfrm>
             <a:off x="1783080" y="4032504"/>
-            <a:ext cx="3200400" cy="237744"/>
+            <a:ext cx="3014041" cy="237744"/>
           </a:xfrm>
           <a:prstGeom prst="rect">
             <a:avLst/>
@@ -9171,45 +7299,6 @@
       </p:sp>
       <p:sp>
         <p:nvSpPr>
-          <p:cNvPr id="29" name="Text 27"/>
-          <p:cNvSpPr/>
-          <p:nvPr/>
-        </p:nvSpPr>
-        <p:spPr>
-          <a:xfrm>
-            <a:off x="5029200" y="4032504"/>
-            <a:ext cx="3657600" cy="237744"/>
-          </a:xfrm>
-          <a:prstGeom prst="rect">
-            <a:avLst/>
-          </a:prstGeom>
-          <a:noFill/>
-          <a:ln/>
-        </p:spPr>
-        <p:txBody>
-          <a:bodyPr wrap="square" rtlCol="0" anchor="ctr"/>
-          <a:lstStyle/>
-          <a:p>
-            <a:pPr marL="0" indent="0">
-              <a:buNone/>
-            </a:pPr>
-            <a:r>
-              <a:rPr lang="en-US" sz="1000" i="1" dirty="0">
-                <a:solidFill>
-                  <a:srgbClr val="64748B"/>
-                </a:solidFill>
-                <a:latin typeface="Calibri" pitchFamily="34" charset="0"/>
-                <a:ea typeface="Calibri" pitchFamily="34" charset="-122"/>
-                <a:cs typeface="Calibri" pitchFamily="34" charset="-120"/>
-              </a:rPr>
-              <a:t>Variable según perfil (mayorista / minorista)</a:t>
-            </a:r>
-            <a:endParaRPr lang="en-US" sz="1000" dirty="0"/>
-          </a:p>
-        </p:txBody>
-      </p:sp>
-      <p:sp>
-        <p:nvSpPr>
           <p:cNvPr id="30" name="Shape 28"/>
           <p:cNvSpPr/>
           <p:nvPr/>
@@ -9217,7 +7306,7 @@
         <p:spPr>
           <a:xfrm>
             <a:off x="365760" y="4279392"/>
-            <a:ext cx="8412480" cy="237744"/>
+            <a:ext cx="7922623" cy="237744"/>
           </a:xfrm>
           <a:prstGeom prst="rect">
             <a:avLst/>
@@ -9249,7 +7338,7 @@
         <p:spPr>
           <a:xfrm>
             <a:off x="457200" y="4279392"/>
-            <a:ext cx="1280160" cy="237744"/>
+            <a:ext cx="1205617" cy="237744"/>
           </a:xfrm>
           <a:prstGeom prst="rect">
             <a:avLst/>
@@ -9288,7 +7377,7 @@
         <p:spPr>
           <a:xfrm>
             <a:off x="1783080" y="4279392"/>
-            <a:ext cx="3200400" cy="237744"/>
+            <a:ext cx="3014041" cy="237744"/>
           </a:xfrm>
           <a:prstGeom prst="rect">
             <a:avLst/>
@@ -9320,45 +7409,6 @@
       </p:sp>
       <p:sp>
         <p:nvSpPr>
-          <p:cNvPr id="33" name="Text 31"/>
-          <p:cNvSpPr/>
-          <p:nvPr/>
-        </p:nvSpPr>
-        <p:spPr>
-          <a:xfrm>
-            <a:off x="5029200" y="4279392"/>
-            <a:ext cx="3657600" cy="237744"/>
-          </a:xfrm>
-          <a:prstGeom prst="rect">
-            <a:avLst/>
-          </a:prstGeom>
-          <a:noFill/>
-          <a:ln/>
-        </p:spPr>
-        <p:txBody>
-          <a:bodyPr wrap="square" rtlCol="0" anchor="ctr"/>
-          <a:lstStyle/>
-          <a:p>
-            <a:pPr marL="0" indent="0">
-              <a:buNone/>
-            </a:pPr>
-            <a:r>
-              <a:rPr lang="en-US" sz="1000" i="1" dirty="0">
-                <a:solidFill>
-                  <a:srgbClr val="64748B"/>
-                </a:solidFill>
-                <a:latin typeface="Calibri" pitchFamily="34" charset="0"/>
-                <a:ea typeface="Calibri" pitchFamily="34" charset="-122"/>
-                <a:cs typeface="Calibri" pitchFamily="34" charset="-120"/>
-              </a:rPr>
-              <a:t>🟢 Positivo → mayor engagement catálogo</a:t>
-            </a:r>
-            <a:endParaRPr lang="en-US" sz="1000" dirty="0"/>
-          </a:p>
-        </p:txBody>
-      </p:sp>
-      <p:sp>
-        <p:nvSpPr>
           <p:cNvPr id="34" name="Shape 32"/>
           <p:cNvSpPr/>
           <p:nvPr/>
@@ -9366,7 +7416,7 @@
         <p:spPr>
           <a:xfrm>
             <a:off x="365760" y="4526280"/>
-            <a:ext cx="8412480" cy="237744"/>
+            <a:ext cx="7922623" cy="237744"/>
           </a:xfrm>
           <a:prstGeom prst="rect">
             <a:avLst/>
@@ -9398,7 +7448,7 @@
         <p:spPr>
           <a:xfrm>
             <a:off x="457200" y="4526280"/>
-            <a:ext cx="1280160" cy="237744"/>
+            <a:ext cx="1205617" cy="237744"/>
           </a:xfrm>
           <a:prstGeom prst="rect">
             <a:avLst/>
@@ -9437,7 +7487,7 @@
         <p:spPr>
           <a:xfrm>
             <a:off x="1783080" y="4526280"/>
-            <a:ext cx="3200400" cy="237744"/>
+            <a:ext cx="3014041" cy="237744"/>
           </a:xfrm>
           <a:prstGeom prst="rect">
             <a:avLst/>
@@ -9469,45 +7519,6 @@
       </p:sp>
       <p:sp>
         <p:nvSpPr>
-          <p:cNvPr id="37" name="Text 35"/>
-          <p:cNvSpPr/>
-          <p:nvPr/>
-        </p:nvSpPr>
-        <p:spPr>
-          <a:xfrm>
-            <a:off x="5029200" y="4526280"/>
-            <a:ext cx="3657600" cy="237744"/>
-          </a:xfrm>
-          <a:prstGeom prst="rect">
-            <a:avLst/>
-          </a:prstGeom>
-          <a:noFill/>
-          <a:ln/>
-        </p:spPr>
-        <p:txBody>
-          <a:bodyPr wrap="square" rtlCol="0" anchor="ctr"/>
-          <a:lstStyle/>
-          <a:p>
-            <a:pPr marL="0" indent="0">
-              <a:buNone/>
-            </a:pPr>
-            <a:r>
-              <a:rPr lang="en-US" sz="1000" i="1" dirty="0">
-                <a:solidFill>
-                  <a:srgbClr val="64748B"/>
-                </a:solidFill>
-                <a:latin typeface="Calibri" pitchFamily="34" charset="0"/>
-                <a:ea typeface="Calibri" pitchFamily="34" charset="-122"/>
-                <a:cs typeface="Calibri" pitchFamily="34" charset="-120"/>
-              </a:rPr>
-              <a:t>Indicador de perfil internacional</a:t>
-            </a:r>
-            <a:endParaRPr lang="en-US" sz="1000" dirty="0"/>
-          </a:p>
-        </p:txBody>
-      </p:sp>
-      <p:sp>
-        <p:nvSpPr>
           <p:cNvPr id="38" name="Shape 36"/>
           <p:cNvSpPr/>
           <p:nvPr/>
@@ -9515,7 +7526,7 @@
         <p:spPr>
           <a:xfrm>
             <a:off x="365760" y="4773168"/>
-            <a:ext cx="8412480" cy="237744"/>
+            <a:ext cx="7922623" cy="237744"/>
           </a:xfrm>
           <a:prstGeom prst="rect">
             <a:avLst/>
@@ -9547,7 +7558,7 @@
         <p:spPr>
           <a:xfrm>
             <a:off x="457200" y="4773168"/>
-            <a:ext cx="1280160" cy="237744"/>
+            <a:ext cx="1205617" cy="237744"/>
           </a:xfrm>
           <a:prstGeom prst="rect">
             <a:avLst/>
@@ -9586,7 +7597,7 @@
         <p:spPr>
           <a:xfrm>
             <a:off x="1783080" y="4773168"/>
-            <a:ext cx="3200400" cy="237744"/>
+            <a:ext cx="3014041" cy="237744"/>
           </a:xfrm>
           <a:prstGeom prst="rect">
             <a:avLst/>
@@ -9611,337 +7622,6 @@
                 <a:cs typeface="Calibri" pitchFamily="34" charset="-120"/>
               </a:rPr>
               <a:t>País de compra más frecuente</a:t>
-            </a:r>
-            <a:endParaRPr lang="en-US" sz="1100" dirty="0"/>
-          </a:p>
-        </p:txBody>
-      </p:sp>
-      <p:sp>
-        <p:nvSpPr>
-          <p:cNvPr id="41" name="Text 39"/>
-          <p:cNvSpPr/>
-          <p:nvPr/>
-        </p:nvSpPr>
-        <p:spPr>
-          <a:xfrm>
-            <a:off x="5029200" y="4773168"/>
-            <a:ext cx="3657600" cy="237744"/>
-          </a:xfrm>
-          <a:prstGeom prst="rect">
-            <a:avLst/>
-          </a:prstGeom>
-          <a:noFill/>
-          <a:ln/>
-        </p:spPr>
-        <p:txBody>
-          <a:bodyPr wrap="square" rtlCol="0" anchor="ctr"/>
-          <a:lstStyle/>
-          <a:p>
-            <a:pPr marL="0" indent="0">
-              <a:buNone/>
-            </a:pPr>
-            <a:r>
-              <a:rPr lang="en-US" sz="1000" i="1" dirty="0">
-                <a:solidFill>
-                  <a:srgbClr val="64748B"/>
-                </a:solidFill>
-                <a:latin typeface="Calibri" pitchFamily="34" charset="0"/>
-                <a:ea typeface="Calibri" pitchFamily="34" charset="-122"/>
-                <a:cs typeface="Calibri" pitchFamily="34" charset="-120"/>
-              </a:rPr>
-              <a:t>Variable categórica (OneHotEncoded)</a:t>
-            </a:r>
-            <a:endParaRPr lang="en-US" sz="1000" dirty="0"/>
-          </a:p>
-        </p:txBody>
-      </p:sp>
-    </p:spTree>
-  </p:cSld>
-  <p:clrMapOvr>
-    <a:masterClrMapping/>
-  </p:clrMapOvr>
-</p:sld>
-</file>
-
-<file path=ppt/slides/slide4.xml><?xml version="1.0" encoding="utf-8"?>
-<p:sld xmlns:a="http://schemas.openxmlformats.org/drawingml/2006/main" xmlns:r="http://schemas.openxmlformats.org/officeDocument/2006/relationships" xmlns:p="http://schemas.openxmlformats.org/presentationml/2006/main">
-  <p:cSld name="Slide 5">
-    <p:bg>
-      <p:bgPr>
-        <a:solidFill>
-          <a:srgbClr val="F4F7F8"/>
-        </a:solidFill>
-        <a:effectLst/>
-      </p:bgPr>
-    </p:bg>
-    <p:spTree>
-      <p:nvGrpSpPr>
-        <p:cNvPr id="1" name=""/>
-        <p:cNvGrpSpPr/>
-        <p:nvPr/>
-      </p:nvGrpSpPr>
-      <p:grpSpPr>
-        <a:xfrm>
-          <a:off x="0" y="0"/>
-          <a:ext cx="0" cy="0"/>
-          <a:chOff x="0" y="0"/>
-          <a:chExt cx="0" cy="0"/>
-        </a:xfrm>
-      </p:grpSpPr>
-      <p:sp>
-        <p:nvSpPr>
-          <p:cNvPr id="2" name="Shape 0"/>
-          <p:cNvSpPr/>
-          <p:nvPr/>
-        </p:nvSpPr>
-        <p:spPr>
-          <a:xfrm>
-            <a:off x="0" y="0"/>
-            <a:ext cx="9144000" cy="822960"/>
-          </a:xfrm>
-          <a:prstGeom prst="rect">
-            <a:avLst/>
-          </a:prstGeom>
-          <a:solidFill>
-            <a:srgbClr val="0F2D5B"/>
-          </a:solidFill>
-          <a:ln w="12700">
-            <a:solidFill>
-              <a:srgbClr val="0F2D5B"/>
-            </a:solidFill>
-            <a:prstDash val="solid"/>
-          </a:ln>
-        </p:spPr>
-        <p:txBody>
-          <a:bodyPr/>
-          <a:lstStyle/>
-          <a:p>
-            <a:endParaRPr lang="es-ES"/>
-          </a:p>
-        </p:txBody>
-      </p:sp>
-      <p:sp>
-        <p:nvSpPr>
-          <p:cNvPr id="3" name="Text 1"/>
-          <p:cNvSpPr/>
-          <p:nvPr/>
-        </p:nvSpPr>
-        <p:spPr>
-          <a:xfrm>
-            <a:off x="365760" y="0"/>
-            <a:ext cx="8412480" cy="822960"/>
-          </a:xfrm>
-          <a:prstGeom prst="rect">
-            <a:avLst/>
-          </a:prstGeom>
-          <a:noFill/>
-          <a:ln/>
-        </p:spPr>
-        <p:txBody>
-          <a:bodyPr wrap="square" rtlCol="0" anchor="ctr"/>
-          <a:lstStyle/>
-          <a:p>
-            <a:pPr marL="0" indent="0">
-              <a:buNone/>
-            </a:pPr>
-            <a:r>
-              <a:rPr lang="en-US" sz="2600" b="1" dirty="0">
-                <a:solidFill>
-                  <a:srgbClr val="FFFFFF"/>
-                </a:solidFill>
-                <a:latin typeface="Calibri" pitchFamily="34" charset="0"/>
-                <a:ea typeface="Calibri" pitchFamily="34" charset="-122"/>
-                <a:cs typeface="Calibri" pitchFamily="34" charset="-120"/>
-              </a:rPr>
-              <a:t>Insights: Comportamiento de Ventas</a:t>
-            </a:r>
-            <a:endParaRPr lang="en-US" sz="2600" dirty="0"/>
-          </a:p>
-        </p:txBody>
-      </p:sp>
-      <p:graphicFrame>
-        <p:nvGraphicFramePr>
-          <p:cNvPr id="4" name="Chart 0"/>
-          <p:cNvGraphicFramePr/>
-          <p:nvPr/>
-        </p:nvGraphicFramePr>
-        <p:xfrm>
-          <a:off x="320040" y="960120"/>
-          <a:ext cx="5303520" cy="2743200"/>
-        </p:xfrm>
-        <a:graphic>
-          <a:graphicData uri="http://schemas.openxmlformats.org/drawingml/2006/chart">
-            <c:chart xmlns:c="http://schemas.openxmlformats.org/drawingml/2006/chart" xmlns:r="http://schemas.openxmlformats.org/officeDocument/2006/relationships" r:id="rId3"/>
-          </a:graphicData>
-        </a:graphic>
-      </p:graphicFrame>
-      <p:sp>
-        <p:nvSpPr>
-          <p:cNvPr id="5" name="Shape 2"/>
-          <p:cNvSpPr/>
-          <p:nvPr/>
-        </p:nvSpPr>
-        <p:spPr>
-          <a:xfrm>
-            <a:off x="320040" y="3767328"/>
-            <a:ext cx="5303520" cy="685800"/>
-          </a:xfrm>
-          <a:prstGeom prst="rect">
-            <a:avLst/>
-          </a:prstGeom>
-          <a:solidFill>
-            <a:srgbClr val="FFFFFF"/>
-          </a:solidFill>
-          <a:ln w="12700">
-            <a:solidFill>
-              <a:srgbClr val="E2E8F0"/>
-            </a:solidFill>
-            <a:prstDash val="solid"/>
-          </a:ln>
-          <a:effectLst>
-            <a:outerShdw blurRad="101600" dist="38100" dir="8100000" algn="bl" rotWithShape="0">
-              <a:srgbClr val="000000">
-                <a:alpha val="10000"/>
-              </a:srgbClr>
-            </a:outerShdw>
-          </a:effectLst>
-        </p:spPr>
-        <p:txBody>
-          <a:bodyPr/>
-          <a:lstStyle/>
-          <a:p>
-            <a:endParaRPr lang="es-ES"/>
-          </a:p>
-        </p:txBody>
-      </p:sp>
-      <p:sp>
-        <p:nvSpPr>
-          <p:cNvPr id="6" name="Text 3"/>
-          <p:cNvSpPr/>
-          <p:nvPr/>
-        </p:nvSpPr>
-        <p:spPr>
-          <a:xfrm>
-            <a:off x="457200" y="3794760"/>
-            <a:ext cx="5029200" cy="640080"/>
-          </a:xfrm>
-          <a:prstGeom prst="rect">
-            <a:avLst/>
-          </a:prstGeom>
-          <a:noFill/>
-          <a:ln/>
-        </p:spPr>
-        <p:txBody>
-          <a:bodyPr wrap="square" rtlCol="0" anchor="ctr"/>
-          <a:lstStyle/>
-          <a:p>
-            <a:pPr marL="0" indent="0">
-              <a:buNone/>
-            </a:pPr>
-            <a:r>
-              <a:rPr lang="en-US" sz="1100" i="1" dirty="0">
-                <a:solidFill>
-                  <a:srgbClr val="1E293B"/>
-                </a:solidFill>
-                <a:latin typeface="Calibri" pitchFamily="34" charset="0"/>
-                <a:ea typeface="Calibri" pitchFamily="34" charset="-122"/>
-                <a:cs typeface="Calibri" pitchFamily="34" charset="-120"/>
-              </a:rPr>
-              <a:t>💡  Los picos de Q4 (Oct-Dic) concentran ~35% del revenue anual. Los meses de verano registran caídas sistemáticas. El modelo aprovecha esta estacionalidad a través de la recencia y la frecuencia.</a:t>
-            </a:r>
-            <a:endParaRPr lang="en-US" sz="1100" dirty="0"/>
-          </a:p>
-        </p:txBody>
-      </p:sp>
-      <p:graphicFrame>
-        <p:nvGraphicFramePr>
-          <p:cNvPr id="7" name="Chart 1"/>
-          <p:cNvGraphicFramePr/>
-          <p:nvPr/>
-        </p:nvGraphicFramePr>
-        <p:xfrm>
-          <a:off x="5760720" y="960120"/>
-          <a:ext cx="3200400" cy="2743200"/>
-        </p:xfrm>
-        <a:graphic>
-          <a:graphicData uri="http://schemas.openxmlformats.org/drawingml/2006/chart">
-            <c:chart xmlns:c="http://schemas.openxmlformats.org/drawingml/2006/chart" xmlns:r="http://schemas.openxmlformats.org/officeDocument/2006/relationships" r:id="rId4"/>
-          </a:graphicData>
-        </a:graphic>
-      </p:graphicFrame>
-      <p:sp>
-        <p:nvSpPr>
-          <p:cNvPr id="8" name="Shape 4"/>
-          <p:cNvSpPr/>
-          <p:nvPr/>
-        </p:nvSpPr>
-        <p:spPr>
-          <a:xfrm>
-            <a:off x="5760720" y="3767328"/>
-            <a:ext cx="3200400" cy="685800"/>
-          </a:xfrm>
-          <a:prstGeom prst="rect">
-            <a:avLst/>
-          </a:prstGeom>
-          <a:solidFill>
-            <a:srgbClr val="FFFFFF"/>
-          </a:solidFill>
-          <a:ln w="12700">
-            <a:solidFill>
-              <a:srgbClr val="E2E8F0"/>
-            </a:solidFill>
-            <a:prstDash val="solid"/>
-          </a:ln>
-          <a:effectLst>
-            <a:outerShdw blurRad="101600" dist="38100" dir="8100000" algn="bl" rotWithShape="0">
-              <a:srgbClr val="000000">
-                <a:alpha val="10000"/>
-              </a:srgbClr>
-            </a:outerShdw>
-          </a:effectLst>
-        </p:spPr>
-        <p:txBody>
-          <a:bodyPr/>
-          <a:lstStyle/>
-          <a:p>
-            <a:endParaRPr lang="es-ES"/>
-          </a:p>
-        </p:txBody>
-      </p:sp>
-      <p:sp>
-        <p:nvSpPr>
-          <p:cNvPr id="9" name="Text 5"/>
-          <p:cNvSpPr/>
-          <p:nvPr/>
-        </p:nvSpPr>
-        <p:spPr>
-          <a:xfrm>
-            <a:off x="5897880" y="3794760"/>
-            <a:ext cx="3017520" cy="640080"/>
-          </a:xfrm>
-          <a:prstGeom prst="rect">
-            <a:avLst/>
-          </a:prstGeom>
-          <a:noFill/>
-          <a:ln/>
-        </p:spPr>
-        <p:txBody>
-          <a:bodyPr wrap="square" rtlCol="0" anchor="ctr"/>
-          <a:lstStyle/>
-          <a:p>
-            <a:pPr marL="0" indent="0">
-              <a:buNone/>
-            </a:pPr>
-            <a:r>
-              <a:rPr lang="en-US" sz="1100" i="1" dirty="0">
-                <a:solidFill>
-                  <a:srgbClr val="1E293B"/>
-                </a:solidFill>
-                <a:latin typeface="Calibri" pitchFamily="34" charset="0"/>
-                <a:ea typeface="Calibri" pitchFamily="34" charset="-122"/>
-                <a:cs typeface="Calibri" pitchFamily="34" charset="-120"/>
-              </a:rPr>
-              <a:t>💡  UK domina con ~85% del revenue. Los 9 países restantes son un nicho de expansión con alto potencial de fidelización.</a:t>
             </a:r>
             <a:endParaRPr lang="en-US" sz="1100" dirty="0"/>
           </a:p>
@@ -9956,298 +7636,6 @@
 </file>
 
 <file path=ppt/slides/slide5.xml><?xml version="1.0" encoding="utf-8"?>
-<p:sld xmlns:a="http://schemas.openxmlformats.org/drawingml/2006/main" xmlns:r="http://schemas.openxmlformats.org/officeDocument/2006/relationships" xmlns:p="http://schemas.openxmlformats.org/presentationml/2006/main">
-  <p:cSld name="Slide 6">
-    <p:bg>
-      <p:bgPr>
-        <a:solidFill>
-          <a:srgbClr val="F4F7F8"/>
-        </a:solidFill>
-        <a:effectLst/>
-      </p:bgPr>
-    </p:bg>
-    <p:spTree>
-      <p:nvGrpSpPr>
-        <p:cNvPr id="1" name=""/>
-        <p:cNvGrpSpPr/>
-        <p:nvPr/>
-      </p:nvGrpSpPr>
-      <p:grpSpPr>
-        <a:xfrm>
-          <a:off x="0" y="0"/>
-          <a:ext cx="0" cy="0"/>
-          <a:chOff x="0" y="0"/>
-          <a:chExt cx="0" cy="0"/>
-        </a:xfrm>
-      </p:grpSpPr>
-      <p:sp>
-        <p:nvSpPr>
-          <p:cNvPr id="2" name="Shape 0"/>
-          <p:cNvSpPr/>
-          <p:nvPr/>
-        </p:nvSpPr>
-        <p:spPr>
-          <a:xfrm>
-            <a:off x="0" y="0"/>
-            <a:ext cx="9144000" cy="822960"/>
-          </a:xfrm>
-          <a:prstGeom prst="rect">
-            <a:avLst/>
-          </a:prstGeom>
-          <a:solidFill>
-            <a:srgbClr val="0F2D5B"/>
-          </a:solidFill>
-          <a:ln w="12700">
-            <a:solidFill>
-              <a:srgbClr val="0F2D5B"/>
-            </a:solidFill>
-            <a:prstDash val="solid"/>
-          </a:ln>
-        </p:spPr>
-        <p:txBody>
-          <a:bodyPr/>
-          <a:lstStyle/>
-          <a:p>
-            <a:endParaRPr lang="es-ES"/>
-          </a:p>
-        </p:txBody>
-      </p:sp>
-      <p:sp>
-        <p:nvSpPr>
-          <p:cNvPr id="3" name="Text 1"/>
-          <p:cNvSpPr/>
-          <p:nvPr/>
-        </p:nvSpPr>
-        <p:spPr>
-          <a:xfrm>
-            <a:off x="365760" y="0"/>
-            <a:ext cx="8412480" cy="822960"/>
-          </a:xfrm>
-          <a:prstGeom prst="rect">
-            <a:avLst/>
-          </a:prstGeom>
-          <a:noFill/>
-          <a:ln/>
-        </p:spPr>
-        <p:txBody>
-          <a:bodyPr wrap="square" rtlCol="0" anchor="ctr"/>
-          <a:lstStyle/>
-          <a:p>
-            <a:pPr marL="0" indent="0">
-              <a:buNone/>
-            </a:pPr>
-            <a:r>
-              <a:rPr lang="en-US" sz="2200" b="1" dirty="0">
-                <a:solidFill>
-                  <a:srgbClr val="FFFFFF"/>
-                </a:solidFill>
-                <a:latin typeface="Calibri" pitchFamily="34" charset="0"/>
-                <a:ea typeface="Calibri" pitchFamily="34" charset="-122"/>
-                <a:cs typeface="Calibri" pitchFamily="34" charset="-120"/>
-              </a:rPr>
-              <a:t>Insights: Perfil del Cliente y Distribución de Recompra</a:t>
-            </a:r>
-            <a:endParaRPr lang="en-US" sz="2200" dirty="0"/>
-          </a:p>
-        </p:txBody>
-      </p:sp>
-      <p:graphicFrame>
-        <p:nvGraphicFramePr>
-          <p:cNvPr id="4" name="Chart 0"/>
-          <p:cNvGraphicFramePr/>
-          <p:nvPr/>
-        </p:nvGraphicFramePr>
-        <p:xfrm>
-          <a:off x="320040" y="960120"/>
-          <a:ext cx="3474720" cy="2743200"/>
-        </p:xfrm>
-        <a:graphic>
-          <a:graphicData uri="http://schemas.openxmlformats.org/drawingml/2006/chart">
-            <c:chart xmlns:c="http://schemas.openxmlformats.org/drawingml/2006/chart" xmlns:r="http://schemas.openxmlformats.org/officeDocument/2006/relationships" r:id="rId3"/>
-          </a:graphicData>
-        </a:graphic>
-      </p:graphicFrame>
-      <p:sp>
-        <p:nvSpPr>
-          <p:cNvPr id="5" name="Shape 2"/>
-          <p:cNvSpPr/>
-          <p:nvPr/>
-        </p:nvSpPr>
-        <p:spPr>
-          <a:xfrm>
-            <a:off x="320040" y="3767328"/>
-            <a:ext cx="3474720" cy="685800"/>
-          </a:xfrm>
-          <a:prstGeom prst="rect">
-            <a:avLst/>
-          </a:prstGeom>
-          <a:solidFill>
-            <a:srgbClr val="FFFFFF"/>
-          </a:solidFill>
-          <a:ln w="12700">
-            <a:solidFill>
-              <a:srgbClr val="E2E8F0"/>
-            </a:solidFill>
-            <a:prstDash val="solid"/>
-          </a:ln>
-          <a:effectLst>
-            <a:outerShdw blurRad="101600" dist="38100" dir="8100000" algn="bl" rotWithShape="0">
-              <a:srgbClr val="000000">
-                <a:alpha val="10000"/>
-              </a:srgbClr>
-            </a:outerShdw>
-          </a:effectLst>
-        </p:spPr>
-        <p:txBody>
-          <a:bodyPr/>
-          <a:lstStyle/>
-          <a:p>
-            <a:endParaRPr lang="es-ES"/>
-          </a:p>
-        </p:txBody>
-      </p:sp>
-      <p:sp>
-        <p:nvSpPr>
-          <p:cNvPr id="6" name="Text 3"/>
-          <p:cNvSpPr/>
-          <p:nvPr/>
-        </p:nvSpPr>
-        <p:spPr>
-          <a:xfrm>
-            <a:off x="457200" y="3794760"/>
-            <a:ext cx="3291840" cy="640080"/>
-          </a:xfrm>
-          <a:prstGeom prst="rect">
-            <a:avLst/>
-          </a:prstGeom>
-          <a:noFill/>
-          <a:ln/>
-        </p:spPr>
-        <p:txBody>
-          <a:bodyPr wrap="square" rtlCol="0" anchor="ctr"/>
-          <a:lstStyle/>
-          <a:p>
-            <a:pPr marL="0" indent="0">
-              <a:buNone/>
-            </a:pPr>
-            <a:r>
-              <a:rPr lang="en-US" sz="1100" i="1" dirty="0">
-                <a:solidFill>
-                  <a:srgbClr val="1E293B"/>
-                </a:solidFill>
-                <a:latin typeface="Calibri" pitchFamily="34" charset="0"/>
-                <a:ea typeface="Calibri" pitchFamily="34" charset="-122"/>
-                <a:cs typeface="Calibri" pitchFamily="34" charset="-120"/>
-              </a:rPr>
-              <a:t>💡  39% de recompra es una distribución razonablemente equilibrada. No requiere técnicas de balanceo de clases.</a:t>
-            </a:r>
-            <a:endParaRPr lang="en-US" sz="1100" dirty="0"/>
-          </a:p>
-        </p:txBody>
-      </p:sp>
-      <p:graphicFrame>
-        <p:nvGraphicFramePr>
-          <p:cNvPr id="7" name="Chart 1"/>
-          <p:cNvGraphicFramePr/>
-          <p:nvPr/>
-        </p:nvGraphicFramePr>
-        <p:xfrm>
-          <a:off x="3977640" y="960120"/>
-          <a:ext cx="4937760" cy="2743200"/>
-        </p:xfrm>
-        <a:graphic>
-          <a:graphicData uri="http://schemas.openxmlformats.org/drawingml/2006/chart">
-            <c:chart xmlns:c="http://schemas.openxmlformats.org/drawingml/2006/chart" xmlns:r="http://schemas.openxmlformats.org/officeDocument/2006/relationships" r:id="rId4"/>
-          </a:graphicData>
-        </a:graphic>
-      </p:graphicFrame>
-      <p:sp>
-        <p:nvSpPr>
-          <p:cNvPr id="8" name="Shape 4"/>
-          <p:cNvSpPr/>
-          <p:nvPr/>
-        </p:nvSpPr>
-        <p:spPr>
-          <a:xfrm>
-            <a:off x="3977640" y="3767328"/>
-            <a:ext cx="4937760" cy="685800"/>
-          </a:xfrm>
-          <a:prstGeom prst="rect">
-            <a:avLst/>
-          </a:prstGeom>
-          <a:solidFill>
-            <a:srgbClr val="FFFFFF"/>
-          </a:solidFill>
-          <a:ln w="12700">
-            <a:solidFill>
-              <a:srgbClr val="E2E8F0"/>
-            </a:solidFill>
-            <a:prstDash val="solid"/>
-          </a:ln>
-          <a:effectLst>
-            <a:outerShdw blurRad="101600" dist="38100" dir="8100000" algn="bl" rotWithShape="0">
-              <a:srgbClr val="000000">
-                <a:alpha val="10000"/>
-              </a:srgbClr>
-            </a:outerShdw>
-          </a:effectLst>
-        </p:spPr>
-        <p:txBody>
-          <a:bodyPr/>
-          <a:lstStyle/>
-          <a:p>
-            <a:endParaRPr lang="es-ES"/>
-          </a:p>
-        </p:txBody>
-      </p:sp>
-      <p:sp>
-        <p:nvSpPr>
-          <p:cNvPr id="9" name="Text 5"/>
-          <p:cNvSpPr/>
-          <p:nvPr/>
-        </p:nvSpPr>
-        <p:spPr>
-          <a:xfrm>
-            <a:off x="4114800" y="3794760"/>
-            <a:ext cx="4754880" cy="640080"/>
-          </a:xfrm>
-          <a:prstGeom prst="rect">
-            <a:avLst/>
-          </a:prstGeom>
-          <a:noFill/>
-          <a:ln/>
-        </p:spPr>
-        <p:txBody>
-          <a:bodyPr wrap="square" rtlCol="0" anchor="ctr"/>
-          <a:lstStyle/>
-          <a:p>
-            <a:pPr marL="0" indent="0">
-              <a:buNone/>
-            </a:pPr>
-            <a:r>
-              <a:rPr lang="en-US" sz="1100" i="1" dirty="0">
-                <a:solidFill>
-                  <a:srgbClr val="1E293B"/>
-                </a:solidFill>
-                <a:latin typeface="Calibri" pitchFamily="34" charset="0"/>
-                <a:ea typeface="Calibri" pitchFamily="34" charset="-122"/>
-                <a:cs typeface="Calibri" pitchFamily="34" charset="-120"/>
-              </a:rPr>
-              <a:t>💡  Los clientes que recompran tienen una recencia 2.7x más baja, una frecuencia 2.8x mayor y un revenue 2x más alto. Son las variables más predictoras.</a:t>
-            </a:r>
-            <a:endParaRPr lang="en-US" sz="1100" dirty="0"/>
-          </a:p>
-        </p:txBody>
-      </p:sp>
-    </p:spTree>
-  </p:cSld>
-  <p:clrMapOvr>
-    <a:masterClrMapping/>
-  </p:clrMapOvr>
-</p:sld>
-</file>
-
-<file path=ppt/slides/slide6.xml><?xml version="1.0" encoding="utf-8"?>
 <p:sld xmlns:a="http://schemas.openxmlformats.org/drawingml/2006/main" xmlns:r="http://schemas.openxmlformats.org/officeDocument/2006/relationships" xmlns:p="http://schemas.openxmlformats.org/presentationml/2006/main">
   <p:cSld name="Slide 7">
     <p:bg>
@@ -10984,8 +8372,8 @@
         </p:nvSpPr>
         <p:spPr>
           <a:xfrm>
-            <a:off x="7680960" y="3355848"/>
-            <a:ext cx="1005840" cy="292608"/>
+            <a:off x="7465423" y="3355848"/>
+            <a:ext cx="1221377" cy="292608"/>
           </a:xfrm>
           <a:prstGeom prst="rect">
             <a:avLst/>
@@ -11096,7 +8484,7 @@
 </p:sld>
 </file>
 
-<file path=ppt/slides/slide7.xml><?xml version="1.0" encoding="utf-8"?>
+<file path=ppt/slides/slide6.xml><?xml version="1.0" encoding="utf-8"?>
 <p:sld xmlns:a="http://schemas.openxmlformats.org/drawingml/2006/main" xmlns:r="http://schemas.openxmlformats.org/officeDocument/2006/relationships" xmlns:p="http://schemas.openxmlformats.org/presentationml/2006/main">
   <p:cSld name="Slide 8">
     <p:bg>
@@ -11208,22 +8596,6 @@
           </a:graphicData>
         </a:graphic>
       </p:graphicFrame>
-      <p:graphicFrame>
-        <p:nvGraphicFramePr>
-          <p:cNvPr id="5" name="Chart 1"/>
-          <p:cNvGraphicFramePr/>
-          <p:nvPr/>
-        </p:nvGraphicFramePr>
-        <p:xfrm>
-          <a:off x="4983480" y="960120"/>
-          <a:ext cx="3840480" cy="3200400"/>
-        </p:xfrm>
-        <a:graphic>
-          <a:graphicData uri="http://schemas.openxmlformats.org/drawingml/2006/chart">
-            <c:chart xmlns:c="http://schemas.openxmlformats.org/drawingml/2006/chart" xmlns:r="http://schemas.openxmlformats.org/officeDocument/2006/relationships" r:id="rId4"/>
-          </a:graphicData>
-        </a:graphic>
-      </p:graphicFrame>
       <p:sp>
         <p:nvSpPr>
           <p:cNvPr id="6" name="Shape 2"/>
@@ -11232,8 +8604,8 @@
         </p:nvSpPr>
         <p:spPr>
           <a:xfrm>
-            <a:off x="320040" y="4297680"/>
-            <a:ext cx="8503920" cy="566928"/>
+            <a:off x="320040" y="4183380"/>
+            <a:ext cx="8503920" cy="681228"/>
           </a:xfrm>
           <a:prstGeom prst="rect">
             <a:avLst/>
@@ -11284,30 +8656,30 @@
           <a:bodyPr wrap="square" rtlCol="0" anchor="ctr"/>
           <a:lstStyle/>
           <a:p>
-            <a:pPr marL="0" indent="0">
+            <a:pPr marL="0" indent="0" algn="just">
               <a:buNone/>
             </a:pPr>
             <a:r>
+              <a:rPr lang="en-US" sz="1200" b="1" dirty="0" err="1">
+                <a:solidFill>
+                  <a:srgbClr val="1E293B"/>
+                </a:solidFill>
+                <a:latin typeface="Calibri" pitchFamily="34" charset="0"/>
+                <a:ea typeface="Calibri" pitchFamily="34" charset="-122"/>
+                <a:cs typeface="Calibri" pitchFamily="34" charset="-120"/>
+              </a:rPr>
+              <a:t>Recencia</a:t>
+            </a:r>
+            <a:r>
               <a:rPr lang="en-US" sz="1200" b="1" dirty="0">
                 <a:solidFill>
-                  <a:srgbClr val="22C55E"/>
-                </a:solidFill>
-                <a:latin typeface="Calibri" pitchFamily="34" charset="0"/>
-                <a:ea typeface="Calibri" pitchFamily="34" charset="-122"/>
-                <a:cs typeface="Calibri" pitchFamily="34" charset="-120"/>
-              </a:rPr>
-              <a:t>✅  </a:t>
-            </a:r>
-            <a:r>
-              <a:rPr lang="en-US" sz="1200" b="1" dirty="0">
-                <a:solidFill>
                   <a:srgbClr val="1E293B"/>
                 </a:solidFill>
                 <a:latin typeface="Calibri" pitchFamily="34" charset="0"/>
                 <a:ea typeface="Calibri" pitchFamily="34" charset="-122"/>
                 <a:cs typeface="Calibri" pitchFamily="34" charset="-120"/>
               </a:rPr>
-              <a:t>Recencia y frecuencia dominan la predicción. </a:t>
+              <a:t> y frecuencia dominan la predicción. </a:t>
             </a:r>
             <a:r>
               <a:rPr lang="en-US" sz="1200" dirty="0">
@@ -11318,12 +8690,480 @@
                 <a:ea typeface="Calibri" pitchFamily="34" charset="-122"/>
                 <a:cs typeface="Calibri" pitchFamily="34" charset="-120"/>
               </a:rPr>
-              <a:t>La recencia negativa confirma: cuanto más reciente es la última compra, más probable es que el cliente vuelva. La frecuencia amplifica esta señal.</a:t>
+              <a:t>La recencia negativa confirma: cuanto más reciente es la </a:t>
+            </a:r>
+            <a:r>
+              <a:rPr lang="en-US" sz="1200" dirty="0" err="1">
+                <a:solidFill>
+                  <a:srgbClr val="1E293B"/>
+                </a:solidFill>
+                <a:latin typeface="Calibri" pitchFamily="34" charset="0"/>
+                <a:ea typeface="Calibri" pitchFamily="34" charset="-122"/>
+                <a:cs typeface="Calibri" pitchFamily="34" charset="-120"/>
+              </a:rPr>
+              <a:t>última</a:t>
+            </a:r>
+            <a:r>
+              <a:rPr lang="en-US" sz="1200" dirty="0">
+                <a:solidFill>
+                  <a:srgbClr val="1E293B"/>
+                </a:solidFill>
+                <a:latin typeface="Calibri" pitchFamily="34" charset="0"/>
+                <a:ea typeface="Calibri" pitchFamily="34" charset="-122"/>
+                <a:cs typeface="Calibri" pitchFamily="34" charset="-120"/>
+              </a:rPr>
+              <a:t> </a:t>
+            </a:r>
+            <a:r>
+              <a:rPr lang="en-US" sz="1200" dirty="0" err="1">
+                <a:solidFill>
+                  <a:srgbClr val="1E293B"/>
+                </a:solidFill>
+                <a:latin typeface="Calibri" pitchFamily="34" charset="0"/>
+                <a:ea typeface="Calibri" pitchFamily="34" charset="-122"/>
+                <a:cs typeface="Calibri" pitchFamily="34" charset="-120"/>
+              </a:rPr>
+              <a:t>compra</a:t>
+            </a:r>
+            <a:r>
+              <a:rPr lang="en-US" sz="1200" dirty="0">
+                <a:solidFill>
+                  <a:srgbClr val="1E293B"/>
+                </a:solidFill>
+                <a:latin typeface="Calibri" pitchFamily="34" charset="0"/>
+                <a:ea typeface="Calibri" pitchFamily="34" charset="-122"/>
+                <a:cs typeface="Calibri" pitchFamily="34" charset="-120"/>
+              </a:rPr>
+              <a:t> (</a:t>
+            </a:r>
+            <a:r>
+              <a:rPr lang="en-US" sz="1200" dirty="0" err="1">
+                <a:solidFill>
+                  <a:srgbClr val="1E293B"/>
+                </a:solidFill>
+                <a:latin typeface="Calibri" pitchFamily="34" charset="0"/>
+                <a:ea typeface="Calibri" pitchFamily="34" charset="-122"/>
+                <a:cs typeface="Calibri" pitchFamily="34" charset="-120"/>
+              </a:rPr>
+              <a:t>menor</a:t>
+            </a:r>
+            <a:r>
+              <a:rPr lang="en-US" sz="1200" dirty="0">
+                <a:solidFill>
+                  <a:srgbClr val="1E293B"/>
+                </a:solidFill>
+                <a:latin typeface="Calibri" pitchFamily="34" charset="0"/>
+                <a:ea typeface="Calibri" pitchFamily="34" charset="-122"/>
+                <a:cs typeface="Calibri" pitchFamily="34" charset="-120"/>
+              </a:rPr>
+              <a:t> </a:t>
+            </a:r>
+            <a:r>
+              <a:rPr lang="en-US" sz="1200" dirty="0" err="1">
+                <a:solidFill>
+                  <a:srgbClr val="1E293B"/>
+                </a:solidFill>
+                <a:latin typeface="Calibri" pitchFamily="34" charset="0"/>
+                <a:ea typeface="Calibri" pitchFamily="34" charset="-122"/>
+                <a:cs typeface="Calibri" pitchFamily="34" charset="-120"/>
+              </a:rPr>
+              <a:t>recencia</a:t>
+            </a:r>
+            <a:r>
+              <a:rPr lang="en-US" sz="1200" dirty="0">
+                <a:solidFill>
+                  <a:srgbClr val="1E293B"/>
+                </a:solidFill>
+                <a:latin typeface="Calibri" pitchFamily="34" charset="0"/>
+                <a:ea typeface="Calibri" pitchFamily="34" charset="-122"/>
+                <a:cs typeface="Calibri" pitchFamily="34" charset="-120"/>
+              </a:rPr>
+              <a:t>), es </a:t>
+            </a:r>
+            <a:r>
+              <a:rPr lang="en-US" sz="1200" dirty="0" err="1">
+                <a:solidFill>
+                  <a:srgbClr val="1E293B"/>
+                </a:solidFill>
+                <a:latin typeface="Calibri" pitchFamily="34" charset="0"/>
+                <a:ea typeface="Calibri" pitchFamily="34" charset="-122"/>
+                <a:cs typeface="Calibri" pitchFamily="34" charset="-120"/>
+              </a:rPr>
+              <a:t>más</a:t>
+            </a:r>
+            <a:r>
+              <a:rPr lang="en-US" sz="1200" dirty="0">
+                <a:solidFill>
+                  <a:srgbClr val="1E293B"/>
+                </a:solidFill>
+                <a:latin typeface="Calibri" pitchFamily="34" charset="0"/>
+                <a:ea typeface="Calibri" pitchFamily="34" charset="-122"/>
+                <a:cs typeface="Calibri" pitchFamily="34" charset="-120"/>
+              </a:rPr>
+              <a:t> probable </a:t>
+            </a:r>
+            <a:r>
+              <a:rPr lang="en-US" sz="1200" dirty="0" err="1">
+                <a:solidFill>
+                  <a:srgbClr val="1E293B"/>
+                </a:solidFill>
+                <a:latin typeface="Calibri" pitchFamily="34" charset="0"/>
+                <a:ea typeface="Calibri" pitchFamily="34" charset="-122"/>
+                <a:cs typeface="Calibri" pitchFamily="34" charset="-120"/>
+              </a:rPr>
+              <a:t>que</a:t>
+            </a:r>
+            <a:r>
+              <a:rPr lang="en-US" sz="1200" dirty="0">
+                <a:solidFill>
+                  <a:srgbClr val="1E293B"/>
+                </a:solidFill>
+                <a:latin typeface="Calibri" pitchFamily="34" charset="0"/>
+                <a:ea typeface="Calibri" pitchFamily="34" charset="-122"/>
+                <a:cs typeface="Calibri" pitchFamily="34" charset="-120"/>
+              </a:rPr>
+              <a:t> el cliente vuelva. La </a:t>
+            </a:r>
+            <a:r>
+              <a:rPr lang="en-US" sz="1200" dirty="0" err="1">
+                <a:solidFill>
+                  <a:srgbClr val="1E293B"/>
+                </a:solidFill>
+                <a:latin typeface="Calibri" pitchFamily="34" charset="0"/>
+                <a:ea typeface="Calibri" pitchFamily="34" charset="-122"/>
+                <a:cs typeface="Calibri" pitchFamily="34" charset="-120"/>
+              </a:rPr>
+              <a:t>frecuencia</a:t>
+            </a:r>
+            <a:r>
+              <a:rPr lang="en-US" sz="1200" dirty="0">
+                <a:solidFill>
+                  <a:srgbClr val="1E293B"/>
+                </a:solidFill>
+                <a:latin typeface="Calibri" pitchFamily="34" charset="0"/>
+                <a:ea typeface="Calibri" pitchFamily="34" charset="-122"/>
+                <a:cs typeface="Calibri" pitchFamily="34" charset="-120"/>
+              </a:rPr>
+              <a:t> </a:t>
+            </a:r>
+            <a:r>
+              <a:rPr lang="en-US" sz="1200" dirty="0" err="1">
+                <a:solidFill>
+                  <a:srgbClr val="1E293B"/>
+                </a:solidFill>
+                <a:latin typeface="Calibri" pitchFamily="34" charset="0"/>
+                <a:ea typeface="Calibri" pitchFamily="34" charset="-122"/>
+                <a:cs typeface="Calibri" pitchFamily="34" charset="-120"/>
+              </a:rPr>
+              <a:t>positiva</a:t>
+            </a:r>
+            <a:r>
+              <a:rPr lang="en-US" sz="1200" dirty="0">
+                <a:solidFill>
+                  <a:srgbClr val="1E293B"/>
+                </a:solidFill>
+                <a:latin typeface="Calibri" pitchFamily="34" charset="0"/>
+                <a:ea typeface="Calibri" pitchFamily="34" charset="-122"/>
+                <a:cs typeface="Calibri" pitchFamily="34" charset="-120"/>
+              </a:rPr>
+              <a:t> </a:t>
+            </a:r>
+            <a:r>
+              <a:rPr lang="en-US" sz="1200" dirty="0" err="1">
+                <a:solidFill>
+                  <a:srgbClr val="1E293B"/>
+                </a:solidFill>
+                <a:latin typeface="Calibri" pitchFamily="34" charset="0"/>
+                <a:ea typeface="Calibri" pitchFamily="34" charset="-122"/>
+                <a:cs typeface="Calibri" pitchFamily="34" charset="-120"/>
+              </a:rPr>
+              <a:t>afirma</a:t>
+            </a:r>
+            <a:r>
+              <a:rPr lang="en-US" sz="1200" dirty="0">
+                <a:solidFill>
+                  <a:srgbClr val="1E293B"/>
+                </a:solidFill>
+                <a:latin typeface="Calibri" pitchFamily="34" charset="0"/>
+                <a:ea typeface="Calibri" pitchFamily="34" charset="-122"/>
+                <a:cs typeface="Calibri" pitchFamily="34" charset="-120"/>
+              </a:rPr>
+              <a:t> </a:t>
+            </a:r>
+            <a:r>
+              <a:rPr lang="en-US" sz="1200" dirty="0" err="1">
+                <a:solidFill>
+                  <a:srgbClr val="1E293B"/>
+                </a:solidFill>
+                <a:latin typeface="Calibri" pitchFamily="34" charset="0"/>
+                <a:ea typeface="Calibri" pitchFamily="34" charset="-122"/>
+                <a:cs typeface="Calibri" pitchFamily="34" charset="-120"/>
+              </a:rPr>
+              <a:t>que</a:t>
+            </a:r>
+            <a:r>
+              <a:rPr lang="en-US" sz="1200" dirty="0">
+                <a:solidFill>
+                  <a:srgbClr val="1E293B"/>
+                </a:solidFill>
+                <a:latin typeface="Calibri" pitchFamily="34" charset="0"/>
+                <a:ea typeface="Calibri" pitchFamily="34" charset="-122"/>
+                <a:cs typeface="Calibri" pitchFamily="34" charset="-120"/>
+              </a:rPr>
+              <a:t> </a:t>
+            </a:r>
+            <a:r>
+              <a:rPr lang="en-US" sz="1200" dirty="0" err="1">
+                <a:solidFill>
+                  <a:srgbClr val="1E293B"/>
+                </a:solidFill>
+                <a:latin typeface="Calibri" pitchFamily="34" charset="0"/>
+                <a:ea typeface="Calibri" pitchFamily="34" charset="-122"/>
+                <a:cs typeface="Calibri" pitchFamily="34" charset="-120"/>
+              </a:rPr>
+              <a:t>cuánto</a:t>
+            </a:r>
+            <a:r>
+              <a:rPr lang="en-US" sz="1200" dirty="0">
+                <a:solidFill>
+                  <a:srgbClr val="1E293B"/>
+                </a:solidFill>
+                <a:latin typeface="Calibri" pitchFamily="34" charset="0"/>
+                <a:ea typeface="Calibri" pitchFamily="34" charset="-122"/>
+                <a:cs typeface="Calibri" pitchFamily="34" charset="-120"/>
+              </a:rPr>
+              <a:t> </a:t>
+            </a:r>
+            <a:r>
+              <a:rPr lang="en-US" sz="1200" dirty="0" err="1">
+                <a:solidFill>
+                  <a:srgbClr val="1E293B"/>
+                </a:solidFill>
+                <a:latin typeface="Calibri" pitchFamily="34" charset="0"/>
+                <a:ea typeface="Calibri" pitchFamily="34" charset="-122"/>
+                <a:cs typeface="Calibri" pitchFamily="34" charset="-120"/>
+              </a:rPr>
+              <a:t>más</a:t>
+            </a:r>
+            <a:r>
+              <a:rPr lang="en-US" sz="1200" dirty="0">
+                <a:solidFill>
+                  <a:srgbClr val="1E293B"/>
+                </a:solidFill>
+                <a:latin typeface="Calibri" pitchFamily="34" charset="0"/>
+                <a:ea typeface="Calibri" pitchFamily="34" charset="-122"/>
+                <a:cs typeface="Calibri" pitchFamily="34" charset="-120"/>
+              </a:rPr>
+              <a:t> </a:t>
+            </a:r>
+            <a:r>
+              <a:rPr lang="en-US" sz="1200" dirty="0" err="1">
+                <a:solidFill>
+                  <a:srgbClr val="1E293B"/>
+                </a:solidFill>
+                <a:latin typeface="Calibri" pitchFamily="34" charset="0"/>
+                <a:ea typeface="Calibri" pitchFamily="34" charset="-122"/>
+                <a:cs typeface="Calibri" pitchFamily="34" charset="-120"/>
+              </a:rPr>
+              <a:t>haya</a:t>
+            </a:r>
+            <a:r>
+              <a:rPr lang="en-US" sz="1200" dirty="0">
+                <a:solidFill>
+                  <a:srgbClr val="1E293B"/>
+                </a:solidFill>
+                <a:latin typeface="Calibri" pitchFamily="34" charset="0"/>
+                <a:ea typeface="Calibri" pitchFamily="34" charset="-122"/>
+                <a:cs typeface="Calibri" pitchFamily="34" charset="-120"/>
+              </a:rPr>
+              <a:t> </a:t>
+            </a:r>
+            <a:r>
+              <a:rPr lang="en-US" sz="1200" dirty="0" err="1">
+                <a:solidFill>
+                  <a:srgbClr val="1E293B"/>
+                </a:solidFill>
+                <a:latin typeface="Calibri" pitchFamily="34" charset="0"/>
+                <a:ea typeface="Calibri" pitchFamily="34" charset="-122"/>
+                <a:cs typeface="Calibri" pitchFamily="34" charset="-120"/>
+              </a:rPr>
+              <a:t>comprado</a:t>
+            </a:r>
+            <a:r>
+              <a:rPr lang="en-US" sz="1200" dirty="0">
+                <a:solidFill>
+                  <a:srgbClr val="1E293B"/>
+                </a:solidFill>
+                <a:latin typeface="Calibri" pitchFamily="34" charset="0"/>
+                <a:ea typeface="Calibri" pitchFamily="34" charset="-122"/>
+                <a:cs typeface="Calibri" pitchFamily="34" charset="-120"/>
+              </a:rPr>
+              <a:t> un </a:t>
+            </a:r>
+            <a:r>
+              <a:rPr lang="en-US" sz="1200" dirty="0" err="1">
+                <a:solidFill>
+                  <a:srgbClr val="1E293B"/>
+                </a:solidFill>
+                <a:latin typeface="Calibri" pitchFamily="34" charset="0"/>
+                <a:ea typeface="Calibri" pitchFamily="34" charset="-122"/>
+                <a:cs typeface="Calibri" pitchFamily="34" charset="-120"/>
+              </a:rPr>
+              <a:t>cliente</a:t>
+            </a:r>
+            <a:r>
+              <a:rPr lang="en-US" sz="1200" dirty="0">
+                <a:solidFill>
+                  <a:srgbClr val="1E293B"/>
+                </a:solidFill>
+                <a:latin typeface="Calibri" pitchFamily="34" charset="0"/>
+                <a:ea typeface="Calibri" pitchFamily="34" charset="-122"/>
+                <a:cs typeface="Calibri" pitchFamily="34" charset="-120"/>
+              </a:rPr>
+              <a:t>, </a:t>
+            </a:r>
+            <a:r>
+              <a:rPr lang="en-US" sz="1200" dirty="0" err="1">
+                <a:solidFill>
+                  <a:srgbClr val="1E293B"/>
+                </a:solidFill>
+                <a:latin typeface="Calibri" pitchFamily="34" charset="0"/>
+                <a:ea typeface="Calibri" pitchFamily="34" charset="-122"/>
+                <a:cs typeface="Calibri" pitchFamily="34" charset="-120"/>
+              </a:rPr>
+              <a:t>más</a:t>
+            </a:r>
+            <a:r>
+              <a:rPr lang="en-US" sz="1200" dirty="0">
+                <a:solidFill>
+                  <a:srgbClr val="1E293B"/>
+                </a:solidFill>
+                <a:latin typeface="Calibri" pitchFamily="34" charset="0"/>
+                <a:ea typeface="Calibri" pitchFamily="34" charset="-122"/>
+                <a:cs typeface="Calibri" pitchFamily="34" charset="-120"/>
+              </a:rPr>
+              <a:t> </a:t>
+            </a:r>
+            <a:r>
+              <a:rPr lang="en-US" sz="1200" dirty="0" err="1">
+                <a:solidFill>
+                  <a:srgbClr val="1E293B"/>
+                </a:solidFill>
+                <a:latin typeface="Calibri" pitchFamily="34" charset="0"/>
+                <a:ea typeface="Calibri" pitchFamily="34" charset="-122"/>
+                <a:cs typeface="Calibri" pitchFamily="34" charset="-120"/>
+              </a:rPr>
+              <a:t>probables</a:t>
+            </a:r>
+            <a:r>
+              <a:rPr lang="en-US" sz="1200" dirty="0">
+                <a:solidFill>
+                  <a:srgbClr val="1E293B"/>
+                </a:solidFill>
+                <a:latin typeface="Calibri" pitchFamily="34" charset="0"/>
+                <a:ea typeface="Calibri" pitchFamily="34" charset="-122"/>
+                <a:cs typeface="Calibri" pitchFamily="34" charset="-120"/>
+              </a:rPr>
+              <a:t> es </a:t>
+            </a:r>
+            <a:r>
+              <a:rPr lang="en-US" sz="1200" dirty="0" err="1">
+                <a:solidFill>
+                  <a:srgbClr val="1E293B"/>
+                </a:solidFill>
+                <a:latin typeface="Calibri" pitchFamily="34" charset="0"/>
+                <a:ea typeface="Calibri" pitchFamily="34" charset="-122"/>
+                <a:cs typeface="Calibri" pitchFamily="34" charset="-120"/>
+              </a:rPr>
+              <a:t>que</a:t>
+            </a:r>
+            <a:r>
+              <a:rPr lang="en-US" sz="1200" dirty="0">
+                <a:solidFill>
+                  <a:srgbClr val="1E293B"/>
+                </a:solidFill>
+                <a:latin typeface="Calibri" pitchFamily="34" charset="0"/>
+                <a:ea typeface="Calibri" pitchFamily="34" charset="-122"/>
+                <a:cs typeface="Calibri" pitchFamily="34" charset="-120"/>
+              </a:rPr>
+              <a:t> lo </a:t>
+            </a:r>
+            <a:r>
+              <a:rPr lang="en-US" sz="1200" dirty="0" err="1">
+                <a:solidFill>
+                  <a:srgbClr val="1E293B"/>
+                </a:solidFill>
+                <a:latin typeface="Calibri" pitchFamily="34" charset="0"/>
+                <a:ea typeface="Calibri" pitchFamily="34" charset="-122"/>
+                <a:cs typeface="Calibri" pitchFamily="34" charset="-120"/>
+              </a:rPr>
+              <a:t>vuelva</a:t>
+            </a:r>
+            <a:r>
+              <a:rPr lang="en-US" sz="1200" dirty="0">
+                <a:solidFill>
+                  <a:srgbClr val="1E293B"/>
+                </a:solidFill>
+                <a:latin typeface="Calibri" pitchFamily="34" charset="0"/>
+                <a:ea typeface="Calibri" pitchFamily="34" charset="-122"/>
+                <a:cs typeface="Calibri" pitchFamily="34" charset="-120"/>
+              </a:rPr>
+              <a:t> a </a:t>
+            </a:r>
+            <a:r>
+              <a:rPr lang="en-US" sz="1200" dirty="0" err="1">
+                <a:solidFill>
+                  <a:srgbClr val="1E293B"/>
+                </a:solidFill>
+                <a:latin typeface="Calibri" pitchFamily="34" charset="0"/>
+                <a:ea typeface="Calibri" pitchFamily="34" charset="-122"/>
+                <a:cs typeface="Calibri" pitchFamily="34" charset="-120"/>
+              </a:rPr>
+              <a:t>hacer</a:t>
+            </a:r>
+            <a:r>
+              <a:rPr lang="en-US" sz="1200" dirty="0">
+                <a:solidFill>
+                  <a:srgbClr val="1E293B"/>
+                </a:solidFill>
+                <a:latin typeface="Calibri" pitchFamily="34" charset="0"/>
+                <a:ea typeface="Calibri" pitchFamily="34" charset="-122"/>
+                <a:cs typeface="Calibri" pitchFamily="34" charset="-120"/>
+              </a:rPr>
+              <a:t>.</a:t>
             </a:r>
             <a:endParaRPr lang="en-US" sz="1200" dirty="0"/>
           </a:p>
         </p:txBody>
       </p:sp>
+      <p:graphicFrame>
+        <p:nvGraphicFramePr>
+          <p:cNvPr id="10" name="Chart 1">
+            <a:extLst>
+              <a:ext uri="{FF2B5EF4-FFF2-40B4-BE49-F238E27FC236}">
+                <a16:creationId xmlns:a16="http://schemas.microsoft.com/office/drawing/2014/main" id="{A7C20B11-781B-A145-DA4C-112DCBFCCE38}"/>
+              </a:ext>
+            </a:extLst>
+          </p:cNvPr>
+          <p:cNvGraphicFramePr/>
+          <p:nvPr>
+            <p:extLst>
+              <p:ext uri="{D42A27DB-BD31-4B8C-83A1-F6EECF244321}">
+                <p14:modId xmlns:p14="http://schemas.microsoft.com/office/powerpoint/2010/main" val="1763145369"/>
+              </p:ext>
+            </p:extLst>
+          </p:nvPr>
+        </p:nvGraphicFramePr>
+        <p:xfrm>
+          <a:off x="4937760" y="946404"/>
+          <a:ext cx="3840480" cy="3200400"/>
+        </p:xfrm>
+        <a:graphic>
+          <a:graphicData uri="http://schemas.openxmlformats.org/drawingml/2006/chart">
+            <c:chart xmlns:c="http://schemas.openxmlformats.org/drawingml/2006/chart" xmlns:r="http://schemas.openxmlformats.org/officeDocument/2006/relationships" r:id="rId4"/>
+          </a:graphicData>
+        </a:graphic>
+      </p:graphicFrame>
     </p:spTree>
   </p:cSld>
   <p:clrMapOvr>
@@ -11332,1115 +9172,7 @@
 </p:sld>
 </file>
 
-<file path=ppt/slides/slide8.xml><?xml version="1.0" encoding="utf-8"?>
-<p:sld xmlns:a="http://schemas.openxmlformats.org/drawingml/2006/main" xmlns:r="http://schemas.openxmlformats.org/officeDocument/2006/relationships" xmlns:p="http://schemas.openxmlformats.org/presentationml/2006/main">
-  <p:cSld name="Slide 9">
-    <p:bg>
-      <p:bgPr>
-        <a:solidFill>
-          <a:srgbClr val="F4F7F8"/>
-        </a:solidFill>
-        <a:effectLst/>
-      </p:bgPr>
-    </p:bg>
-    <p:spTree>
-      <p:nvGrpSpPr>
-        <p:cNvPr id="1" name=""/>
-        <p:cNvGrpSpPr/>
-        <p:nvPr/>
-      </p:nvGrpSpPr>
-      <p:grpSpPr>
-        <a:xfrm>
-          <a:off x="0" y="0"/>
-          <a:ext cx="0" cy="0"/>
-          <a:chOff x="0" y="0"/>
-          <a:chExt cx="0" cy="0"/>
-        </a:xfrm>
-      </p:grpSpPr>
-      <p:sp>
-        <p:nvSpPr>
-          <p:cNvPr id="2" name="Shape 0"/>
-          <p:cNvSpPr/>
-          <p:nvPr/>
-        </p:nvSpPr>
-        <p:spPr>
-          <a:xfrm>
-            <a:off x="0" y="0"/>
-            <a:ext cx="9144000" cy="822960"/>
-          </a:xfrm>
-          <a:prstGeom prst="rect">
-            <a:avLst/>
-          </a:prstGeom>
-          <a:solidFill>
-            <a:srgbClr val="0F2D5B"/>
-          </a:solidFill>
-          <a:ln w="12700">
-            <a:solidFill>
-              <a:srgbClr val="0F2D5B"/>
-            </a:solidFill>
-            <a:prstDash val="solid"/>
-          </a:ln>
-        </p:spPr>
-        <p:txBody>
-          <a:bodyPr/>
-          <a:lstStyle/>
-          <a:p>
-            <a:endParaRPr lang="es-ES"/>
-          </a:p>
-        </p:txBody>
-      </p:sp>
-      <p:sp>
-        <p:nvSpPr>
-          <p:cNvPr id="3" name="Text 1"/>
-          <p:cNvSpPr/>
-          <p:nvPr/>
-        </p:nvSpPr>
-        <p:spPr>
-          <a:xfrm>
-            <a:off x="365760" y="0"/>
-            <a:ext cx="8412480" cy="822960"/>
-          </a:xfrm>
-          <a:prstGeom prst="rect">
-            <a:avLst/>
-          </a:prstGeom>
-          <a:noFill/>
-          <a:ln/>
-        </p:spPr>
-        <p:txBody>
-          <a:bodyPr wrap="square" rtlCol="0" anchor="ctr"/>
-          <a:lstStyle/>
-          <a:p>
-            <a:pPr marL="0" indent="0">
-              <a:buNone/>
-            </a:pPr>
-            <a:r>
-              <a:rPr lang="en-US" sz="2600" b="1" dirty="0">
-                <a:solidFill>
-                  <a:srgbClr val="FFFFFF"/>
-                </a:solidFill>
-                <a:latin typeface="Calibri" pitchFamily="34" charset="0"/>
-                <a:ea typeface="Calibri" pitchFamily="34" charset="-122"/>
-                <a:cs typeface="Calibri" pitchFamily="34" charset="-120"/>
-              </a:rPr>
-              <a:t>Ajuste del Umbral: Precisión vs Cobertura</a:t>
-            </a:r>
-            <a:endParaRPr lang="en-US" sz="2600" dirty="0"/>
-          </a:p>
-        </p:txBody>
-      </p:sp>
-      <p:graphicFrame>
-        <p:nvGraphicFramePr>
-          <p:cNvPr id="4" name="Chart 0"/>
-          <p:cNvGraphicFramePr/>
-          <p:nvPr/>
-        </p:nvGraphicFramePr>
-        <p:xfrm>
-          <a:off x="320040" y="960120"/>
-          <a:ext cx="4572000" cy="2926080"/>
-        </p:xfrm>
-        <a:graphic>
-          <a:graphicData uri="http://schemas.openxmlformats.org/drawingml/2006/chart">
-            <c:chart xmlns:c="http://schemas.openxmlformats.org/drawingml/2006/chart" xmlns:r="http://schemas.openxmlformats.org/officeDocument/2006/relationships" r:id="rId3"/>
-          </a:graphicData>
-        </a:graphic>
-      </p:graphicFrame>
-      <p:sp>
-        <p:nvSpPr>
-          <p:cNvPr id="5" name="Shape 2"/>
-          <p:cNvSpPr/>
-          <p:nvPr/>
-        </p:nvSpPr>
-        <p:spPr>
-          <a:xfrm>
-            <a:off x="5074920" y="960120"/>
-            <a:ext cx="1234440" cy="2926080"/>
-          </a:xfrm>
-          <a:prstGeom prst="rect">
-            <a:avLst/>
-          </a:prstGeom>
-          <a:solidFill>
-            <a:srgbClr val="FFFFFF"/>
-          </a:solidFill>
-          <a:ln w="12700">
-            <a:solidFill>
-              <a:srgbClr val="E2E8F0"/>
-            </a:solidFill>
-            <a:prstDash val="solid"/>
-          </a:ln>
-          <a:effectLst>
-            <a:outerShdw blurRad="101600" dist="38100" dir="8100000" algn="bl" rotWithShape="0">
-              <a:srgbClr val="000000">
-                <a:alpha val="10000"/>
-              </a:srgbClr>
-            </a:outerShdw>
-          </a:effectLst>
-        </p:spPr>
-        <p:txBody>
-          <a:bodyPr/>
-          <a:lstStyle/>
-          <a:p>
-            <a:endParaRPr lang="es-ES"/>
-          </a:p>
-        </p:txBody>
-      </p:sp>
-      <p:sp>
-        <p:nvSpPr>
-          <p:cNvPr id="6" name="Shape 3"/>
-          <p:cNvSpPr/>
-          <p:nvPr/>
-        </p:nvSpPr>
-        <p:spPr>
-          <a:xfrm>
-            <a:off x="5074920" y="960120"/>
-            <a:ext cx="1234440" cy="384048"/>
-          </a:xfrm>
-          <a:prstGeom prst="rect">
-            <a:avLst/>
-          </a:prstGeom>
-          <a:solidFill>
-            <a:srgbClr val="0D9488"/>
-          </a:solidFill>
-          <a:ln w="12700">
-            <a:solidFill>
-              <a:srgbClr val="0D9488"/>
-            </a:solidFill>
-            <a:prstDash val="solid"/>
-          </a:ln>
-        </p:spPr>
-        <p:txBody>
-          <a:bodyPr/>
-          <a:lstStyle/>
-          <a:p>
-            <a:endParaRPr lang="es-ES"/>
-          </a:p>
-        </p:txBody>
-      </p:sp>
-      <p:sp>
-        <p:nvSpPr>
-          <p:cNvPr id="7" name="Text 4"/>
-          <p:cNvSpPr/>
-          <p:nvPr/>
-        </p:nvSpPr>
-        <p:spPr>
-          <a:xfrm>
-            <a:off x="5074920" y="960120"/>
-            <a:ext cx="1234440" cy="384048"/>
-          </a:xfrm>
-          <a:prstGeom prst="rect">
-            <a:avLst/>
-          </a:prstGeom>
-          <a:noFill/>
-          <a:ln/>
-        </p:spPr>
-        <p:txBody>
-          <a:bodyPr wrap="square" rtlCol="0" anchor="ctr"/>
-          <a:lstStyle/>
-          <a:p>
-            <a:pPr marL="0" indent="0" algn="ctr">
-              <a:buNone/>
-            </a:pPr>
-            <a:r>
-              <a:rPr lang="en-US" sz="1300" b="1" dirty="0">
-                <a:solidFill>
-                  <a:srgbClr val="FFFFFF"/>
-                </a:solidFill>
-                <a:latin typeface="Calibri" pitchFamily="34" charset="0"/>
-                <a:ea typeface="Calibri" pitchFamily="34" charset="-122"/>
-                <a:cs typeface="Calibri" pitchFamily="34" charset="-120"/>
-              </a:rPr>
-              <a:t>Umbral 0.5</a:t>
-            </a:r>
-            <a:endParaRPr lang="en-US" sz="1300" dirty="0"/>
-          </a:p>
-        </p:txBody>
-      </p:sp>
-      <p:sp>
-        <p:nvSpPr>
-          <p:cNvPr id="8" name="Text 5"/>
-          <p:cNvSpPr/>
-          <p:nvPr/>
-        </p:nvSpPr>
-        <p:spPr>
-          <a:xfrm>
-            <a:off x="5074920" y="1389888"/>
-            <a:ext cx="1234440" cy="320040"/>
-          </a:xfrm>
-          <a:prstGeom prst="rect">
-            <a:avLst/>
-          </a:prstGeom>
-          <a:noFill/>
-          <a:ln/>
-        </p:spPr>
-        <p:txBody>
-          <a:bodyPr wrap="square" rtlCol="0" anchor="ctr"/>
-          <a:lstStyle/>
-          <a:p>
-            <a:pPr marL="0" indent="0" algn="ctr">
-              <a:buNone/>
-            </a:pPr>
-            <a:r>
-              <a:rPr lang="en-US" sz="1200" b="1" dirty="0">
-                <a:solidFill>
-                  <a:srgbClr val="1E293B"/>
-                </a:solidFill>
-                <a:latin typeface="Calibri" pitchFamily="34" charset="0"/>
-                <a:ea typeface="Calibri" pitchFamily="34" charset="-122"/>
-                <a:cs typeface="Calibri" pitchFamily="34" charset="-120"/>
-              </a:rPr>
-              <a:t>Campaña masiva</a:t>
-            </a:r>
-            <a:endParaRPr lang="en-US" sz="1200" dirty="0"/>
-          </a:p>
-        </p:txBody>
-      </p:sp>
-      <p:sp>
-        <p:nvSpPr>
-          <p:cNvPr id="9" name="Text 6"/>
-          <p:cNvSpPr/>
-          <p:nvPr/>
-        </p:nvSpPr>
-        <p:spPr>
-          <a:xfrm>
-            <a:off x="5074920" y="1737360"/>
-            <a:ext cx="1234440" cy="256032"/>
-          </a:xfrm>
-          <a:prstGeom prst="rect">
-            <a:avLst/>
-          </a:prstGeom>
-          <a:noFill/>
-          <a:ln/>
-        </p:spPr>
-        <p:txBody>
-          <a:bodyPr wrap="square" rtlCol="0" anchor="ctr"/>
-          <a:lstStyle/>
-          <a:p>
-            <a:pPr marL="0" indent="0" algn="ctr">
-              <a:buNone/>
-            </a:pPr>
-            <a:r>
-              <a:rPr lang="en-US" sz="1100" dirty="0">
-                <a:solidFill>
-                  <a:srgbClr val="1E293B"/>
-                </a:solidFill>
-                <a:latin typeface="Calibri" pitchFamily="34" charset="0"/>
-                <a:ea typeface="Calibri" pitchFamily="34" charset="-122"/>
-                <a:cs typeface="Calibri" pitchFamily="34" charset="-120"/>
-              </a:rPr>
-              <a:t>Precision: 68%</a:t>
-            </a:r>
-            <a:endParaRPr lang="en-US" sz="1100" dirty="0"/>
-          </a:p>
-        </p:txBody>
-      </p:sp>
-      <p:sp>
-        <p:nvSpPr>
-          <p:cNvPr id="10" name="Text 7"/>
-          <p:cNvSpPr/>
-          <p:nvPr/>
-        </p:nvSpPr>
-        <p:spPr>
-          <a:xfrm>
-            <a:off x="5074920" y="1993392"/>
-            <a:ext cx="1234440" cy="256032"/>
-          </a:xfrm>
-          <a:prstGeom prst="rect">
-            <a:avLst/>
-          </a:prstGeom>
-          <a:noFill/>
-          <a:ln/>
-        </p:spPr>
-        <p:txBody>
-          <a:bodyPr wrap="square" rtlCol="0" anchor="ctr"/>
-          <a:lstStyle/>
-          <a:p>
-            <a:pPr marL="0" indent="0" algn="ctr">
-              <a:buNone/>
-            </a:pPr>
-            <a:r>
-              <a:rPr lang="en-US" sz="1100" dirty="0">
-                <a:solidFill>
-                  <a:srgbClr val="1E293B"/>
-                </a:solidFill>
-                <a:latin typeface="Calibri" pitchFamily="34" charset="0"/>
-                <a:ea typeface="Calibri" pitchFamily="34" charset="-122"/>
-                <a:cs typeface="Calibri" pitchFamily="34" charset="-120"/>
-              </a:rPr>
-              <a:t>Recall: 54%</a:t>
-            </a:r>
-            <a:endParaRPr lang="en-US" sz="1100" dirty="0"/>
-          </a:p>
-        </p:txBody>
-      </p:sp>
-      <p:sp>
-        <p:nvSpPr>
-          <p:cNvPr id="11" name="Text 8"/>
-          <p:cNvSpPr/>
-          <p:nvPr/>
-        </p:nvSpPr>
-        <p:spPr>
-          <a:xfrm>
-            <a:off x="5074920" y="2304288"/>
-            <a:ext cx="1234440" cy="256032"/>
-          </a:xfrm>
-          <a:prstGeom prst="rect">
-            <a:avLst/>
-          </a:prstGeom>
-          <a:noFill/>
-          <a:ln/>
-        </p:spPr>
-        <p:txBody>
-          <a:bodyPr wrap="square" rtlCol="0" anchor="ctr"/>
-          <a:lstStyle/>
-          <a:p>
-            <a:pPr marL="0" indent="0" algn="ctr">
-              <a:buNone/>
-            </a:pPr>
-            <a:r>
-              <a:rPr lang="en-US" sz="1100" b="1" dirty="0">
-                <a:solidFill>
-                  <a:srgbClr val="0D9488"/>
-                </a:solidFill>
-                <a:latin typeface="Calibri" pitchFamily="34" charset="0"/>
-                <a:ea typeface="Calibri" pitchFamily="34" charset="-122"/>
-                <a:cs typeface="Calibri" pitchFamily="34" charset="-120"/>
-              </a:rPr>
-              <a:t>340 clientes</a:t>
-            </a:r>
-            <a:endParaRPr lang="en-US" sz="1100" dirty="0"/>
-          </a:p>
-        </p:txBody>
-      </p:sp>
-      <p:sp>
-        <p:nvSpPr>
-          <p:cNvPr id="12" name="Text 9"/>
-          <p:cNvSpPr/>
-          <p:nvPr/>
-        </p:nvSpPr>
-        <p:spPr>
-          <a:xfrm>
-            <a:off x="5129784" y="2606040"/>
-            <a:ext cx="1124712" cy="1188720"/>
-          </a:xfrm>
-          <a:prstGeom prst="rect">
-            <a:avLst/>
-          </a:prstGeom>
-          <a:noFill/>
-          <a:ln/>
-        </p:spPr>
-        <p:txBody>
-          <a:bodyPr wrap="square" rtlCol="0" anchor="t"/>
-          <a:lstStyle/>
-          <a:p>
-            <a:pPr marL="0" indent="0">
-              <a:buNone/>
-            </a:pPr>
-            <a:r>
-              <a:rPr lang="en-US" sz="1000" i="1" dirty="0">
-                <a:solidFill>
-                  <a:srgbClr val="64748B"/>
-                </a:solidFill>
-                <a:latin typeface="Calibri" pitchFamily="34" charset="0"/>
-                <a:ea typeface="Calibri" pitchFamily="34" charset="-122"/>
-                <a:cs typeface="Calibri" pitchFamily="34" charset="-120"/>
-              </a:rPr>
-              <a:t>Máxima cobertura, menor precisión. Ideal si el coste de la campaña es bajo.</a:t>
-            </a:r>
-            <a:endParaRPr lang="en-US" sz="1000" dirty="0"/>
-          </a:p>
-        </p:txBody>
-      </p:sp>
-      <p:sp>
-        <p:nvSpPr>
-          <p:cNvPr id="13" name="Shape 10"/>
-          <p:cNvSpPr/>
-          <p:nvPr/>
-        </p:nvSpPr>
-        <p:spPr>
-          <a:xfrm>
-            <a:off x="6428232" y="960120"/>
-            <a:ext cx="1234440" cy="2926080"/>
-          </a:xfrm>
-          <a:prstGeom prst="rect">
-            <a:avLst/>
-          </a:prstGeom>
-          <a:solidFill>
-            <a:srgbClr val="FFFFFF"/>
-          </a:solidFill>
-          <a:ln w="12700">
-            <a:solidFill>
-              <a:srgbClr val="E2E8F0"/>
-            </a:solidFill>
-            <a:prstDash val="solid"/>
-          </a:ln>
-          <a:effectLst>
-            <a:outerShdw blurRad="101600" dist="38100" dir="8100000" algn="bl" rotWithShape="0">
-              <a:srgbClr val="000000">
-                <a:alpha val="10000"/>
-              </a:srgbClr>
-            </a:outerShdw>
-          </a:effectLst>
-        </p:spPr>
-        <p:txBody>
-          <a:bodyPr/>
-          <a:lstStyle/>
-          <a:p>
-            <a:endParaRPr lang="es-ES"/>
-          </a:p>
-        </p:txBody>
-      </p:sp>
-      <p:sp>
-        <p:nvSpPr>
-          <p:cNvPr id="14" name="Shape 11"/>
-          <p:cNvSpPr/>
-          <p:nvPr/>
-        </p:nvSpPr>
-        <p:spPr>
-          <a:xfrm>
-            <a:off x="6428232" y="960120"/>
-            <a:ext cx="1234440" cy="384048"/>
-          </a:xfrm>
-          <a:prstGeom prst="rect">
-            <a:avLst/>
-          </a:prstGeom>
-          <a:solidFill>
-            <a:srgbClr val="0F2D5B"/>
-          </a:solidFill>
-          <a:ln w="12700">
-            <a:solidFill>
-              <a:srgbClr val="0F2D5B"/>
-            </a:solidFill>
-            <a:prstDash val="solid"/>
-          </a:ln>
-        </p:spPr>
-        <p:txBody>
-          <a:bodyPr/>
-          <a:lstStyle/>
-          <a:p>
-            <a:endParaRPr lang="es-ES"/>
-          </a:p>
-        </p:txBody>
-      </p:sp>
-      <p:sp>
-        <p:nvSpPr>
-          <p:cNvPr id="15" name="Text 12"/>
-          <p:cNvSpPr/>
-          <p:nvPr/>
-        </p:nvSpPr>
-        <p:spPr>
-          <a:xfrm>
-            <a:off x="6428232" y="960120"/>
-            <a:ext cx="1234440" cy="384048"/>
-          </a:xfrm>
-          <a:prstGeom prst="rect">
-            <a:avLst/>
-          </a:prstGeom>
-          <a:noFill/>
-          <a:ln/>
-        </p:spPr>
-        <p:txBody>
-          <a:bodyPr wrap="square" rtlCol="0" anchor="ctr"/>
-          <a:lstStyle/>
-          <a:p>
-            <a:pPr marL="0" indent="0" algn="ctr">
-              <a:buNone/>
-            </a:pPr>
-            <a:r>
-              <a:rPr lang="en-US" sz="1300" b="1" dirty="0">
-                <a:solidFill>
-                  <a:srgbClr val="FFFFFF"/>
-                </a:solidFill>
-                <a:latin typeface="Calibri" pitchFamily="34" charset="0"/>
-                <a:ea typeface="Calibri" pitchFamily="34" charset="-122"/>
-                <a:cs typeface="Calibri" pitchFamily="34" charset="-120"/>
-              </a:rPr>
-              <a:t>Umbral 0.6</a:t>
-            </a:r>
-            <a:endParaRPr lang="en-US" sz="1300" dirty="0"/>
-          </a:p>
-        </p:txBody>
-      </p:sp>
-      <p:sp>
-        <p:nvSpPr>
-          <p:cNvPr id="16" name="Text 13"/>
-          <p:cNvSpPr/>
-          <p:nvPr/>
-        </p:nvSpPr>
-        <p:spPr>
-          <a:xfrm>
-            <a:off x="6428232" y="1389888"/>
-            <a:ext cx="1234440" cy="320040"/>
-          </a:xfrm>
-          <a:prstGeom prst="rect">
-            <a:avLst/>
-          </a:prstGeom>
-          <a:noFill/>
-          <a:ln/>
-        </p:spPr>
-        <p:txBody>
-          <a:bodyPr wrap="square" rtlCol="0" anchor="ctr"/>
-          <a:lstStyle/>
-          <a:p>
-            <a:pPr marL="0" indent="0" algn="ctr">
-              <a:buNone/>
-            </a:pPr>
-            <a:r>
-              <a:rPr lang="en-US" sz="1200" b="1" dirty="0">
-                <a:solidFill>
-                  <a:srgbClr val="1E293B"/>
-                </a:solidFill>
-                <a:latin typeface="Calibri" pitchFamily="34" charset="0"/>
-                <a:ea typeface="Calibri" pitchFamily="34" charset="-122"/>
-                <a:cs typeface="Calibri" pitchFamily="34" charset="-120"/>
-              </a:rPr>
-              <a:t>Equilibrio</a:t>
-            </a:r>
-            <a:endParaRPr lang="en-US" sz="1200" dirty="0"/>
-          </a:p>
-        </p:txBody>
-      </p:sp>
-      <p:sp>
-        <p:nvSpPr>
-          <p:cNvPr id="17" name="Text 14"/>
-          <p:cNvSpPr/>
-          <p:nvPr/>
-        </p:nvSpPr>
-        <p:spPr>
-          <a:xfrm>
-            <a:off x="6428232" y="1737360"/>
-            <a:ext cx="1234440" cy="256032"/>
-          </a:xfrm>
-          <a:prstGeom prst="rect">
-            <a:avLst/>
-          </a:prstGeom>
-          <a:noFill/>
-          <a:ln/>
-        </p:spPr>
-        <p:txBody>
-          <a:bodyPr wrap="square" rtlCol="0" anchor="ctr"/>
-          <a:lstStyle/>
-          <a:p>
-            <a:pPr marL="0" indent="0" algn="ctr">
-              <a:buNone/>
-            </a:pPr>
-            <a:r>
-              <a:rPr lang="en-US" sz="1100" dirty="0">
-                <a:solidFill>
-                  <a:srgbClr val="1E293B"/>
-                </a:solidFill>
-                <a:latin typeface="Calibri" pitchFamily="34" charset="0"/>
-                <a:ea typeface="Calibri" pitchFamily="34" charset="-122"/>
-                <a:cs typeface="Calibri" pitchFamily="34" charset="-120"/>
-              </a:rPr>
-              <a:t>Precision: 75%</a:t>
-            </a:r>
-            <a:endParaRPr lang="en-US" sz="1100" dirty="0"/>
-          </a:p>
-        </p:txBody>
-      </p:sp>
-      <p:sp>
-        <p:nvSpPr>
-          <p:cNvPr id="18" name="Text 15"/>
-          <p:cNvSpPr/>
-          <p:nvPr/>
-        </p:nvSpPr>
-        <p:spPr>
-          <a:xfrm>
-            <a:off x="6428232" y="1993392"/>
-            <a:ext cx="1234440" cy="256032"/>
-          </a:xfrm>
-          <a:prstGeom prst="rect">
-            <a:avLst/>
-          </a:prstGeom>
-          <a:noFill/>
-          <a:ln/>
-        </p:spPr>
-        <p:txBody>
-          <a:bodyPr wrap="square" rtlCol="0" anchor="ctr"/>
-          <a:lstStyle/>
-          <a:p>
-            <a:pPr marL="0" indent="0" algn="ctr">
-              <a:buNone/>
-            </a:pPr>
-            <a:r>
-              <a:rPr lang="en-US" sz="1100" dirty="0">
-                <a:solidFill>
-                  <a:srgbClr val="1E293B"/>
-                </a:solidFill>
-                <a:latin typeface="Calibri" pitchFamily="34" charset="0"/>
-                <a:ea typeface="Calibri" pitchFamily="34" charset="-122"/>
-                <a:cs typeface="Calibri" pitchFamily="34" charset="-120"/>
-              </a:rPr>
-              <a:t>Recall: 38%</a:t>
-            </a:r>
-            <a:endParaRPr lang="en-US" sz="1100" dirty="0"/>
-          </a:p>
-        </p:txBody>
-      </p:sp>
-      <p:sp>
-        <p:nvSpPr>
-          <p:cNvPr id="19" name="Text 16"/>
-          <p:cNvSpPr/>
-          <p:nvPr/>
-        </p:nvSpPr>
-        <p:spPr>
-          <a:xfrm>
-            <a:off x="6428232" y="2304288"/>
-            <a:ext cx="1234440" cy="256032"/>
-          </a:xfrm>
-          <a:prstGeom prst="rect">
-            <a:avLst/>
-          </a:prstGeom>
-          <a:noFill/>
-          <a:ln/>
-        </p:spPr>
-        <p:txBody>
-          <a:bodyPr wrap="square" rtlCol="0" anchor="ctr"/>
-          <a:lstStyle/>
-          <a:p>
-            <a:pPr marL="0" indent="0" algn="ctr">
-              <a:buNone/>
-            </a:pPr>
-            <a:r>
-              <a:rPr lang="en-US" sz="1100" b="1" dirty="0">
-                <a:solidFill>
-                  <a:srgbClr val="0F2D5B"/>
-                </a:solidFill>
-                <a:latin typeface="Calibri" pitchFamily="34" charset="0"/>
-                <a:ea typeface="Calibri" pitchFamily="34" charset="-122"/>
-                <a:cs typeface="Calibri" pitchFamily="34" charset="-120"/>
-              </a:rPr>
-              <a:t>217 clientes</a:t>
-            </a:r>
-            <a:endParaRPr lang="en-US" sz="1100" dirty="0"/>
-          </a:p>
-        </p:txBody>
-      </p:sp>
-      <p:sp>
-        <p:nvSpPr>
-          <p:cNvPr id="20" name="Text 17"/>
-          <p:cNvSpPr/>
-          <p:nvPr/>
-        </p:nvSpPr>
-        <p:spPr>
-          <a:xfrm>
-            <a:off x="6483096" y="2606040"/>
-            <a:ext cx="1124712" cy="1188720"/>
-          </a:xfrm>
-          <a:prstGeom prst="rect">
-            <a:avLst/>
-          </a:prstGeom>
-          <a:noFill/>
-          <a:ln/>
-        </p:spPr>
-        <p:txBody>
-          <a:bodyPr wrap="square" rtlCol="0" anchor="t"/>
-          <a:lstStyle/>
-          <a:p>
-            <a:pPr marL="0" indent="0">
-              <a:buNone/>
-            </a:pPr>
-            <a:r>
-              <a:rPr lang="en-US" sz="1000" i="1" dirty="0">
-                <a:solidFill>
-                  <a:srgbClr val="64748B"/>
-                </a:solidFill>
-                <a:latin typeface="Calibri" pitchFamily="34" charset="0"/>
-                <a:ea typeface="Calibri" pitchFamily="34" charset="-122"/>
-                <a:cs typeface="Calibri" pitchFamily="34" charset="-120"/>
-              </a:rPr>
-              <a:t>Balance óptimo entre recursos invertidos y captación. Recomendado para uso general.</a:t>
-            </a:r>
-            <a:endParaRPr lang="en-US" sz="1000" dirty="0"/>
-          </a:p>
-        </p:txBody>
-      </p:sp>
-      <p:sp>
-        <p:nvSpPr>
-          <p:cNvPr id="21" name="Shape 18"/>
-          <p:cNvSpPr/>
-          <p:nvPr/>
-        </p:nvSpPr>
-        <p:spPr>
-          <a:xfrm>
-            <a:off x="7781544" y="960120"/>
-            <a:ext cx="1234440" cy="2926080"/>
-          </a:xfrm>
-          <a:prstGeom prst="rect">
-            <a:avLst/>
-          </a:prstGeom>
-          <a:solidFill>
-            <a:srgbClr val="FFFFFF"/>
-          </a:solidFill>
-          <a:ln w="12700">
-            <a:solidFill>
-              <a:srgbClr val="E2E8F0"/>
-            </a:solidFill>
-            <a:prstDash val="solid"/>
-          </a:ln>
-          <a:effectLst>
-            <a:outerShdw blurRad="101600" dist="38100" dir="8100000" algn="bl" rotWithShape="0">
-              <a:srgbClr val="000000">
-                <a:alpha val="10000"/>
-              </a:srgbClr>
-            </a:outerShdw>
-          </a:effectLst>
-        </p:spPr>
-        <p:txBody>
-          <a:bodyPr/>
-          <a:lstStyle/>
-          <a:p>
-            <a:endParaRPr lang="es-ES"/>
-          </a:p>
-        </p:txBody>
-      </p:sp>
-      <p:sp>
-        <p:nvSpPr>
-          <p:cNvPr id="22" name="Shape 19"/>
-          <p:cNvSpPr/>
-          <p:nvPr/>
-        </p:nvSpPr>
-        <p:spPr>
-          <a:xfrm>
-            <a:off x="7781544" y="960120"/>
-            <a:ext cx="1234440" cy="384048"/>
-          </a:xfrm>
-          <a:prstGeom prst="rect">
-            <a:avLst/>
-          </a:prstGeom>
-          <a:solidFill>
-            <a:srgbClr val="F59E0B"/>
-          </a:solidFill>
-          <a:ln w="12700">
-            <a:solidFill>
-              <a:srgbClr val="F59E0B"/>
-            </a:solidFill>
-            <a:prstDash val="solid"/>
-          </a:ln>
-        </p:spPr>
-        <p:txBody>
-          <a:bodyPr/>
-          <a:lstStyle/>
-          <a:p>
-            <a:endParaRPr lang="es-ES"/>
-          </a:p>
-        </p:txBody>
-      </p:sp>
-      <p:sp>
-        <p:nvSpPr>
-          <p:cNvPr id="23" name="Text 20"/>
-          <p:cNvSpPr/>
-          <p:nvPr/>
-        </p:nvSpPr>
-        <p:spPr>
-          <a:xfrm>
-            <a:off x="7781544" y="960120"/>
-            <a:ext cx="1234440" cy="384048"/>
-          </a:xfrm>
-          <a:prstGeom prst="rect">
-            <a:avLst/>
-          </a:prstGeom>
-          <a:noFill/>
-          <a:ln/>
-        </p:spPr>
-        <p:txBody>
-          <a:bodyPr wrap="square" rtlCol="0" anchor="ctr"/>
-          <a:lstStyle/>
-          <a:p>
-            <a:pPr marL="0" indent="0" algn="ctr">
-              <a:buNone/>
-            </a:pPr>
-            <a:r>
-              <a:rPr lang="en-US" sz="1300" b="1" dirty="0">
-                <a:solidFill>
-                  <a:srgbClr val="FFFFFF"/>
-                </a:solidFill>
-                <a:latin typeface="Calibri" pitchFamily="34" charset="0"/>
-                <a:ea typeface="Calibri" pitchFamily="34" charset="-122"/>
-                <a:cs typeface="Calibri" pitchFamily="34" charset="-120"/>
-              </a:rPr>
-              <a:t>Umbral 0.7</a:t>
-            </a:r>
-            <a:endParaRPr lang="en-US" sz="1300" dirty="0"/>
-          </a:p>
-        </p:txBody>
-      </p:sp>
-      <p:sp>
-        <p:nvSpPr>
-          <p:cNvPr id="24" name="Text 21"/>
-          <p:cNvSpPr/>
-          <p:nvPr/>
-        </p:nvSpPr>
-        <p:spPr>
-          <a:xfrm>
-            <a:off x="7781544" y="1389888"/>
-            <a:ext cx="1234440" cy="320040"/>
-          </a:xfrm>
-          <a:prstGeom prst="rect">
-            <a:avLst/>
-          </a:prstGeom>
-          <a:noFill/>
-          <a:ln/>
-        </p:spPr>
-        <p:txBody>
-          <a:bodyPr wrap="square" rtlCol="0" anchor="ctr"/>
-          <a:lstStyle/>
-          <a:p>
-            <a:pPr marL="0" indent="0" algn="ctr">
-              <a:buNone/>
-            </a:pPr>
-            <a:r>
-              <a:rPr lang="en-US" sz="1200" b="1" dirty="0">
-                <a:solidFill>
-                  <a:srgbClr val="1E293B"/>
-                </a:solidFill>
-                <a:latin typeface="Calibri" pitchFamily="34" charset="0"/>
-                <a:ea typeface="Calibri" pitchFamily="34" charset="-122"/>
-                <a:cs typeface="Calibri" pitchFamily="34" charset="-120"/>
-              </a:rPr>
-              <a:t>Alta certeza</a:t>
-            </a:r>
-            <a:endParaRPr lang="en-US" sz="1200" dirty="0"/>
-          </a:p>
-        </p:txBody>
-      </p:sp>
-      <p:sp>
-        <p:nvSpPr>
-          <p:cNvPr id="25" name="Text 22"/>
-          <p:cNvSpPr/>
-          <p:nvPr/>
-        </p:nvSpPr>
-        <p:spPr>
-          <a:xfrm>
-            <a:off x="7781544" y="1737360"/>
-            <a:ext cx="1234440" cy="256032"/>
-          </a:xfrm>
-          <a:prstGeom prst="rect">
-            <a:avLst/>
-          </a:prstGeom>
-          <a:noFill/>
-          <a:ln/>
-        </p:spPr>
-        <p:txBody>
-          <a:bodyPr wrap="square" rtlCol="0" anchor="ctr"/>
-          <a:lstStyle/>
-          <a:p>
-            <a:pPr marL="0" indent="0" algn="ctr">
-              <a:buNone/>
-            </a:pPr>
-            <a:r>
-              <a:rPr lang="en-US" sz="1100" dirty="0">
-                <a:solidFill>
-                  <a:srgbClr val="1E293B"/>
-                </a:solidFill>
-                <a:latin typeface="Calibri" pitchFamily="34" charset="0"/>
-                <a:ea typeface="Calibri" pitchFamily="34" charset="-122"/>
-                <a:cs typeface="Calibri" pitchFamily="34" charset="-120"/>
-              </a:rPr>
-              <a:t>Precision: 79%</a:t>
-            </a:r>
-            <a:endParaRPr lang="en-US" sz="1100" dirty="0"/>
-          </a:p>
-        </p:txBody>
-      </p:sp>
-      <p:sp>
-        <p:nvSpPr>
-          <p:cNvPr id="26" name="Text 23"/>
-          <p:cNvSpPr/>
-          <p:nvPr/>
-        </p:nvSpPr>
-        <p:spPr>
-          <a:xfrm>
-            <a:off x="7781544" y="1993392"/>
-            <a:ext cx="1234440" cy="256032"/>
-          </a:xfrm>
-          <a:prstGeom prst="rect">
-            <a:avLst/>
-          </a:prstGeom>
-          <a:noFill/>
-          <a:ln/>
-        </p:spPr>
-        <p:txBody>
-          <a:bodyPr wrap="square" rtlCol="0" anchor="ctr"/>
-          <a:lstStyle/>
-          <a:p>
-            <a:pPr marL="0" indent="0" algn="ctr">
-              <a:buNone/>
-            </a:pPr>
-            <a:r>
-              <a:rPr lang="en-US" sz="1100" dirty="0">
-                <a:solidFill>
-                  <a:srgbClr val="1E293B"/>
-                </a:solidFill>
-                <a:latin typeface="Calibri" pitchFamily="34" charset="0"/>
-                <a:ea typeface="Calibri" pitchFamily="34" charset="-122"/>
-                <a:cs typeface="Calibri" pitchFamily="34" charset="-120"/>
-              </a:rPr>
-              <a:t>Recall: 24%</a:t>
-            </a:r>
-            <a:endParaRPr lang="en-US" sz="1100" dirty="0"/>
-          </a:p>
-        </p:txBody>
-      </p:sp>
-      <p:sp>
-        <p:nvSpPr>
-          <p:cNvPr id="27" name="Text 24"/>
-          <p:cNvSpPr/>
-          <p:nvPr/>
-        </p:nvSpPr>
-        <p:spPr>
-          <a:xfrm>
-            <a:off x="7781544" y="2304288"/>
-            <a:ext cx="1234440" cy="256032"/>
-          </a:xfrm>
-          <a:prstGeom prst="rect">
-            <a:avLst/>
-          </a:prstGeom>
-          <a:noFill/>
-          <a:ln/>
-        </p:spPr>
-        <p:txBody>
-          <a:bodyPr wrap="square" rtlCol="0" anchor="ctr"/>
-          <a:lstStyle/>
-          <a:p>
-            <a:pPr marL="0" indent="0" algn="ctr">
-              <a:buNone/>
-            </a:pPr>
-            <a:r>
-              <a:rPr lang="en-US" sz="1100" b="1" dirty="0">
-                <a:solidFill>
-                  <a:srgbClr val="F59E0B"/>
-                </a:solidFill>
-                <a:latin typeface="Calibri" pitchFamily="34" charset="0"/>
-                <a:ea typeface="Calibri" pitchFamily="34" charset="-122"/>
-                <a:cs typeface="Calibri" pitchFamily="34" charset="-120"/>
-              </a:rPr>
-              <a:t>130 clientes</a:t>
-            </a:r>
-            <a:endParaRPr lang="en-US" sz="1100" dirty="0"/>
-          </a:p>
-        </p:txBody>
-      </p:sp>
-      <p:sp>
-        <p:nvSpPr>
-          <p:cNvPr id="28" name="Text 25"/>
-          <p:cNvSpPr/>
-          <p:nvPr/>
-        </p:nvSpPr>
-        <p:spPr>
-          <a:xfrm>
-            <a:off x="7836408" y="2606040"/>
-            <a:ext cx="1124712" cy="1188720"/>
-          </a:xfrm>
-          <a:prstGeom prst="rect">
-            <a:avLst/>
-          </a:prstGeom>
-          <a:noFill/>
-          <a:ln/>
-        </p:spPr>
-        <p:txBody>
-          <a:bodyPr wrap="square" rtlCol="0" anchor="t"/>
-          <a:lstStyle/>
-          <a:p>
-            <a:pPr marL="0" indent="0">
-              <a:buNone/>
-            </a:pPr>
-            <a:r>
-              <a:rPr lang="en-US" sz="1000" i="1" dirty="0">
-                <a:solidFill>
-                  <a:srgbClr val="64748B"/>
-                </a:solidFill>
-                <a:latin typeface="Calibri" pitchFamily="34" charset="0"/>
-                <a:ea typeface="Calibri" pitchFamily="34" charset="-122"/>
-                <a:cs typeface="Calibri" pitchFamily="34" charset="-120"/>
-              </a:rPr>
-              <a:t>Muy selectivo. Ideal si el incentivo por cliente es de alto coste (descuento premium).</a:t>
-            </a:r>
-            <a:endParaRPr lang="en-US" sz="1000" dirty="0"/>
-          </a:p>
-        </p:txBody>
-      </p:sp>
-      <p:sp>
-        <p:nvSpPr>
-          <p:cNvPr id="29" name="Shape 26"/>
-          <p:cNvSpPr/>
-          <p:nvPr/>
-        </p:nvSpPr>
-        <p:spPr>
-          <a:xfrm>
-            <a:off x="320040" y="4133088"/>
-            <a:ext cx="8503920" cy="713232"/>
-          </a:xfrm>
-          <a:prstGeom prst="rect">
-            <a:avLst/>
-          </a:prstGeom>
-          <a:solidFill>
-            <a:srgbClr val="0F2D5B">
-              <a:alpha val="95000"/>
-            </a:srgbClr>
-          </a:solidFill>
-          <a:ln w="12700">
-            <a:solidFill>
-              <a:srgbClr val="0F2D5B"/>
-            </a:solidFill>
-            <a:prstDash val="solid"/>
-          </a:ln>
-        </p:spPr>
-        <p:txBody>
-          <a:bodyPr/>
-          <a:lstStyle/>
-          <a:p>
-            <a:endParaRPr lang="es-ES"/>
-          </a:p>
-        </p:txBody>
-      </p:sp>
-      <p:sp>
-        <p:nvSpPr>
-          <p:cNvPr id="30" name="Text 27"/>
-          <p:cNvSpPr/>
-          <p:nvPr/>
-        </p:nvSpPr>
-        <p:spPr>
-          <a:xfrm>
-            <a:off x="457200" y="4151376"/>
-            <a:ext cx="8229600" cy="640080"/>
-          </a:xfrm>
-          <a:prstGeom prst="rect">
-            <a:avLst/>
-          </a:prstGeom>
-          <a:noFill/>
-          <a:ln/>
-        </p:spPr>
-        <p:txBody>
-          <a:bodyPr wrap="square" rtlCol="0" anchor="ctr"/>
-          <a:lstStyle/>
-          <a:p>
-            <a:pPr marL="0" indent="0">
-              <a:buNone/>
-            </a:pPr>
-            <a:r>
-              <a:rPr lang="en-US" sz="1200" i="1" dirty="0">
-                <a:solidFill>
-                  <a:srgbClr val="FFFFFF"/>
-                </a:solidFill>
-                <a:latin typeface="Calibri" pitchFamily="34" charset="0"/>
-                <a:ea typeface="Calibri" pitchFamily="34" charset="-122"/>
-                <a:cs typeface="Calibri" pitchFamily="34" charset="-120"/>
-              </a:rPr>
-              <a:t>📌  Recomendación: comenzar con umbral 0.6 y ajustar según el coste real de cada error de negocio. Si el incentivo es económicamente costoso, subir a 0.7.</a:t>
-            </a:r>
-            <a:endParaRPr lang="en-US" sz="1200" dirty="0"/>
-          </a:p>
-        </p:txBody>
-      </p:sp>
-    </p:spTree>
-  </p:cSld>
-  <p:clrMapOvr>
-    <a:masterClrMapping/>
-  </p:clrMapOvr>
-</p:sld>
-</file>
-
-<file path=ppt/slides/slide9.xml><?xml version="1.0" encoding="utf-8"?>
+<file path=ppt/slides/slide7.xml><?xml version="1.0" encoding="utf-8"?>
 <p:sld xmlns:a="http://schemas.openxmlformats.org/drawingml/2006/main" xmlns:r="http://schemas.openxmlformats.org/officeDocument/2006/relationships" xmlns:p="http://schemas.openxmlformats.org/presentationml/2006/main">
   <p:cSld name="Slide 10">
     <p:bg>
@@ -12625,7 +9357,51 @@
                 <a:ea typeface="Calibri" pitchFamily="34" charset="-122"/>
                 <a:cs typeface="Calibri" pitchFamily="34" charset="-120"/>
               </a:rPr>
-              <a:t>→ P(recompra) por cliente</a:t>
+              <a:t>→ P = </a:t>
+            </a:r>
+            <a:r>
+              <a:rPr lang="en-US" sz="1100" b="1" dirty="0" err="1">
+                <a:solidFill>
+                  <a:srgbClr val="FFFFFF"/>
+                </a:solidFill>
+                <a:latin typeface="Calibri" pitchFamily="34" charset="0"/>
+                <a:ea typeface="Calibri" pitchFamily="34" charset="-122"/>
+                <a:cs typeface="Calibri" pitchFamily="34" charset="-120"/>
+              </a:rPr>
+              <a:t>Probabilidad</a:t>
+            </a:r>
+            <a:r>
+              <a:rPr lang="en-US" sz="1100" b="1" dirty="0">
+                <a:solidFill>
+                  <a:srgbClr val="FFFFFF"/>
+                </a:solidFill>
+                <a:latin typeface="Calibri" pitchFamily="34" charset="0"/>
+                <a:ea typeface="Calibri" pitchFamily="34" charset="-122"/>
+                <a:cs typeface="Calibri" pitchFamily="34" charset="-120"/>
+              </a:rPr>
+              <a:t> de </a:t>
+            </a:r>
+            <a:r>
+              <a:rPr lang="en-US" sz="1100" b="1" dirty="0" err="1">
+                <a:solidFill>
+                  <a:srgbClr val="FFFFFF"/>
+                </a:solidFill>
+                <a:latin typeface="Calibri" pitchFamily="34" charset="0"/>
+                <a:ea typeface="Calibri" pitchFamily="34" charset="-122"/>
+                <a:cs typeface="Calibri" pitchFamily="34" charset="-120"/>
+              </a:rPr>
+              <a:t>recompra</a:t>
+            </a:r>
+            <a:r>
+              <a:rPr lang="en-US" sz="1100" b="1" dirty="0">
+                <a:solidFill>
+                  <a:srgbClr val="FFFFFF"/>
+                </a:solidFill>
+                <a:latin typeface="Calibri" pitchFamily="34" charset="0"/>
+                <a:ea typeface="Calibri" pitchFamily="34" charset="-122"/>
+                <a:cs typeface="Calibri" pitchFamily="34" charset="-120"/>
+              </a:rPr>
+              <a:t> por cliente</a:t>
             </a:r>
             <a:endParaRPr lang="en-US" sz="1100" dirty="0"/>
           </a:p>
@@ -13306,9 +10082,71 @@
                 <a:ea typeface="Calibri" pitchFamily="34" charset="-122"/>
                 <a:cs typeface="Calibri" pitchFamily="34" charset="-120"/>
               </a:rPr>
-              <a:t>Recomendaciones basadas en n_productos</a:t>
-            </a:r>
-            <a:endParaRPr lang="en-US" sz="1100" dirty="0"/>
+              <a:t>Recomendaciones basadas </a:t>
+            </a:r>
+            <a:r>
+              <a:rPr lang="en-US" sz="1100" dirty="0" err="1">
+                <a:solidFill>
+                  <a:srgbClr val="1E293B"/>
+                </a:solidFill>
+                <a:latin typeface="Calibri" pitchFamily="34" charset="0"/>
+                <a:ea typeface="Calibri" pitchFamily="34" charset="-122"/>
+                <a:cs typeface="Calibri" pitchFamily="34" charset="-120"/>
+              </a:rPr>
+              <a:t>en</a:t>
+            </a:r>
+            <a:r>
+              <a:rPr lang="en-US" sz="1100" dirty="0">
+                <a:solidFill>
+                  <a:srgbClr val="1E293B"/>
+                </a:solidFill>
+                <a:latin typeface="Calibri" pitchFamily="34" charset="0"/>
+                <a:ea typeface="Calibri" pitchFamily="34" charset="-122"/>
+                <a:cs typeface="Calibri" pitchFamily="34" charset="-120"/>
+              </a:rPr>
+              <a:t> </a:t>
+            </a:r>
+            <a:r>
+              <a:rPr lang="en-US" sz="1100" dirty="0" err="1">
+                <a:solidFill>
+                  <a:srgbClr val="1E293B"/>
+                </a:solidFill>
+                <a:latin typeface="Calibri" pitchFamily="34" charset="0"/>
+                <a:ea typeface="Calibri" pitchFamily="34" charset="-122"/>
+                <a:cs typeface="Calibri" pitchFamily="34" charset="-120"/>
+              </a:rPr>
+              <a:t>productos</a:t>
+            </a:r>
+            <a:r>
+              <a:rPr lang="en-US" sz="1100" dirty="0">
+                <a:solidFill>
+                  <a:srgbClr val="1E293B"/>
+                </a:solidFill>
+                <a:latin typeface="Calibri" pitchFamily="34" charset="0"/>
+                <a:ea typeface="Calibri" pitchFamily="34" charset="-122"/>
+                <a:cs typeface="Calibri" pitchFamily="34" charset="-120"/>
+              </a:rPr>
+              <a:t> </a:t>
+            </a:r>
+            <a:r>
+              <a:rPr lang="en-US" sz="1100" dirty="0" err="1">
+                <a:solidFill>
+                  <a:srgbClr val="1E293B"/>
+                </a:solidFill>
+                <a:latin typeface="Calibri" pitchFamily="34" charset="0"/>
+                <a:ea typeface="Calibri" pitchFamily="34" charset="-122"/>
+                <a:cs typeface="Calibri" pitchFamily="34" charset="-120"/>
+              </a:rPr>
+              <a:t>únicos</a:t>
+            </a:r>
+            <a:endParaRPr lang="en-US" sz="1100" dirty="0">
+              <a:solidFill>
+                <a:srgbClr val="1E293B"/>
+              </a:solidFill>
+              <a:latin typeface="Calibri" pitchFamily="34" charset="0"/>
+              <a:ea typeface="Calibri" pitchFamily="34" charset="-122"/>
+              <a:cs typeface="Calibri" pitchFamily="34" charset="-120"/>
+            </a:endParaRPr>
           </a:p>
           <a:p>
             <a:pPr marL="0" indent="0">
@@ -13746,7 +10584,18 @@
                 <a:ea typeface="Calibri" pitchFamily="34" charset="-122"/>
                 <a:cs typeface="Calibri" pitchFamily="34" charset="-120"/>
               </a:rPr>
-              <a:t>Descuento de recuperación (win-back)</a:t>
+              <a:t>Descuento de </a:t>
+            </a:r>
+            <a:r>
+              <a:rPr lang="en-US" sz="1100" dirty="0" err="1">
+                <a:solidFill>
+                  <a:srgbClr val="1E293B"/>
+                </a:solidFill>
+                <a:latin typeface="Calibri" pitchFamily="34" charset="0"/>
+                <a:ea typeface="Calibri" pitchFamily="34" charset="-122"/>
+                <a:cs typeface="Calibri" pitchFamily="34" charset="-120"/>
+              </a:rPr>
+              <a:t>recuperación</a:t>
             </a:r>
             <a:endParaRPr lang="en-US" sz="1100" dirty="0"/>
           </a:p>
@@ -13855,6 +10704,1143 @@
               <a:t>Objetivo: recuperar clientes en riesgo de abandono</a:t>
             </a:r>
             <a:endParaRPr lang="en-US" sz="1000" dirty="0"/>
+          </a:p>
+        </p:txBody>
+      </p:sp>
+    </p:spTree>
+  </p:cSld>
+  <p:clrMapOvr>
+    <a:masterClrMapping/>
+  </p:clrMapOvr>
+</p:sld>
+</file>
+
+<file path=ppt/slides/slide8.xml><?xml version="1.0" encoding="utf-8"?>
+<p:sld xmlns:a="http://schemas.openxmlformats.org/drawingml/2006/main" xmlns:r="http://schemas.openxmlformats.org/officeDocument/2006/relationships" xmlns:p="http://schemas.openxmlformats.org/presentationml/2006/main">
+  <p:cSld name="Slide 11">
+    <p:bg>
+      <p:bgPr>
+        <a:solidFill>
+          <a:srgbClr val="0F2D5B"/>
+        </a:solidFill>
+        <a:effectLst/>
+      </p:bgPr>
+    </p:bg>
+    <p:spTree>
+      <p:nvGrpSpPr>
+        <p:cNvPr id="1" name=""/>
+        <p:cNvGrpSpPr/>
+        <p:nvPr/>
+      </p:nvGrpSpPr>
+      <p:grpSpPr>
+        <a:xfrm>
+          <a:off x="0" y="0"/>
+          <a:ext cx="0" cy="0"/>
+          <a:chOff x="0" y="0"/>
+          <a:chExt cx="0" cy="0"/>
+        </a:xfrm>
+      </p:grpSpPr>
+      <p:sp>
+        <p:nvSpPr>
+          <p:cNvPr id="2" name="Shape 0"/>
+          <p:cNvSpPr/>
+          <p:nvPr/>
+        </p:nvSpPr>
+        <p:spPr>
+          <a:xfrm>
+            <a:off x="0" y="0"/>
+            <a:ext cx="4754880" cy="5143500"/>
+          </a:xfrm>
+          <a:prstGeom prst="rect">
+            <a:avLst/>
+          </a:prstGeom>
+          <a:solidFill>
+            <a:srgbClr val="0B6E6E"/>
+          </a:solidFill>
+          <a:ln w="12700">
+            <a:solidFill>
+              <a:srgbClr val="0B6E6E"/>
+            </a:solidFill>
+            <a:prstDash val="solid"/>
+          </a:ln>
+        </p:spPr>
+        <p:txBody>
+          <a:bodyPr/>
+          <a:lstStyle/>
+          <a:p>
+            <a:endParaRPr lang="es-ES"/>
+          </a:p>
+        </p:txBody>
+      </p:sp>
+      <p:sp>
+        <p:nvSpPr>
+          <p:cNvPr id="3" name="Text 1"/>
+          <p:cNvSpPr/>
+          <p:nvPr/>
+        </p:nvSpPr>
+        <p:spPr>
+          <a:xfrm>
+            <a:off x="320040" y="274320"/>
+            <a:ext cx="4297680" cy="548640"/>
+          </a:xfrm>
+          <a:prstGeom prst="rect">
+            <a:avLst/>
+          </a:prstGeom>
+          <a:noFill/>
+          <a:ln/>
+        </p:spPr>
+        <p:txBody>
+          <a:bodyPr wrap="square" rtlCol="0" anchor="ctr"/>
+          <a:lstStyle/>
+          <a:p>
+            <a:pPr marL="0" indent="0">
+              <a:buNone/>
+            </a:pPr>
+            <a:r>
+              <a:rPr lang="en-US" sz="2400" b="1" dirty="0">
+                <a:solidFill>
+                  <a:srgbClr val="FFFFFF"/>
+                </a:solidFill>
+                <a:latin typeface="Calibri" pitchFamily="34" charset="0"/>
+                <a:ea typeface="Calibri" pitchFamily="34" charset="-122"/>
+                <a:cs typeface="Calibri" pitchFamily="34" charset="-120"/>
+              </a:rPr>
+              <a:t>Conclusiones</a:t>
+            </a:r>
+            <a:endParaRPr lang="en-US" sz="2400" dirty="0"/>
+          </a:p>
+        </p:txBody>
+      </p:sp>
+      <p:sp>
+        <p:nvSpPr>
+          <p:cNvPr id="4" name="Text 2"/>
+          <p:cNvSpPr/>
+          <p:nvPr/>
+        </p:nvSpPr>
+        <p:spPr>
+          <a:xfrm>
+            <a:off x="320040" y="1005840"/>
+            <a:ext cx="4206240" cy="292608"/>
+          </a:xfrm>
+          <a:prstGeom prst="rect">
+            <a:avLst/>
+          </a:prstGeom>
+          <a:noFill/>
+          <a:ln/>
+        </p:spPr>
+        <p:txBody>
+          <a:bodyPr wrap="square" rtlCol="0" anchor="ctr"/>
+          <a:lstStyle/>
+          <a:p>
+            <a:pPr marL="0" indent="0">
+              <a:buNone/>
+            </a:pPr>
+            <a:r>
+              <a:rPr lang="en-US" sz="1300" b="1" dirty="0">
+                <a:solidFill>
+                  <a:srgbClr val="FFFFFF"/>
+                </a:solidFill>
+                <a:latin typeface="Calibri" pitchFamily="34" charset="0"/>
+                <a:ea typeface="Calibri" pitchFamily="34" charset="-122"/>
+                <a:cs typeface="Calibri" pitchFamily="34" charset="-120"/>
+              </a:rPr>
+              <a:t>1. XGBoost es el modelo ganador</a:t>
+            </a:r>
+            <a:endParaRPr lang="en-US" sz="1300" dirty="0"/>
+          </a:p>
+        </p:txBody>
+      </p:sp>
+      <p:sp>
+        <p:nvSpPr>
+          <p:cNvPr id="5" name="Text 3"/>
+          <p:cNvSpPr/>
+          <p:nvPr/>
+        </p:nvSpPr>
+        <p:spPr>
+          <a:xfrm>
+            <a:off x="457200" y="1298448"/>
+            <a:ext cx="4023360" cy="438912"/>
+          </a:xfrm>
+          <a:prstGeom prst="rect">
+            <a:avLst/>
+          </a:prstGeom>
+          <a:noFill/>
+          <a:ln/>
+        </p:spPr>
+        <p:txBody>
+          <a:bodyPr wrap="square" rtlCol="0" anchor="ctr"/>
+          <a:lstStyle/>
+          <a:p>
+            <a:pPr marL="0" indent="0">
+              <a:buNone/>
+            </a:pPr>
+            <a:r>
+              <a:rPr lang="en-US" sz="1100" i="1" dirty="0">
+                <a:solidFill>
+                  <a:schemeClr val="bg1"/>
+                </a:solidFill>
+                <a:latin typeface="Calibri" pitchFamily="34" charset="0"/>
+                <a:ea typeface="Calibri" pitchFamily="34" charset="-122"/>
+                <a:cs typeface="Calibri" pitchFamily="34" charset="-120"/>
+              </a:rPr>
+              <a:t>AUC de 0.79 en test, con diferencia mínima respecto al CV (0.001). Sin overfitting.</a:t>
+            </a:r>
+            <a:endParaRPr lang="en-US" sz="1100" dirty="0">
+              <a:solidFill>
+                <a:schemeClr val="bg1"/>
+              </a:solidFill>
+            </a:endParaRPr>
+          </a:p>
+        </p:txBody>
+      </p:sp>
+      <p:sp>
+        <p:nvSpPr>
+          <p:cNvPr id="6" name="Text 4"/>
+          <p:cNvSpPr/>
+          <p:nvPr/>
+        </p:nvSpPr>
+        <p:spPr>
+          <a:xfrm>
+            <a:off x="320040" y="1920240"/>
+            <a:ext cx="4206240" cy="292608"/>
+          </a:xfrm>
+          <a:prstGeom prst="rect">
+            <a:avLst/>
+          </a:prstGeom>
+          <a:noFill/>
+          <a:ln/>
+        </p:spPr>
+        <p:txBody>
+          <a:bodyPr wrap="square" rtlCol="0" anchor="ctr"/>
+          <a:lstStyle/>
+          <a:p>
+            <a:pPr marL="0" indent="0">
+              <a:buNone/>
+            </a:pPr>
+            <a:r>
+              <a:rPr lang="en-US" sz="1300" b="1" dirty="0">
+                <a:solidFill>
+                  <a:srgbClr val="FFFFFF"/>
+                </a:solidFill>
+                <a:latin typeface="Calibri" pitchFamily="34" charset="0"/>
+                <a:ea typeface="Calibri" pitchFamily="34" charset="-122"/>
+                <a:cs typeface="Calibri" pitchFamily="34" charset="-120"/>
+              </a:rPr>
+              <a:t>2. Recencia y frecuencia, clave</a:t>
+            </a:r>
+            <a:endParaRPr lang="en-US" sz="1300" dirty="0"/>
+          </a:p>
+        </p:txBody>
+      </p:sp>
+      <p:sp>
+        <p:nvSpPr>
+          <p:cNvPr id="7" name="Text 5"/>
+          <p:cNvSpPr/>
+          <p:nvPr/>
+        </p:nvSpPr>
+        <p:spPr>
+          <a:xfrm>
+            <a:off x="457200" y="2212848"/>
+            <a:ext cx="4023360" cy="438912"/>
+          </a:xfrm>
+          <a:prstGeom prst="rect">
+            <a:avLst/>
+          </a:prstGeom>
+          <a:noFill/>
+          <a:ln/>
+        </p:spPr>
+        <p:txBody>
+          <a:bodyPr wrap="square" rtlCol="0" anchor="ctr"/>
+          <a:lstStyle/>
+          <a:p>
+            <a:pPr marL="0" indent="0">
+              <a:buNone/>
+            </a:pPr>
+            <a:r>
+              <a:rPr lang="en-US" sz="1100" i="1" dirty="0">
+                <a:solidFill>
+                  <a:schemeClr val="bg1"/>
+                </a:solidFill>
+                <a:latin typeface="Calibri" pitchFamily="34" charset="0"/>
+                <a:ea typeface="Calibri" pitchFamily="34" charset="-122"/>
+                <a:cs typeface="Calibri" pitchFamily="34" charset="-120"/>
+              </a:rPr>
+              <a:t>Son las dos variables más predictoras. Un cliente que compró recientemente y con frecuencia tiene un 70% + de probabilidad de recompra.</a:t>
+            </a:r>
+            <a:endParaRPr lang="en-US" sz="1100" dirty="0">
+              <a:solidFill>
+                <a:schemeClr val="bg1"/>
+              </a:solidFill>
+            </a:endParaRPr>
+          </a:p>
+        </p:txBody>
+      </p:sp>
+      <p:sp>
+        <p:nvSpPr>
+          <p:cNvPr id="8" name="Text 6"/>
+          <p:cNvSpPr/>
+          <p:nvPr/>
+        </p:nvSpPr>
+        <p:spPr>
+          <a:xfrm>
+            <a:off x="320040" y="2834640"/>
+            <a:ext cx="4206240" cy="292608"/>
+          </a:xfrm>
+          <a:prstGeom prst="rect">
+            <a:avLst/>
+          </a:prstGeom>
+          <a:noFill/>
+          <a:ln/>
+        </p:spPr>
+        <p:txBody>
+          <a:bodyPr wrap="square" rtlCol="0" anchor="ctr"/>
+          <a:lstStyle/>
+          <a:p>
+            <a:pPr marL="0" indent="0">
+              <a:buNone/>
+            </a:pPr>
+            <a:r>
+              <a:rPr lang="en-US" sz="1300" b="1" dirty="0">
+                <a:solidFill>
+                  <a:srgbClr val="FFFFFF"/>
+                </a:solidFill>
+                <a:latin typeface="Calibri" pitchFamily="34" charset="0"/>
+                <a:ea typeface="Calibri" pitchFamily="34" charset="-122"/>
+                <a:cs typeface="Calibri" pitchFamily="34" charset="-120"/>
+              </a:rPr>
+              <a:t>3. Umbral ajustable al negocio</a:t>
+            </a:r>
+            <a:endParaRPr lang="en-US" sz="1300" dirty="0"/>
+          </a:p>
+        </p:txBody>
+      </p:sp>
+      <p:sp>
+        <p:nvSpPr>
+          <p:cNvPr id="9" name="Text 7"/>
+          <p:cNvSpPr/>
+          <p:nvPr/>
+        </p:nvSpPr>
+        <p:spPr>
+          <a:xfrm>
+            <a:off x="457200" y="3127248"/>
+            <a:ext cx="4023360" cy="438912"/>
+          </a:xfrm>
+          <a:prstGeom prst="rect">
+            <a:avLst/>
+          </a:prstGeom>
+          <a:noFill/>
+          <a:ln/>
+        </p:spPr>
+        <p:txBody>
+          <a:bodyPr wrap="square" rtlCol="0" anchor="ctr"/>
+          <a:lstStyle/>
+          <a:p>
+            <a:pPr marL="0" indent="0">
+              <a:buNone/>
+            </a:pPr>
+            <a:r>
+              <a:rPr lang="en-US" sz="1100" i="1" dirty="0">
+                <a:solidFill>
+                  <a:schemeClr val="bg1"/>
+                </a:solidFill>
+                <a:latin typeface="Calibri" pitchFamily="34" charset="0"/>
+                <a:ea typeface="Calibri" pitchFamily="34" charset="-122"/>
+                <a:cs typeface="Calibri" pitchFamily="34" charset="-120"/>
+              </a:rPr>
+              <a:t>El umbral por defecto (0.5) puede ajustarse a 0.6 o 0.7 para priorizar precisión sobre cobertura según el coste del incentivo.</a:t>
+            </a:r>
+            <a:endParaRPr lang="en-US" sz="1100" dirty="0">
+              <a:solidFill>
+                <a:schemeClr val="bg1"/>
+              </a:solidFill>
+            </a:endParaRPr>
+          </a:p>
+        </p:txBody>
+      </p:sp>
+      <p:sp>
+        <p:nvSpPr>
+          <p:cNvPr id="10" name="Text 8"/>
+          <p:cNvSpPr/>
+          <p:nvPr/>
+        </p:nvSpPr>
+        <p:spPr>
+          <a:xfrm>
+            <a:off x="320040" y="3749040"/>
+            <a:ext cx="4206240" cy="292608"/>
+          </a:xfrm>
+          <a:prstGeom prst="rect">
+            <a:avLst/>
+          </a:prstGeom>
+          <a:noFill/>
+          <a:ln/>
+        </p:spPr>
+        <p:txBody>
+          <a:bodyPr wrap="square" rtlCol="0" anchor="ctr"/>
+          <a:lstStyle/>
+          <a:p>
+            <a:pPr marL="0" indent="0">
+              <a:buNone/>
+            </a:pPr>
+            <a:r>
+              <a:rPr lang="en-US" sz="1300" b="1" dirty="0">
+                <a:solidFill>
+                  <a:srgbClr val="FFFFFF"/>
+                </a:solidFill>
+                <a:latin typeface="Calibri" pitchFamily="34" charset="0"/>
+                <a:ea typeface="Calibri" pitchFamily="34" charset="-122"/>
+                <a:cs typeface="Calibri" pitchFamily="34" charset="-120"/>
+              </a:rPr>
+              <a:t>4. Dataset limpio y sin leakage</a:t>
+            </a:r>
+            <a:endParaRPr lang="en-US" sz="1300" dirty="0"/>
+          </a:p>
+        </p:txBody>
+      </p:sp>
+      <p:sp>
+        <p:nvSpPr>
+          <p:cNvPr id="11" name="Text 9"/>
+          <p:cNvSpPr/>
+          <p:nvPr/>
+        </p:nvSpPr>
+        <p:spPr>
+          <a:xfrm>
+            <a:off x="457200" y="4041648"/>
+            <a:ext cx="4023360" cy="438912"/>
+          </a:xfrm>
+          <a:prstGeom prst="rect">
+            <a:avLst/>
+          </a:prstGeom>
+          <a:noFill/>
+          <a:ln/>
+        </p:spPr>
+        <p:txBody>
+          <a:bodyPr wrap="square" rtlCol="0" anchor="ctr"/>
+          <a:lstStyle/>
+          <a:p>
+            <a:pPr marL="0" indent="0">
+              <a:buNone/>
+            </a:pPr>
+            <a:r>
+              <a:rPr lang="en-US" sz="1100" i="1" dirty="0">
+                <a:solidFill>
+                  <a:schemeClr val="bg1"/>
+                </a:solidFill>
+                <a:latin typeface="Calibri" pitchFamily="34" charset="0"/>
+                <a:ea typeface="Calibri" pitchFamily="34" charset="-122"/>
+                <a:cs typeface="Calibri" pitchFamily="34" charset="-120"/>
+              </a:rPr>
+              <a:t>Separación temporal estricta entre features y etiqueta garantiza evaluación honesta del modelo.</a:t>
+            </a:r>
+            <a:endParaRPr lang="en-US" sz="1100" dirty="0">
+              <a:solidFill>
+                <a:schemeClr val="bg1"/>
+              </a:solidFill>
+            </a:endParaRPr>
+          </a:p>
+        </p:txBody>
+      </p:sp>
+      <p:sp>
+        <p:nvSpPr>
+          <p:cNvPr id="12" name="Text 10"/>
+          <p:cNvSpPr/>
+          <p:nvPr/>
+        </p:nvSpPr>
+        <p:spPr>
+          <a:xfrm>
+            <a:off x="5074920" y="274320"/>
+            <a:ext cx="3749040" cy="548640"/>
+          </a:xfrm>
+          <a:prstGeom prst="rect">
+            <a:avLst/>
+          </a:prstGeom>
+          <a:noFill/>
+          <a:ln/>
+        </p:spPr>
+        <p:txBody>
+          <a:bodyPr wrap="square" rtlCol="0" anchor="ctr"/>
+          <a:lstStyle/>
+          <a:p>
+            <a:pPr marL="0" indent="0">
+              <a:buNone/>
+            </a:pPr>
+            <a:r>
+              <a:rPr lang="en-US" sz="2400" b="1" dirty="0">
+                <a:solidFill>
+                  <a:srgbClr val="FFFFFF"/>
+                </a:solidFill>
+                <a:latin typeface="Calibri" pitchFamily="34" charset="0"/>
+                <a:ea typeface="Calibri" pitchFamily="34" charset="-122"/>
+                <a:cs typeface="Calibri" pitchFamily="34" charset="-120"/>
+              </a:rPr>
+              <a:t>Próximos Pasos</a:t>
+            </a:r>
+            <a:endParaRPr lang="en-US" sz="2400" dirty="0"/>
+          </a:p>
+        </p:txBody>
+      </p:sp>
+      <p:sp>
+        <p:nvSpPr>
+          <p:cNvPr id="13" name="Shape 11"/>
+          <p:cNvSpPr/>
+          <p:nvPr/>
+        </p:nvSpPr>
+        <p:spPr>
+          <a:xfrm>
+            <a:off x="4983480" y="1005840"/>
+            <a:ext cx="3840480" cy="868680"/>
+          </a:xfrm>
+          <a:prstGeom prst="rect">
+            <a:avLst/>
+          </a:prstGeom>
+          <a:solidFill>
+            <a:srgbClr val="FFFFFF">
+              <a:alpha val="90000"/>
+            </a:srgbClr>
+          </a:solidFill>
+          <a:ln w="12700">
+            <a:solidFill>
+              <a:srgbClr val="FFFFFF">
+                <a:alpha val="40000"/>
+              </a:srgbClr>
+            </a:solidFill>
+            <a:prstDash val="solid"/>
+          </a:ln>
+        </p:spPr>
+        <p:txBody>
+          <a:bodyPr/>
+          <a:lstStyle/>
+          <a:p>
+            <a:endParaRPr lang="es-ES"/>
+          </a:p>
+        </p:txBody>
+      </p:sp>
+      <p:sp>
+        <p:nvSpPr>
+          <p:cNvPr id="14" name="Text 12"/>
+          <p:cNvSpPr/>
+          <p:nvPr/>
+        </p:nvSpPr>
+        <p:spPr>
+          <a:xfrm>
+            <a:off x="5120640" y="1024128"/>
+            <a:ext cx="3566160" cy="292608"/>
+          </a:xfrm>
+          <a:prstGeom prst="rect">
+            <a:avLst/>
+          </a:prstGeom>
+          <a:noFill/>
+          <a:ln/>
+        </p:spPr>
+        <p:txBody>
+          <a:bodyPr wrap="square" rtlCol="0" anchor="ctr"/>
+          <a:lstStyle/>
+          <a:p>
+            <a:pPr marL="0" indent="0">
+              <a:buNone/>
+            </a:pPr>
+            <a:r>
+              <a:rPr lang="en-US" sz="1200" b="1" dirty="0">
+                <a:solidFill>
+                  <a:srgbClr val="FFFFFF"/>
+                </a:solidFill>
+                <a:latin typeface="Calibri" pitchFamily="34" charset="0"/>
+                <a:ea typeface="Calibri" pitchFamily="34" charset="-122"/>
+                <a:cs typeface="Calibri" pitchFamily="34" charset="-120"/>
+              </a:rPr>
+              <a:t>📐 </a:t>
+            </a:r>
+            <a:r>
+              <a:rPr lang="en-US" sz="1200" b="1" dirty="0">
+                <a:latin typeface="Calibri" pitchFamily="34" charset="0"/>
+                <a:ea typeface="Calibri" pitchFamily="34" charset="-122"/>
+                <a:cs typeface="Calibri" pitchFamily="34" charset="-120"/>
+              </a:rPr>
+              <a:t>Ajuste fino del umbral</a:t>
+            </a:r>
+            <a:endParaRPr lang="en-US" sz="1200" dirty="0"/>
+          </a:p>
+        </p:txBody>
+      </p:sp>
+      <p:sp>
+        <p:nvSpPr>
+          <p:cNvPr id="15" name="Text 13"/>
+          <p:cNvSpPr/>
+          <p:nvPr/>
+        </p:nvSpPr>
+        <p:spPr>
+          <a:xfrm>
+            <a:off x="5120640" y="1316736"/>
+            <a:ext cx="3566160" cy="457200"/>
+          </a:xfrm>
+          <a:prstGeom prst="rect">
+            <a:avLst/>
+          </a:prstGeom>
+          <a:noFill/>
+          <a:ln/>
+        </p:spPr>
+        <p:txBody>
+          <a:bodyPr wrap="square" rtlCol="0" anchor="ctr"/>
+          <a:lstStyle/>
+          <a:p>
+            <a:pPr marL="0" indent="0">
+              <a:buNone/>
+            </a:pPr>
+            <a:r>
+              <a:rPr lang="en-US" sz="1100" i="1" dirty="0">
+                <a:solidFill>
+                  <a:srgbClr val="14B8A6"/>
+                </a:solidFill>
+                <a:latin typeface="Calibri" pitchFamily="34" charset="0"/>
+                <a:ea typeface="Calibri" pitchFamily="34" charset="-122"/>
+                <a:cs typeface="Calibri" pitchFamily="34" charset="-120"/>
+              </a:rPr>
+              <a:t>Cuantificar coste real de FP (campaña desperdiciada) vs FN (cliente perdido) para elegir el umbral óptimo de negocio.</a:t>
+            </a:r>
+            <a:endParaRPr lang="en-US" sz="1100" dirty="0"/>
+          </a:p>
+        </p:txBody>
+      </p:sp>
+      <p:sp>
+        <p:nvSpPr>
+          <p:cNvPr id="16" name="Shape 14"/>
+          <p:cNvSpPr/>
+          <p:nvPr/>
+        </p:nvSpPr>
+        <p:spPr>
+          <a:xfrm>
+            <a:off x="4983480" y="1965960"/>
+            <a:ext cx="3840480" cy="868680"/>
+          </a:xfrm>
+          <a:prstGeom prst="rect">
+            <a:avLst/>
+          </a:prstGeom>
+          <a:solidFill>
+            <a:srgbClr val="FFFFFF">
+              <a:alpha val="90000"/>
+            </a:srgbClr>
+          </a:solidFill>
+          <a:ln w="12700">
+            <a:solidFill>
+              <a:srgbClr val="FFFFFF">
+                <a:alpha val="40000"/>
+              </a:srgbClr>
+            </a:solidFill>
+            <a:prstDash val="solid"/>
+          </a:ln>
+        </p:spPr>
+        <p:txBody>
+          <a:bodyPr/>
+          <a:lstStyle/>
+          <a:p>
+            <a:endParaRPr lang="es-ES"/>
+          </a:p>
+        </p:txBody>
+      </p:sp>
+      <p:sp>
+        <p:nvSpPr>
+          <p:cNvPr id="17" name="Text 15"/>
+          <p:cNvSpPr/>
+          <p:nvPr/>
+        </p:nvSpPr>
+        <p:spPr>
+          <a:xfrm>
+            <a:off x="5120640" y="1984248"/>
+            <a:ext cx="3566160" cy="292608"/>
+          </a:xfrm>
+          <a:prstGeom prst="rect">
+            <a:avLst/>
+          </a:prstGeom>
+          <a:noFill/>
+          <a:ln/>
+        </p:spPr>
+        <p:txBody>
+          <a:bodyPr wrap="square" rtlCol="0" anchor="ctr"/>
+          <a:lstStyle/>
+          <a:p>
+            <a:pPr marL="0" indent="0">
+              <a:buNone/>
+            </a:pPr>
+            <a:r>
+              <a:rPr lang="en-US" sz="1200" b="1" dirty="0">
+                <a:solidFill>
+                  <a:srgbClr val="FFFFFF"/>
+                </a:solidFill>
+                <a:latin typeface="Calibri" pitchFamily="34" charset="0"/>
+                <a:ea typeface="Calibri" pitchFamily="34" charset="-122"/>
+                <a:cs typeface="Calibri" pitchFamily="34" charset="-120"/>
+              </a:rPr>
+              <a:t>🔧 </a:t>
+            </a:r>
+            <a:r>
+              <a:rPr lang="en-US" sz="1200" b="1" dirty="0" err="1">
+                <a:latin typeface="Calibri" pitchFamily="34" charset="0"/>
+                <a:ea typeface="Calibri" pitchFamily="34" charset="-122"/>
+                <a:cs typeface="Calibri" pitchFamily="34" charset="-120"/>
+              </a:rPr>
+              <a:t>Añadir</a:t>
+            </a:r>
+            <a:r>
+              <a:rPr lang="en-US" sz="1200" b="1" dirty="0">
+                <a:latin typeface="Calibri" pitchFamily="34" charset="0"/>
+                <a:ea typeface="Calibri" pitchFamily="34" charset="-122"/>
+                <a:cs typeface="Calibri" pitchFamily="34" charset="-120"/>
+              </a:rPr>
+              <a:t> features adicionales</a:t>
+            </a:r>
+            <a:endParaRPr lang="en-US" sz="1200" dirty="0"/>
+          </a:p>
+        </p:txBody>
+      </p:sp>
+      <p:sp>
+        <p:nvSpPr>
+          <p:cNvPr id="18" name="Text 16"/>
+          <p:cNvSpPr/>
+          <p:nvPr/>
+        </p:nvSpPr>
+        <p:spPr>
+          <a:xfrm>
+            <a:off x="5120640" y="2276856"/>
+            <a:ext cx="3566160" cy="457200"/>
+          </a:xfrm>
+          <a:prstGeom prst="rect">
+            <a:avLst/>
+          </a:prstGeom>
+          <a:noFill/>
+          <a:ln/>
+        </p:spPr>
+        <p:txBody>
+          <a:bodyPr wrap="square" rtlCol="0" anchor="ctr"/>
+          <a:lstStyle/>
+          <a:p>
+            <a:pPr marL="0" indent="0">
+              <a:buNone/>
+            </a:pPr>
+            <a:r>
+              <a:rPr lang="en-US" sz="1100" i="1" dirty="0">
+                <a:solidFill>
+                  <a:srgbClr val="14B8A6"/>
+                </a:solidFill>
+                <a:latin typeface="Calibri" pitchFamily="34" charset="0"/>
+                <a:ea typeface="Calibri" pitchFamily="34" charset="-122"/>
+                <a:cs typeface="Calibri" pitchFamily="34" charset="-120"/>
+              </a:rPr>
+              <a:t>Estacionalidad, días entre compras, categoría de </a:t>
+            </a:r>
+            <a:r>
+              <a:rPr lang="en-US" sz="1100" i="1" dirty="0" err="1">
+                <a:solidFill>
+                  <a:srgbClr val="14B8A6"/>
+                </a:solidFill>
+                <a:latin typeface="Calibri" pitchFamily="34" charset="0"/>
+                <a:ea typeface="Calibri" pitchFamily="34" charset="-122"/>
+                <a:cs typeface="Calibri" pitchFamily="34" charset="-120"/>
+              </a:rPr>
+              <a:t>producto</a:t>
+            </a:r>
+            <a:r>
+              <a:rPr lang="en-US" sz="1100" i="1" dirty="0">
+                <a:solidFill>
+                  <a:srgbClr val="14B8A6"/>
+                </a:solidFill>
+                <a:latin typeface="Calibri" pitchFamily="34" charset="0"/>
+                <a:ea typeface="Calibri" pitchFamily="34" charset="-122"/>
+                <a:cs typeface="Calibri" pitchFamily="34" charset="-120"/>
+              </a:rPr>
+              <a:t> </a:t>
+            </a:r>
+            <a:r>
+              <a:rPr lang="en-US" sz="1100" i="1" dirty="0" err="1">
+                <a:solidFill>
+                  <a:srgbClr val="14B8A6"/>
+                </a:solidFill>
+                <a:latin typeface="Calibri" pitchFamily="34" charset="0"/>
+                <a:ea typeface="Calibri" pitchFamily="34" charset="-122"/>
+                <a:cs typeface="Calibri" pitchFamily="34" charset="-120"/>
+              </a:rPr>
+              <a:t>preferida</a:t>
+            </a:r>
+            <a:r>
+              <a:rPr lang="en-US" sz="1100" i="1" dirty="0">
+                <a:solidFill>
+                  <a:srgbClr val="14B8A6"/>
+                </a:solidFill>
+                <a:latin typeface="Calibri" pitchFamily="34" charset="0"/>
+                <a:ea typeface="Calibri" pitchFamily="34" charset="-122"/>
+                <a:cs typeface="Calibri" pitchFamily="34" charset="-120"/>
+              </a:rPr>
+              <a:t>…</a:t>
+            </a:r>
+            <a:endParaRPr lang="en-US" sz="1100" dirty="0"/>
+          </a:p>
+        </p:txBody>
+      </p:sp>
+      <p:sp>
+        <p:nvSpPr>
+          <p:cNvPr id="19" name="Shape 17"/>
+          <p:cNvSpPr/>
+          <p:nvPr/>
+        </p:nvSpPr>
+        <p:spPr>
+          <a:xfrm>
+            <a:off x="4983480" y="2926080"/>
+            <a:ext cx="3840480" cy="868680"/>
+          </a:xfrm>
+          <a:prstGeom prst="rect">
+            <a:avLst/>
+          </a:prstGeom>
+          <a:solidFill>
+            <a:srgbClr val="FFFFFF">
+              <a:alpha val="90000"/>
+            </a:srgbClr>
+          </a:solidFill>
+          <a:ln w="12700">
+            <a:solidFill>
+              <a:srgbClr val="FFFFFF">
+                <a:alpha val="40000"/>
+              </a:srgbClr>
+            </a:solidFill>
+            <a:prstDash val="solid"/>
+          </a:ln>
+        </p:spPr>
+        <p:txBody>
+          <a:bodyPr/>
+          <a:lstStyle/>
+          <a:p>
+            <a:endParaRPr lang="es-ES"/>
+          </a:p>
+        </p:txBody>
+      </p:sp>
+      <p:sp>
+        <p:nvSpPr>
+          <p:cNvPr id="20" name="Text 18"/>
+          <p:cNvSpPr/>
+          <p:nvPr/>
+        </p:nvSpPr>
+        <p:spPr>
+          <a:xfrm>
+            <a:off x="5120640" y="2944368"/>
+            <a:ext cx="3566160" cy="292608"/>
+          </a:xfrm>
+          <a:prstGeom prst="rect">
+            <a:avLst/>
+          </a:prstGeom>
+          <a:noFill/>
+          <a:ln/>
+        </p:spPr>
+        <p:txBody>
+          <a:bodyPr wrap="square" rtlCol="0" anchor="ctr"/>
+          <a:lstStyle/>
+          <a:p>
+            <a:pPr marL="0" indent="0">
+              <a:buNone/>
+            </a:pPr>
+            <a:r>
+              <a:rPr lang="en-US" sz="1200" b="1" dirty="0">
+                <a:solidFill>
+                  <a:srgbClr val="FFFFFF"/>
+                </a:solidFill>
+                <a:latin typeface="Calibri" pitchFamily="34" charset="0"/>
+                <a:ea typeface="Calibri" pitchFamily="34" charset="-122"/>
+                <a:cs typeface="Calibri" pitchFamily="34" charset="-120"/>
+              </a:rPr>
+              <a:t>♻️ </a:t>
+            </a:r>
+            <a:r>
+              <a:rPr lang="en-US" sz="1200" b="1" dirty="0">
+                <a:latin typeface="Calibri" pitchFamily="34" charset="0"/>
+                <a:ea typeface="Calibri" pitchFamily="34" charset="-122"/>
+                <a:cs typeface="Calibri" pitchFamily="34" charset="-120"/>
+              </a:rPr>
+              <a:t>Reentrenamiento periódico</a:t>
+            </a:r>
+            <a:endParaRPr lang="en-US" sz="1200" dirty="0"/>
+          </a:p>
+        </p:txBody>
+      </p:sp>
+      <p:sp>
+        <p:nvSpPr>
+          <p:cNvPr id="21" name="Text 19"/>
+          <p:cNvSpPr/>
+          <p:nvPr/>
+        </p:nvSpPr>
+        <p:spPr>
+          <a:xfrm>
+            <a:off x="5120640" y="3236976"/>
+            <a:ext cx="3566160" cy="457200"/>
+          </a:xfrm>
+          <a:prstGeom prst="rect">
+            <a:avLst/>
+          </a:prstGeom>
+          <a:noFill/>
+          <a:ln/>
+        </p:spPr>
+        <p:txBody>
+          <a:bodyPr wrap="square" rtlCol="0" anchor="ctr"/>
+          <a:lstStyle/>
+          <a:p>
+            <a:pPr marL="0" indent="0">
+              <a:buNone/>
+            </a:pPr>
+            <a:r>
+              <a:rPr lang="en-US" sz="1100" i="1" dirty="0">
+                <a:solidFill>
+                  <a:srgbClr val="14B8A6"/>
+                </a:solidFill>
+                <a:latin typeface="Calibri" pitchFamily="34" charset="0"/>
+                <a:ea typeface="Calibri" pitchFamily="34" charset="-122"/>
+                <a:cs typeface="Calibri" pitchFamily="34" charset="-120"/>
+              </a:rPr>
+              <a:t>El comportamiento de los clientes cambia. Programar reentrenamiento mensual o trimestral.</a:t>
+            </a:r>
+            <a:endParaRPr lang="en-US" sz="1100" dirty="0"/>
+          </a:p>
+        </p:txBody>
+      </p:sp>
+      <p:sp>
+        <p:nvSpPr>
+          <p:cNvPr id="22" name="Shape 20"/>
+          <p:cNvSpPr/>
+          <p:nvPr/>
+        </p:nvSpPr>
+        <p:spPr>
+          <a:xfrm>
+            <a:off x="4983480" y="3886200"/>
+            <a:ext cx="3840480" cy="868680"/>
+          </a:xfrm>
+          <a:prstGeom prst="rect">
+            <a:avLst/>
+          </a:prstGeom>
+          <a:solidFill>
+            <a:srgbClr val="FFFFFF">
+              <a:alpha val="90000"/>
+            </a:srgbClr>
+          </a:solidFill>
+          <a:ln w="12700">
+            <a:solidFill>
+              <a:srgbClr val="FFFFFF">
+                <a:alpha val="40000"/>
+              </a:srgbClr>
+            </a:solidFill>
+            <a:prstDash val="solid"/>
+          </a:ln>
+        </p:spPr>
+        <p:txBody>
+          <a:bodyPr/>
+          <a:lstStyle/>
+          <a:p>
+            <a:endParaRPr lang="es-ES"/>
+          </a:p>
+        </p:txBody>
+      </p:sp>
+      <p:sp>
+        <p:nvSpPr>
+          <p:cNvPr id="23" name="Text 21"/>
+          <p:cNvSpPr/>
+          <p:nvPr/>
+        </p:nvSpPr>
+        <p:spPr>
+          <a:xfrm>
+            <a:off x="5120640" y="3904488"/>
+            <a:ext cx="3566160" cy="292608"/>
+          </a:xfrm>
+          <a:prstGeom prst="rect">
+            <a:avLst/>
+          </a:prstGeom>
+          <a:noFill/>
+          <a:ln/>
+        </p:spPr>
+        <p:txBody>
+          <a:bodyPr wrap="square" rtlCol="0" anchor="ctr"/>
+          <a:lstStyle/>
+          <a:p>
+            <a:pPr marL="0" indent="0">
+              <a:buNone/>
+            </a:pPr>
+            <a:r>
+              <a:rPr lang="en-US" sz="1200" b="1" dirty="0">
+                <a:solidFill>
+                  <a:srgbClr val="FFFFFF"/>
+                </a:solidFill>
+                <a:latin typeface="Calibri" pitchFamily="34" charset="0"/>
+                <a:ea typeface="Calibri" pitchFamily="34" charset="-122"/>
+                <a:cs typeface="Calibri" pitchFamily="34" charset="-120"/>
+              </a:rPr>
+              <a:t>👥 </a:t>
+            </a:r>
+            <a:r>
+              <a:rPr lang="en-US" sz="1200" b="1" dirty="0" err="1">
+                <a:latin typeface="Calibri" pitchFamily="34" charset="0"/>
+                <a:ea typeface="Calibri" pitchFamily="34" charset="-122"/>
+                <a:cs typeface="Calibri" pitchFamily="34" charset="-120"/>
+              </a:rPr>
+              <a:t>Segmentación</a:t>
+            </a:r>
+            <a:r>
+              <a:rPr lang="en-US" sz="1200" b="1" dirty="0">
+                <a:latin typeface="Calibri" pitchFamily="34" charset="0"/>
+                <a:ea typeface="Calibri" pitchFamily="34" charset="-122"/>
+                <a:cs typeface="Calibri" pitchFamily="34" charset="-120"/>
+              </a:rPr>
+              <a:t> de </a:t>
+            </a:r>
+            <a:r>
+              <a:rPr lang="en-US" sz="1200" b="1" dirty="0" err="1">
+                <a:latin typeface="Calibri" pitchFamily="34" charset="0"/>
+                <a:ea typeface="Calibri" pitchFamily="34" charset="-122"/>
+                <a:cs typeface="Calibri" pitchFamily="34" charset="-120"/>
+              </a:rPr>
+              <a:t>clientes</a:t>
+            </a:r>
+            <a:endParaRPr lang="en-US" sz="1200" dirty="0"/>
+          </a:p>
+        </p:txBody>
+      </p:sp>
+      <p:sp>
+        <p:nvSpPr>
+          <p:cNvPr id="24" name="Text 22"/>
+          <p:cNvSpPr/>
+          <p:nvPr/>
+        </p:nvSpPr>
+        <p:spPr>
+          <a:xfrm>
+            <a:off x="5120640" y="4197096"/>
+            <a:ext cx="3566160" cy="457200"/>
+          </a:xfrm>
+          <a:prstGeom prst="rect">
+            <a:avLst/>
+          </a:prstGeom>
+          <a:noFill/>
+          <a:ln/>
+        </p:spPr>
+        <p:txBody>
+          <a:bodyPr wrap="square" rtlCol="0" anchor="ctr"/>
+          <a:lstStyle/>
+          <a:p>
+            <a:pPr marL="0" indent="0">
+              <a:buNone/>
+            </a:pPr>
+            <a:r>
+              <a:rPr lang="en-US" sz="1100" i="1" dirty="0">
+                <a:solidFill>
+                  <a:srgbClr val="14B8A6"/>
+                </a:solidFill>
+                <a:latin typeface="Calibri" pitchFamily="34" charset="0"/>
+                <a:ea typeface="Calibri" pitchFamily="34" charset="-122"/>
+                <a:cs typeface="Calibri" pitchFamily="34" charset="-120"/>
+              </a:rPr>
+              <a:t>Construir modelos separados para perfiles de compra </a:t>
+            </a:r>
+            <a:r>
+              <a:rPr lang="en-US" sz="1100" i="1" dirty="0" err="1">
+                <a:solidFill>
+                  <a:srgbClr val="14B8A6"/>
+                </a:solidFill>
+                <a:latin typeface="Calibri" pitchFamily="34" charset="0"/>
+                <a:ea typeface="Calibri" pitchFamily="34" charset="-122"/>
+                <a:cs typeface="Calibri" pitchFamily="34" charset="-120"/>
+              </a:rPr>
+              <a:t>muy</a:t>
+            </a:r>
+            <a:r>
+              <a:rPr lang="en-US" sz="1100" i="1" dirty="0">
+                <a:solidFill>
+                  <a:srgbClr val="14B8A6"/>
+                </a:solidFill>
+                <a:latin typeface="Calibri" pitchFamily="34" charset="0"/>
+                <a:ea typeface="Calibri" pitchFamily="34" charset="-122"/>
+                <a:cs typeface="Calibri" pitchFamily="34" charset="-120"/>
+              </a:rPr>
+              <a:t> </a:t>
+            </a:r>
+            <a:r>
+              <a:rPr lang="en-US" sz="1100" i="1" dirty="0" err="1">
+                <a:solidFill>
+                  <a:srgbClr val="14B8A6"/>
+                </a:solidFill>
+                <a:latin typeface="Calibri" pitchFamily="34" charset="0"/>
+                <a:ea typeface="Calibri" pitchFamily="34" charset="-122"/>
+                <a:cs typeface="Calibri" pitchFamily="34" charset="-120"/>
+              </a:rPr>
+              <a:t>distintos</a:t>
+            </a:r>
+            <a:r>
+              <a:rPr lang="en-US" sz="1100" i="1" dirty="0">
+                <a:solidFill>
+                  <a:srgbClr val="14B8A6"/>
+                </a:solidFill>
+                <a:latin typeface="Calibri" pitchFamily="34" charset="0"/>
+                <a:ea typeface="Calibri" pitchFamily="34" charset="-122"/>
+                <a:cs typeface="Calibri" pitchFamily="34" charset="-120"/>
+              </a:rPr>
+              <a:t> (</a:t>
+            </a:r>
+            <a:r>
+              <a:rPr lang="en-US" sz="1100" i="1" dirty="0" err="1">
+                <a:solidFill>
+                  <a:srgbClr val="14B8A6"/>
+                </a:solidFill>
+                <a:latin typeface="Calibri" pitchFamily="34" charset="0"/>
+                <a:ea typeface="Calibri" pitchFamily="34" charset="-122"/>
+                <a:cs typeface="Calibri" pitchFamily="34" charset="-120"/>
+              </a:rPr>
+              <a:t>compras</a:t>
+            </a:r>
+            <a:r>
+              <a:rPr lang="en-US" sz="1100" i="1" dirty="0">
+                <a:solidFill>
+                  <a:srgbClr val="14B8A6"/>
+                </a:solidFill>
+                <a:latin typeface="Calibri" pitchFamily="34" charset="0"/>
+                <a:ea typeface="Calibri" pitchFamily="34" charset="-122"/>
+                <a:cs typeface="Calibri" pitchFamily="34" charset="-120"/>
+              </a:rPr>
+              <a:t> </a:t>
+            </a:r>
+            <a:r>
+              <a:rPr lang="en-US" sz="1100" i="1" dirty="0" err="1">
+                <a:solidFill>
+                  <a:srgbClr val="14B8A6"/>
+                </a:solidFill>
+                <a:latin typeface="Calibri" pitchFamily="34" charset="0"/>
+                <a:ea typeface="Calibri" pitchFamily="34" charset="-122"/>
+                <a:cs typeface="Calibri" pitchFamily="34" charset="-120"/>
+              </a:rPr>
+              <a:t>minoristas</a:t>
+            </a:r>
+            <a:r>
+              <a:rPr lang="en-US" sz="1100" i="1" dirty="0">
+                <a:solidFill>
+                  <a:srgbClr val="14B8A6"/>
+                </a:solidFill>
+                <a:latin typeface="Calibri" pitchFamily="34" charset="0"/>
+                <a:ea typeface="Calibri" pitchFamily="34" charset="-122"/>
+                <a:cs typeface="Calibri" pitchFamily="34" charset="-120"/>
+              </a:rPr>
+              <a:t> y </a:t>
+            </a:r>
+            <a:r>
+              <a:rPr lang="en-US" sz="1100" i="1" dirty="0" err="1">
+                <a:solidFill>
+                  <a:srgbClr val="14B8A6"/>
+                </a:solidFill>
+                <a:latin typeface="Calibri" pitchFamily="34" charset="0"/>
+                <a:ea typeface="Calibri" pitchFamily="34" charset="-122"/>
+                <a:cs typeface="Calibri" pitchFamily="34" charset="-120"/>
+              </a:rPr>
+              <a:t>mayoristas</a:t>
+            </a:r>
+            <a:r>
+              <a:rPr lang="en-US" sz="1100" i="1" dirty="0">
+                <a:solidFill>
+                  <a:srgbClr val="14B8A6"/>
+                </a:solidFill>
+                <a:latin typeface="Calibri" pitchFamily="34" charset="0"/>
+                <a:ea typeface="Calibri" pitchFamily="34" charset="-122"/>
+                <a:cs typeface="Calibri" pitchFamily="34" charset="-120"/>
+              </a:rPr>
+              <a:t>).</a:t>
+            </a:r>
+            <a:endParaRPr lang="en-US" sz="1100" dirty="0"/>
           </a:p>
         </p:txBody>
       </p:sp>
